--- a/presentation/hunarmand.pptx
+++ b/presentation/hunarmand.pptx
@@ -5827,8 +5827,8 @@
         </p:nvCxnSpPr>
         <p:spPr>
           <a:xfrm>
-            <a:off x="1154755" y="1307156"/>
-            <a:ext cx="2891074" cy="1357928"/>
+            <a:off x="1154776" y="1489991"/>
+            <a:ext cx="2799588" cy="1312307"/>
           </a:xfrm>
           <a:prstGeom prst="line">
             <a:avLst/>
@@ -5862,8 +5862,8 @@
         </p:nvCxnSpPr>
         <p:spPr>
           <a:xfrm>
-            <a:off x="4183770" y="2729875"/>
-            <a:ext cx="2891074" cy="1357928"/>
+            <a:off x="4092767" y="2866090"/>
+            <a:ext cx="2798833" cy="1268221"/>
           </a:xfrm>
           <a:prstGeom prst="line">
             <a:avLst/>
@@ -5897,8 +5897,8 @@
         </p:nvCxnSpPr>
         <p:spPr>
           <a:xfrm>
-            <a:off x="7189795" y="4141796"/>
-            <a:ext cx="2902569" cy="1363327"/>
+            <a:off x="7005827" y="4189720"/>
+            <a:ext cx="2447545" cy="1267479"/>
           </a:xfrm>
           <a:prstGeom prst="line">
             <a:avLst/>
@@ -5932,7 +5932,7 @@
         </p:nvSpPr>
         <p:spPr>
           <a:xfrm>
-            <a:off x="1033780" y="1216660"/>
+            <a:off x="1033780" y="1399540"/>
             <a:ext cx="127000" cy="127000"/>
           </a:xfrm>
           <a:prstGeom prst="ellipse">
@@ -5976,7 +5976,7 @@
         </p:nvSpPr>
         <p:spPr>
           <a:xfrm>
-            <a:off x="1361948" y="987551"/>
+            <a:off x="1361948" y="1170432"/>
             <a:ext cx="10281107" cy="292608"/>
           </a:xfrm>
           <a:prstGeom prst="rect">
@@ -6011,7 +6011,7 @@
         </p:nvSpPr>
         <p:spPr>
           <a:xfrm>
-            <a:off x="1361948" y="1243584"/>
+            <a:off x="1361948" y="1426464"/>
             <a:ext cx="10281107" cy="292608"/>
           </a:xfrm>
           <a:prstGeom prst="rect">
@@ -6046,7 +6046,7 @@
         </p:nvSpPr>
         <p:spPr>
           <a:xfrm>
-            <a:off x="4038600" y="2621280"/>
+            <a:off x="3947160" y="2758440"/>
             <a:ext cx="152400" cy="152400"/>
           </a:xfrm>
           <a:prstGeom prst="ellipse">
@@ -6090,8 +6090,8 @@
         </p:nvSpPr>
         <p:spPr>
           <a:xfrm>
-            <a:off x="4392167" y="2404872"/>
-            <a:ext cx="7250887" cy="292608"/>
+            <a:off x="4300728" y="2542032"/>
+            <a:ext cx="7342327" cy="292608"/>
           </a:xfrm>
           <a:prstGeom prst="rect">
             <a:avLst/>
@@ -6125,8 +6125,8 @@
         </p:nvSpPr>
         <p:spPr>
           <a:xfrm>
-            <a:off x="4392167" y="2660904"/>
-            <a:ext cx="7250887" cy="292608"/>
+            <a:off x="4300728" y="2798064"/>
+            <a:ext cx="7342327" cy="292608"/>
           </a:xfrm>
           <a:prstGeom prst="rect">
             <a:avLst/>
@@ -6160,7 +6160,7 @@
         </p:nvSpPr>
         <p:spPr>
           <a:xfrm>
-            <a:off x="7068820" y="4051300"/>
+            <a:off x="6885939" y="4097019"/>
             <a:ext cx="127000" cy="127000"/>
           </a:xfrm>
           <a:prstGeom prst="ellipse">
@@ -6204,8 +6204,8 @@
         </p:nvSpPr>
         <p:spPr>
           <a:xfrm>
-            <a:off x="7396988" y="3822191"/>
-            <a:ext cx="4246067" cy="292608"/>
+            <a:off x="7214108" y="3867911"/>
+            <a:ext cx="4428947" cy="292608"/>
           </a:xfrm>
           <a:prstGeom prst="rect">
             <a:avLst/>
@@ -6239,8 +6239,8 @@
         </p:nvSpPr>
         <p:spPr>
           <a:xfrm>
-            <a:off x="7396988" y="4078224"/>
-            <a:ext cx="4246067" cy="292608"/>
+            <a:off x="7214108" y="4123944"/>
+            <a:ext cx="4428947" cy="292608"/>
           </a:xfrm>
           <a:prstGeom prst="rect">
             <a:avLst/>
@@ -6261,7 +6261,7 @@
                 </a:solidFill>
                 <a:latin typeface="JetBrains Mono Light"/>
               </a:rPr>
-              <a:t>sells the master's own time, not a middleman's</a:t>
+              <a:t>sells the master's own time, not the middleman's</a:t>
             </a:r>
           </a:p>
         </p:txBody>
@@ -6274,7 +6274,7 @@
         </p:nvSpPr>
         <p:spPr>
           <a:xfrm>
-            <a:off x="10086340" y="5468620"/>
+            <a:off x="9446260" y="5422900"/>
             <a:ext cx="127000" cy="127000"/>
           </a:xfrm>
           <a:prstGeom prst="ellipse">
@@ -6318,8 +6318,8 @@
         </p:nvSpPr>
         <p:spPr>
           <a:xfrm>
-            <a:off x="10414508" y="5239512"/>
-            <a:ext cx="1828800" cy="292608"/>
+            <a:off x="9774428" y="5193792"/>
+            <a:ext cx="1868627" cy="292608"/>
           </a:xfrm>
           <a:prstGeom prst="rect">
             <a:avLst/>
@@ -6353,8 +6353,8 @@
         </p:nvSpPr>
         <p:spPr>
           <a:xfrm>
-            <a:off x="10414508" y="5495544"/>
-            <a:ext cx="1828800" cy="292608"/>
+            <a:off x="9774428" y="5449824"/>
+            <a:ext cx="1868627" cy="292608"/>
           </a:xfrm>
           <a:prstGeom prst="rect">
             <a:avLst/>
@@ -6375,7 +6375,7 @@
                 </a:solidFill>
                 <a:latin typeface="JetBrains Mono Light"/>
               </a:rPr>
-              <a:t>sells the verified object, provenance attached</a:t>
+              <a:t>sells the object, with provenance attached</a:t>
             </a:r>
           </a:p>
         </p:txBody>
@@ -6388,8 +6388,8 @@
         </p:nvCxnSpPr>
         <p:spPr>
           <a:xfrm>
-            <a:off x="3931920" y="1463040"/>
-            <a:ext cx="1280159" cy="0"/>
+            <a:off x="8778240" y="868680"/>
+            <a:ext cx="1280160" cy="0"/>
           </a:xfrm>
           <a:prstGeom prst="line">
             <a:avLst/>
@@ -6423,7 +6423,7 @@
         </p:nvSpPr>
         <p:spPr>
           <a:xfrm>
-            <a:off x="3931920" y="1536192"/>
+            <a:off x="8778240" y="941832"/>
             <a:ext cx="2377440" cy="292608"/>
           </a:xfrm>
           <a:prstGeom prst="rect">
@@ -6458,8 +6458,8 @@
         </p:nvSpPr>
         <p:spPr>
           <a:xfrm>
-            <a:off x="3931920" y="1792224"/>
-            <a:ext cx="4114800" cy="292608"/>
+            <a:off x="8778240" y="1197864"/>
+            <a:ext cx="3017520" cy="640080"/>
           </a:xfrm>
           <a:prstGeom prst="rect">
             <a:avLst/>
@@ -6472,7 +6472,11 @@
           </a:bodyPr>
           <a:lstStyle/>
           <a:p>
-            <a:pPr algn="l"/>
+            <a:pPr algn="l">
+              <a:lnSpc>
+                <a:spcPct val="140000"/>
+              </a:lnSpc>
+            </a:pPr>
             <a:r>
               <a:rPr sz="900" b="0" i="0" spc="60">
                 <a:solidFill>
@@ -6480,14 +6484,66 @@
                 </a:solidFill>
                 <a:latin typeface="JetBrains Mono Light"/>
               </a:rPr>
-              <a:t>provenance is what buyers pay a premium for</a:t>
-            </a:r>
-          </a:p>
-        </p:txBody>
-      </p:sp>
-      <p:sp>
-        <p:nvSpPr>
-          <p:cNvPr id="22" name="TextBox 21"/>
+              <a:t>provenance is what buyers pay</a:t>
+            </a:r>
+          </a:p>
+          <a:p>
+            <a:pPr algn="l">
+              <a:lnSpc>
+                <a:spcPct val="140000"/>
+              </a:lnSpc>
+            </a:pPr>
+            <a:r>
+              <a:rPr sz="900" b="0" i="0" spc="60">
+                <a:solidFill>
+                  <a:srgbClr val="5A4A3A"/>
+                </a:solidFill>
+                <a:latin typeface="JetBrains Mono Light"/>
+              </a:rPr>
+              <a:t>a premium for, today</a:t>
+            </a:r>
+          </a:p>
+        </p:txBody>
+      </p:sp>
+      <p:cxnSp>
+        <p:nvCxnSpPr>
+          <p:cNvPr id="22" name="Connector 21"/>
+          <p:cNvCxnSpPr/>
+          <p:nvPr/>
+        </p:nvCxnSpPr>
+        <p:spPr>
+          <a:xfrm flipH="1">
+            <a:off x="4187952" y="1645919"/>
+            <a:ext cx="4681728" cy="1078993"/>
+          </a:xfrm>
+          <a:prstGeom prst="line">
+            <a:avLst/>
+          </a:prstGeom>
+          <a:ln w="6350">
+            <a:solidFill>
+              <a:srgbClr val="B7B3AE"/>
+            </a:solidFill>
+            <a:prstDash val="sysDot"/>
+          </a:ln>
+        </p:spPr>
+        <p:style>
+          <a:lnRef idx="2">
+            <a:schemeClr val="accent1"/>
+          </a:lnRef>
+          <a:fillRef idx="0">
+            <a:schemeClr val="accent1"/>
+          </a:fillRef>
+          <a:effectRef idx="1">
+            <a:schemeClr val="accent1"/>
+          </a:effectRef>
+          <a:fontRef idx="minor">
+            <a:schemeClr val="tx1"/>
+          </a:fontRef>
+        </p:style>
+      </p:cxnSp>
+      <p:sp>
+        <p:nvSpPr>
+          <p:cNvPr id="23" name="TextBox 22"/>
           <p:cNvSpPr txBox="1"/>
           <p:nvPr/>
         </p:nvSpPr>
@@ -6522,7 +6578,7 @@
       </p:sp>
       <p:sp>
         <p:nvSpPr>
-          <p:cNvPr id="23" name="TextBox 22"/>
+          <p:cNvPr id="24" name="TextBox 23"/>
           <p:cNvSpPr txBox="1"/>
           <p:nvPr/>
         </p:nvSpPr>
@@ -6976,8 +7032,8 @@
         </p:nvSpPr>
         <p:spPr>
           <a:xfrm>
-            <a:off x="365759" y="3200400"/>
-            <a:ext cx="2121408" cy="228600"/>
+            <a:off x="365759" y="4133088"/>
+            <a:ext cx="2075688" cy="228600"/>
           </a:xfrm>
           <a:prstGeom prst="rect">
             <a:avLst/>
@@ -7011,7 +7067,7 @@
         </p:nvSpPr>
         <p:spPr>
           <a:xfrm>
-            <a:off x="2532887" y="4133088"/>
+            <a:off x="2624327" y="4133088"/>
             <a:ext cx="7571231" cy="228600"/>
           </a:xfrm>
           <a:prstGeom prst="rect">
@@ -7739,8 +7795,8 @@
         </p:nvSpPr>
         <p:spPr>
           <a:xfrm>
-            <a:off x="457200" y="2468880"/>
-            <a:ext cx="11277295" cy="502920"/>
+            <a:off x="457200" y="2240280"/>
+            <a:ext cx="11277295" cy="640080"/>
           </a:xfrm>
           <a:prstGeom prst="rect">
             <a:avLst/>
@@ -7755,7 +7811,7 @@
           <a:p>
             <a:pPr algn="ctr"/>
             <a:r>
-              <a:rPr sz="2200" b="0" i="0">
+              <a:rPr sz="2800" b="0" i="0">
                 <a:solidFill>
                   <a:srgbClr val="756F6A"/>
                 </a:solidFill>
@@ -7774,8 +7830,8 @@
         </p:nvSpPr>
         <p:spPr>
           <a:xfrm>
-            <a:off x="457200" y="3063240"/>
-            <a:ext cx="11277295" cy="502920"/>
+            <a:off x="457200" y="2953512"/>
+            <a:ext cx="11277295" cy="640080"/>
           </a:xfrm>
           <a:prstGeom prst="rect">
             <a:avLst/>
@@ -7790,7 +7846,7 @@
           <a:p>
             <a:pPr algn="ctr"/>
             <a:r>
-              <a:rPr sz="2200" b="1" i="0">
+              <a:rPr sz="2800" b="1" i="0">
                 <a:solidFill>
                   <a:srgbClr val="1C1410"/>
                 </a:solidFill>
@@ -7809,7 +7865,7 @@
         </p:nvCxnSpPr>
         <p:spPr>
           <a:xfrm>
-            <a:off x="5455767" y="3977640"/>
+            <a:off x="5455767" y="4050792"/>
             <a:ext cx="1280160" cy="0"/>
           </a:xfrm>
           <a:prstGeom prst="line">
@@ -7844,7 +7900,7 @@
         </p:nvSpPr>
         <p:spPr>
           <a:xfrm>
-            <a:off x="0" y="4251960"/>
+            <a:off x="0" y="4325112"/>
             <a:ext cx="12191695" cy="365760"/>
           </a:xfrm>
           <a:prstGeom prst="rect">
@@ -7879,7 +7935,7 @@
         </p:nvSpPr>
         <p:spPr>
           <a:xfrm>
-            <a:off x="0" y="4690872"/>
+            <a:off x="0" y="4764024"/>
             <a:ext cx="12191695" cy="274320"/>
           </a:xfrm>
           <a:prstGeom prst="rect">

--- a/presentation/hunarmand.pptx
+++ b/presentation/hunarmand.pptx
@@ -11,7 +11,6 @@
     <p:sldId id="259" r:id="rId10"/>
     <p:sldId id="260" r:id="rId11"/>
     <p:sldId id="261" r:id="rId12"/>
-    <p:sldId id="262" r:id="rId13"/>
   </p:sldIdLst>
   <p:sldSz cx="12191695" cy="6858000" type="screen4x3"/>
   <p:notesSz cx="6858000" cy="9144000"/>
@@ -3286,7 +3285,728 @@
         </p:nvSpPr>
         <p:spPr>
           <a:xfrm>
-            <a:off x="6522415" y="3017520"/>
+            <a:off x="548640" y="3977639"/>
+            <a:ext cx="7315200" cy="777240"/>
+          </a:xfrm>
+          <a:prstGeom prst="rect">
+            <a:avLst/>
+          </a:prstGeom>
+          <a:noFill/>
+        </p:spPr>
+        <p:txBody>
+          <a:bodyPr wrap="square" lIns="0" rIns="0" tIns="0" bIns="0" anchor="t">
+            <a:noAutofit/>
+          </a:bodyPr>
+          <a:lstStyle/>
+          <a:p>
+            <a:pPr algn="l">
+              <a:lnSpc>
+                <a:spcPct val="145000"/>
+              </a:lnSpc>
+            </a:pPr>
+            <a:r>
+              <a:rPr sz="1400" b="0" i="0">
+                <a:solidFill>
+                  <a:srgbClr val="5A4A3A"/>
+                </a:solidFill>
+                <a:latin typeface="JetBrains Mono Light"/>
+              </a:rPr>
+              <a:t>we treat what the master never wrote down</a:t>
+            </a:r>
+          </a:p>
+          <a:p>
+            <a:pPr algn="l">
+              <a:lnSpc>
+                <a:spcPct val="145000"/>
+              </a:lnSpc>
+            </a:pPr>
+            <a:r>
+              <a:rPr sz="1400" b="0" i="0">
+                <a:solidFill>
+                  <a:srgbClr val="5A4A3A"/>
+                </a:solidFill>
+                <a:latin typeface="JetBrains Mono Light"/>
+              </a:rPr>
+              <a:t>as captureable, queryable, ownable infrastructure.</a:t>
+            </a:r>
+          </a:p>
+        </p:txBody>
+      </p:sp>
+      <p:cxnSp>
+        <p:nvCxnSpPr>
+          <p:cNvPr id="8" name="Connector 7"/>
+          <p:cNvCxnSpPr/>
+          <p:nvPr/>
+        </p:nvCxnSpPr>
+        <p:spPr>
+          <a:xfrm>
+            <a:off x="10608041" y="1484607"/>
+            <a:ext cx="169934" cy="156514"/>
+          </a:xfrm>
+          <a:prstGeom prst="line">
+            <a:avLst/>
+          </a:prstGeom>
+          <a:ln w="10160">
+            <a:solidFill>
+              <a:srgbClr val="1C1410"/>
+            </a:solidFill>
+          </a:ln>
+        </p:spPr>
+        <p:style>
+          <a:lnRef idx="2">
+            <a:schemeClr val="accent1"/>
+          </a:lnRef>
+          <a:fillRef idx="0">
+            <a:schemeClr val="accent1"/>
+          </a:fillRef>
+          <a:effectRef idx="1">
+            <a:schemeClr val="accent1"/>
+          </a:effectRef>
+          <a:fontRef idx="minor">
+            <a:schemeClr val="tx1"/>
+          </a:fontRef>
+        </p:style>
+      </p:cxnSp>
+      <p:cxnSp>
+        <p:nvCxnSpPr>
+          <p:cNvPr id="9" name="Connector 8"/>
+          <p:cNvCxnSpPr/>
+          <p:nvPr/>
+        </p:nvCxnSpPr>
+        <p:spPr>
+          <a:xfrm>
+            <a:off x="10738372" y="1628653"/>
+            <a:ext cx="119000" cy="221483"/>
+          </a:xfrm>
+          <a:prstGeom prst="line">
+            <a:avLst/>
+          </a:prstGeom>
+          <a:ln w="10160">
+            <a:solidFill>
+              <a:srgbClr val="1C1410"/>
+            </a:solidFill>
+          </a:ln>
+        </p:spPr>
+        <p:style>
+          <a:lnRef idx="2">
+            <a:schemeClr val="accent1"/>
+          </a:lnRef>
+          <a:fillRef idx="0">
+            <a:schemeClr val="accent1"/>
+          </a:fillRef>
+          <a:effectRef idx="1">
+            <a:schemeClr val="accent1"/>
+          </a:effectRef>
+          <a:fontRef idx="minor">
+            <a:schemeClr val="tx1"/>
+          </a:fontRef>
+        </p:style>
+      </p:cxnSp>
+      <p:cxnSp>
+        <p:nvCxnSpPr>
+          <p:cNvPr id="10" name="Connector 9"/>
+          <p:cNvCxnSpPr/>
+          <p:nvPr/>
+        </p:nvCxnSpPr>
+        <p:spPr>
+          <a:xfrm>
+            <a:off x="10614533" y="2000321"/>
+            <a:ext cx="102719" cy="131851"/>
+          </a:xfrm>
+          <a:prstGeom prst="line">
+            <a:avLst/>
+          </a:prstGeom>
+          <a:ln w="10160">
+            <a:solidFill>
+              <a:srgbClr val="1C1410"/>
+            </a:solidFill>
+          </a:ln>
+        </p:spPr>
+        <p:style>
+          <a:lnRef idx="2">
+            <a:schemeClr val="accent1"/>
+          </a:lnRef>
+          <a:fillRef idx="0">
+            <a:schemeClr val="accent1"/>
+          </a:fillRef>
+          <a:effectRef idx="1">
+            <a:schemeClr val="accent1"/>
+          </a:effectRef>
+          <a:fontRef idx="minor">
+            <a:schemeClr val="tx1"/>
+          </a:fontRef>
+        </p:style>
+      </p:cxnSp>
+      <p:cxnSp>
+        <p:nvCxnSpPr>
+          <p:cNvPr id="11" name="Connector 10"/>
+          <p:cNvCxnSpPr/>
+          <p:nvPr/>
+        </p:nvCxnSpPr>
+        <p:spPr>
+          <a:xfrm>
+            <a:off x="10707855" y="2145799"/>
+            <a:ext cx="126256" cy="177171"/>
+          </a:xfrm>
+          <a:prstGeom prst="line">
+            <a:avLst/>
+          </a:prstGeom>
+          <a:ln w="10160">
+            <a:solidFill>
+              <a:srgbClr val="1C1410"/>
+            </a:solidFill>
+          </a:ln>
+        </p:spPr>
+        <p:style>
+          <a:lnRef idx="2">
+            <a:schemeClr val="accent1"/>
+          </a:lnRef>
+          <a:fillRef idx="0">
+            <a:schemeClr val="accent1"/>
+          </a:fillRef>
+          <a:effectRef idx="1">
+            <a:schemeClr val="accent1"/>
+          </a:effectRef>
+          <a:fontRef idx="minor">
+            <a:schemeClr val="tx1"/>
+          </a:fontRef>
+        </p:style>
+      </p:cxnSp>
+      <p:cxnSp>
+        <p:nvCxnSpPr>
+          <p:cNvPr id="12" name="Connector 11"/>
+          <p:cNvCxnSpPr/>
+          <p:nvPr/>
+        </p:nvCxnSpPr>
+        <p:spPr>
+          <a:xfrm>
+            <a:off x="10627419" y="2512666"/>
+            <a:ext cx="130783" cy="145261"/>
+          </a:xfrm>
+          <a:prstGeom prst="line">
+            <a:avLst/>
+          </a:prstGeom>
+          <a:ln w="10160">
+            <a:solidFill>
+              <a:srgbClr val="1C1410"/>
+            </a:solidFill>
+          </a:ln>
+        </p:spPr>
+        <p:style>
+          <a:lnRef idx="2">
+            <a:schemeClr val="accent1"/>
+          </a:lnRef>
+          <a:fillRef idx="0">
+            <a:schemeClr val="accent1"/>
+          </a:fillRef>
+          <a:effectRef idx="1">
+            <a:schemeClr val="accent1"/>
+          </a:effectRef>
+          <a:fontRef idx="minor">
+            <a:schemeClr val="tx1"/>
+          </a:fontRef>
+        </p:style>
+      </p:cxnSp>
+      <p:cxnSp>
+        <p:nvCxnSpPr>
+          <p:cNvPr id="13" name="Connector 12"/>
+          <p:cNvCxnSpPr/>
+          <p:nvPr/>
+        </p:nvCxnSpPr>
+        <p:spPr>
+          <a:xfrm>
+            <a:off x="10712744" y="2597856"/>
+            <a:ext cx="128913" cy="229165"/>
+          </a:xfrm>
+          <a:prstGeom prst="line">
+            <a:avLst/>
+          </a:prstGeom>
+          <a:ln w="10160">
+            <a:solidFill>
+              <a:srgbClr val="1C1410"/>
+            </a:solidFill>
+          </a:ln>
+        </p:spPr>
+        <p:style>
+          <a:lnRef idx="2">
+            <a:schemeClr val="accent1"/>
+          </a:lnRef>
+          <a:fillRef idx="0">
+            <a:schemeClr val="accent1"/>
+          </a:fillRef>
+          <a:effectRef idx="1">
+            <a:schemeClr val="accent1"/>
+          </a:effectRef>
+          <a:fontRef idx="minor">
+            <a:schemeClr val="tx1"/>
+          </a:fontRef>
+        </p:style>
+      </p:cxnSp>
+      <p:cxnSp>
+        <p:nvCxnSpPr>
+          <p:cNvPr id="14" name="Connector 13"/>
+          <p:cNvCxnSpPr/>
+          <p:nvPr/>
+        </p:nvCxnSpPr>
+        <p:spPr>
+          <a:xfrm>
+            <a:off x="10598452" y="2975929"/>
+            <a:ext cx="114115" cy="173826"/>
+          </a:xfrm>
+          <a:prstGeom prst="line">
+            <a:avLst/>
+          </a:prstGeom>
+          <a:ln w="10160">
+            <a:solidFill>
+              <a:srgbClr val="1C1410"/>
+            </a:solidFill>
+          </a:ln>
+        </p:spPr>
+        <p:style>
+          <a:lnRef idx="2">
+            <a:schemeClr val="accent1"/>
+          </a:lnRef>
+          <a:fillRef idx="0">
+            <a:schemeClr val="accent1"/>
+          </a:fillRef>
+          <a:effectRef idx="1">
+            <a:schemeClr val="accent1"/>
+          </a:effectRef>
+          <a:fontRef idx="minor">
+            <a:schemeClr val="tx1"/>
+          </a:fontRef>
+        </p:style>
+      </p:cxnSp>
+      <p:cxnSp>
+        <p:nvCxnSpPr>
+          <p:cNvPr id="15" name="Connector 14"/>
+          <p:cNvCxnSpPr/>
+          <p:nvPr/>
+        </p:nvCxnSpPr>
+        <p:spPr>
+          <a:xfrm>
+            <a:off x="10733448" y="3153738"/>
+            <a:ext cx="108632" cy="213375"/>
+          </a:xfrm>
+          <a:prstGeom prst="line">
+            <a:avLst/>
+          </a:prstGeom>
+          <a:ln w="10160">
+            <a:solidFill>
+              <a:srgbClr val="1C1410"/>
+            </a:solidFill>
+          </a:ln>
+        </p:spPr>
+        <p:style>
+          <a:lnRef idx="2">
+            <a:schemeClr val="accent1"/>
+          </a:lnRef>
+          <a:fillRef idx="0">
+            <a:schemeClr val="accent1"/>
+          </a:fillRef>
+          <a:effectRef idx="1">
+            <a:schemeClr val="accent1"/>
+          </a:effectRef>
+          <a:fontRef idx="minor">
+            <a:schemeClr val="tx1"/>
+          </a:fontRef>
+        </p:style>
+      </p:cxnSp>
+      <p:cxnSp>
+        <p:nvCxnSpPr>
+          <p:cNvPr id="16" name="Connector 15"/>
+          <p:cNvCxnSpPr/>
+          <p:nvPr/>
+        </p:nvCxnSpPr>
+        <p:spPr>
+          <a:xfrm>
+            <a:off x="10609774" y="3501920"/>
+            <a:ext cx="134047" cy="137166"/>
+          </a:xfrm>
+          <a:prstGeom prst="line">
+            <a:avLst/>
+          </a:prstGeom>
+          <a:ln w="10160">
+            <a:solidFill>
+              <a:srgbClr val="1C1410"/>
+            </a:solidFill>
+          </a:ln>
+        </p:spPr>
+        <p:style>
+          <a:lnRef idx="2">
+            <a:schemeClr val="accent1"/>
+          </a:lnRef>
+          <a:fillRef idx="0">
+            <a:schemeClr val="accent1"/>
+          </a:fillRef>
+          <a:effectRef idx="1">
+            <a:schemeClr val="accent1"/>
+          </a:effectRef>
+          <a:fontRef idx="minor">
+            <a:schemeClr val="tx1"/>
+          </a:fontRef>
+        </p:style>
+      </p:cxnSp>
+      <p:cxnSp>
+        <p:nvCxnSpPr>
+          <p:cNvPr id="17" name="Connector 16"/>
+          <p:cNvCxnSpPr/>
+          <p:nvPr/>
+        </p:nvCxnSpPr>
+        <p:spPr>
+          <a:xfrm>
+            <a:off x="10774203" y="3666468"/>
+            <a:ext cx="53197" cy="207887"/>
+          </a:xfrm>
+          <a:prstGeom prst="line">
+            <a:avLst/>
+          </a:prstGeom>
+          <a:ln w="10160">
+            <a:solidFill>
+              <a:srgbClr val="1C1410"/>
+            </a:solidFill>
+          </a:ln>
+        </p:spPr>
+        <p:style>
+          <a:lnRef idx="2">
+            <a:schemeClr val="accent1"/>
+          </a:lnRef>
+          <a:fillRef idx="0">
+            <a:schemeClr val="accent1"/>
+          </a:fillRef>
+          <a:effectRef idx="1">
+            <a:schemeClr val="accent1"/>
+          </a:effectRef>
+          <a:fontRef idx="minor">
+            <a:schemeClr val="tx1"/>
+          </a:fontRef>
+        </p:style>
+      </p:cxnSp>
+      <p:cxnSp>
+        <p:nvCxnSpPr>
+          <p:cNvPr id="18" name="Connector 17"/>
+          <p:cNvCxnSpPr/>
+          <p:nvPr/>
+        </p:nvCxnSpPr>
+        <p:spPr>
+          <a:xfrm>
+            <a:off x="10603026" y="3981096"/>
+            <a:ext cx="128485" cy="145698"/>
+          </a:xfrm>
+          <a:prstGeom prst="line">
+            <a:avLst/>
+          </a:prstGeom>
+          <a:ln w="10160">
+            <a:solidFill>
+              <a:srgbClr val="1C1410"/>
+            </a:solidFill>
+          </a:ln>
+        </p:spPr>
+        <p:style>
+          <a:lnRef idx="2">
+            <a:schemeClr val="accent1"/>
+          </a:lnRef>
+          <a:fillRef idx="0">
+            <a:schemeClr val="accent1"/>
+          </a:fillRef>
+          <a:effectRef idx="1">
+            <a:schemeClr val="accent1"/>
+          </a:effectRef>
+          <a:fontRef idx="minor">
+            <a:schemeClr val="tx1"/>
+          </a:fontRef>
+        </p:style>
+      </p:cxnSp>
+      <p:cxnSp>
+        <p:nvCxnSpPr>
+          <p:cNvPr id="19" name="Connector 18"/>
+          <p:cNvCxnSpPr/>
+          <p:nvPr/>
+        </p:nvCxnSpPr>
+        <p:spPr>
+          <a:xfrm>
+            <a:off x="10757278" y="4131284"/>
+            <a:ext cx="69831" cy="225425"/>
+          </a:xfrm>
+          <a:prstGeom prst="line">
+            <a:avLst/>
+          </a:prstGeom>
+          <a:ln w="10160">
+            <a:solidFill>
+              <a:srgbClr val="1C1410"/>
+            </a:solidFill>
+          </a:ln>
+        </p:spPr>
+        <p:style>
+          <a:lnRef idx="2">
+            <a:schemeClr val="accent1"/>
+          </a:lnRef>
+          <a:fillRef idx="0">
+            <a:schemeClr val="accent1"/>
+          </a:fillRef>
+          <a:effectRef idx="1">
+            <a:schemeClr val="accent1"/>
+          </a:effectRef>
+          <a:fontRef idx="minor">
+            <a:schemeClr val="tx1"/>
+          </a:fontRef>
+        </p:style>
+      </p:cxnSp>
+      <p:cxnSp>
+        <p:nvCxnSpPr>
+          <p:cNvPr id="20" name="Connector 19"/>
+          <p:cNvCxnSpPr/>
+          <p:nvPr/>
+        </p:nvCxnSpPr>
+        <p:spPr>
+          <a:xfrm>
+            <a:off x="10626536" y="4517902"/>
+            <a:ext cx="83871" cy="122017"/>
+          </a:xfrm>
+          <a:prstGeom prst="line">
+            <a:avLst/>
+          </a:prstGeom>
+          <a:ln w="10160">
+            <a:solidFill>
+              <a:srgbClr val="1C1410"/>
+            </a:solidFill>
+          </a:ln>
+        </p:spPr>
+        <p:style>
+          <a:lnRef idx="2">
+            <a:schemeClr val="accent1"/>
+          </a:lnRef>
+          <a:fillRef idx="0">
+            <a:schemeClr val="accent1"/>
+          </a:fillRef>
+          <a:effectRef idx="1">
+            <a:schemeClr val="accent1"/>
+          </a:effectRef>
+          <a:fontRef idx="minor">
+            <a:schemeClr val="tx1"/>
+          </a:fontRef>
+        </p:style>
+      </p:cxnSp>
+      <p:cxnSp>
+        <p:nvCxnSpPr>
+          <p:cNvPr id="21" name="Connector 20"/>
+          <p:cNvCxnSpPr/>
+          <p:nvPr/>
+        </p:nvCxnSpPr>
+        <p:spPr>
+          <a:xfrm>
+            <a:off x="10767811" y="4638658"/>
+            <a:ext cx="53182" cy="221670"/>
+          </a:xfrm>
+          <a:prstGeom prst="line">
+            <a:avLst/>
+          </a:prstGeom>
+          <a:ln w="10160">
+            <a:solidFill>
+              <a:srgbClr val="1C1410"/>
+            </a:solidFill>
+          </a:ln>
+        </p:spPr>
+        <p:style>
+          <a:lnRef idx="2">
+            <a:schemeClr val="accent1"/>
+          </a:lnRef>
+          <a:fillRef idx="0">
+            <a:schemeClr val="accent1"/>
+          </a:fillRef>
+          <a:effectRef idx="1">
+            <a:schemeClr val="accent1"/>
+          </a:effectRef>
+          <a:fontRef idx="minor">
+            <a:schemeClr val="tx1"/>
+          </a:fontRef>
+        </p:style>
+      </p:cxnSp>
+      <p:sp>
+        <p:nvSpPr>
+          <p:cNvPr id="22" name="TextBox 21"/>
+          <p:cNvSpPr txBox="1"/>
+          <p:nvPr/>
+        </p:nvSpPr>
+        <p:spPr>
+          <a:xfrm>
+            <a:off x="8534095" y="1965960"/>
+            <a:ext cx="2011680" cy="914400"/>
+          </a:xfrm>
+          <a:prstGeom prst="rect">
+            <a:avLst/>
+          </a:prstGeom>
+          <a:noFill/>
+        </p:spPr>
+        <p:txBody>
+          <a:bodyPr wrap="square" lIns="0" rIns="0" tIns="0" bIns="0" anchor="t">
+            <a:noAutofit/>
+          </a:bodyPr>
+          <a:lstStyle/>
+          <a:p>
+            <a:pPr algn="r">
+              <a:lnSpc>
+                <a:spcPct val="150000"/>
+              </a:lnSpc>
+            </a:pPr>
+            <a:r>
+              <a:rPr sz="900" b="0" i="0" spc="60">
+                <a:solidFill>
+                  <a:srgbClr val="5A4A3A"/>
+                </a:solidFill>
+                <a:latin typeface="JetBrains Mono Light"/>
+              </a:rPr>
+              <a:t>talim, kanihama,</a:t>
+            </a:r>
+          </a:p>
+          <a:p>
+            <a:pPr algn="r">
+              <a:lnSpc>
+                <a:spcPct val="150000"/>
+              </a:lnSpc>
+            </a:pPr>
+            <a:r>
+              <a:rPr sz="900" b="0" i="0" spc="60">
+                <a:solidFill>
+                  <a:srgbClr val="5A4A3A"/>
+                </a:solidFill>
+                <a:latin typeface="JetBrains Mono Light"/>
+              </a:rPr>
+              <a:t>c. 1820.  the script</a:t>
+            </a:r>
+          </a:p>
+          <a:p>
+            <a:pPr algn="r">
+              <a:lnSpc>
+                <a:spcPct val="150000"/>
+              </a:lnSpc>
+            </a:pPr>
+            <a:r>
+              <a:rPr sz="900" b="0" i="0" spc="60">
+                <a:solidFill>
+                  <a:srgbClr val="5A4A3A"/>
+                </a:solidFill>
+                <a:latin typeface="JetBrains Mono Light"/>
+              </a:rPr>
+              <a:t>the master kept.</a:t>
+            </a:r>
+          </a:p>
+        </p:txBody>
+      </p:sp>
+      <p:sp>
+        <p:nvSpPr>
+          <p:cNvPr id="23" name="TextBox 22"/>
+          <p:cNvSpPr txBox="1"/>
+          <p:nvPr/>
+        </p:nvSpPr>
+        <p:spPr>
+          <a:xfrm>
+            <a:off x="548640" y="5852160"/>
+            <a:ext cx="2743200" cy="365760"/>
+          </a:xfrm>
+          <a:prstGeom prst="rect">
+            <a:avLst/>
+          </a:prstGeom>
+          <a:noFill/>
+        </p:spPr>
+        <p:txBody>
+          <a:bodyPr wrap="square" lIns="0" rIns="0" tIns="0" bIns="0" anchor="t">
+            <a:noAutofit/>
+          </a:bodyPr>
+          <a:lstStyle/>
+          <a:p>
+            <a:pPr algn="l"/>
+            <a:r>
+              <a:rPr sz="1800" b="1" i="0">
+                <a:solidFill>
+                  <a:srgbClr val="1C1410"/>
+                </a:solidFill>
+                <a:latin typeface="JetBrains Mono"/>
+              </a:rPr>
+              <a:t>bitwise</a:t>
+            </a:r>
+          </a:p>
+        </p:txBody>
+      </p:sp>
+      <p:cxnSp>
+        <p:nvCxnSpPr>
+          <p:cNvPr id="24" name="Connector 23"/>
+          <p:cNvCxnSpPr/>
+          <p:nvPr/>
+        </p:nvCxnSpPr>
+        <p:spPr>
+          <a:xfrm>
+            <a:off x="548640" y="6163056"/>
+            <a:ext cx="640079" cy="0"/>
+          </a:xfrm>
+          <a:prstGeom prst="line">
+            <a:avLst/>
+          </a:prstGeom>
+          <a:ln w="11430">
+            <a:solidFill>
+              <a:srgbClr val="C8975A"/>
+            </a:solidFill>
+          </a:ln>
+        </p:spPr>
+        <p:style>
+          <a:lnRef idx="2">
+            <a:schemeClr val="accent1"/>
+          </a:lnRef>
+          <a:fillRef idx="0">
+            <a:schemeClr val="accent1"/>
+          </a:fillRef>
+          <a:effectRef idx="1">
+            <a:schemeClr val="accent1"/>
+          </a:effectRef>
+          <a:fontRef idx="minor">
+            <a:schemeClr val="tx1"/>
+          </a:fontRef>
+        </p:style>
+      </p:cxnSp>
+      <p:sp>
+        <p:nvSpPr>
+          <p:cNvPr id="25" name="TextBox 24"/>
+          <p:cNvSpPr txBox="1"/>
+          <p:nvPr/>
+        </p:nvSpPr>
+        <p:spPr>
+          <a:xfrm>
+            <a:off x="548640" y="6236208"/>
+            <a:ext cx="5486400" cy="228600"/>
+          </a:xfrm>
+          <a:prstGeom prst="rect">
+            <a:avLst/>
+          </a:prstGeom>
+          <a:noFill/>
+        </p:spPr>
+        <p:txBody>
+          <a:bodyPr wrap="square" lIns="0" rIns="0" tIns="0" bIns="0" anchor="t">
+            <a:noAutofit/>
+          </a:bodyPr>
+          <a:lstStyle/>
+          <a:p>
+            <a:pPr algn="l"/>
+            <a:r>
+              <a:rPr sz="900" b="0" i="0" spc="120">
+                <a:solidFill>
+                  <a:srgbClr val="5A4A3A"/>
+                </a:solidFill>
+                <a:latin typeface="JetBrains Mono Light"/>
+              </a:rPr>
+              <a:t>srinagar  ·  2026  ·  v 0.1 hackathon build</a:t>
+            </a:r>
+          </a:p>
+        </p:txBody>
+      </p:sp>
+      <p:sp>
+        <p:nvSpPr>
+          <p:cNvPr id="26" name="TextBox 25"/>
+          <p:cNvSpPr txBox="1"/>
+          <p:nvPr/>
+        </p:nvSpPr>
+        <p:spPr>
+          <a:xfrm>
+            <a:off x="6522415" y="6236208"/>
             <a:ext cx="5120640" cy="256032"/>
           </a:xfrm>
           <a:prstGeom prst="rect">
@@ -3302,97 +4022,27 @@
           <a:p>
             <a:pPr algn="r"/>
             <a:r>
-              <a:rPr sz="900" b="0" i="0" spc="60">
+              <a:rPr sz="900" b="0" i="0" spc="120">
                 <a:solidFill>
                   <a:srgbClr val="5A4A3A"/>
                 </a:solidFill>
                 <a:latin typeface="JetBrains Mono Light"/>
               </a:rPr>
-              <a:t>v 0.1 / hackathon build</a:t>
-            </a:r>
-          </a:p>
-        </p:txBody>
-      </p:sp>
-      <p:sp>
-        <p:nvSpPr>
-          <p:cNvPr id="8" name="TextBox 7"/>
-          <p:cNvSpPr txBox="1"/>
-          <p:nvPr/>
-        </p:nvSpPr>
-        <p:spPr>
-          <a:xfrm>
-            <a:off x="6522415" y="3310127"/>
-            <a:ext cx="5120640" cy="256032"/>
-          </a:xfrm>
-          <a:prstGeom prst="rect">
-            <a:avLst/>
-          </a:prstGeom>
-          <a:noFill/>
-        </p:spPr>
-        <p:txBody>
-          <a:bodyPr wrap="square" lIns="0" rIns="0" tIns="0" bIns="0" anchor="t">
-            <a:noAutofit/>
-          </a:bodyPr>
-          <a:lstStyle/>
-          <a:p>
-            <a:pPr algn="r"/>
-            <a:r>
-              <a:rPr sz="900" b="0" i="0" spc="60">
-                <a:solidFill>
-                  <a:srgbClr val="5A4A3A"/>
-                </a:solidFill>
-                <a:latin typeface="JetBrains Mono Light"/>
-              </a:rPr>
-              <a:t>nit srinagar / top 15</a:t>
-            </a:r>
-          </a:p>
-        </p:txBody>
-      </p:sp>
-      <p:sp>
-        <p:nvSpPr>
-          <p:cNvPr id="9" name="TextBox 8"/>
-          <p:cNvSpPr txBox="1"/>
-          <p:nvPr/>
-        </p:nvSpPr>
-        <p:spPr>
-          <a:xfrm>
-            <a:off x="6522415" y="3602736"/>
-            <a:ext cx="5120640" cy="256032"/>
-          </a:xfrm>
-          <a:prstGeom prst="rect">
-            <a:avLst/>
-          </a:prstGeom>
-          <a:noFill/>
-        </p:spPr>
-        <p:txBody>
-          <a:bodyPr wrap="square" lIns="0" rIns="0" tIns="0" bIns="0" anchor="t">
-            <a:noAutofit/>
-          </a:bodyPr>
-          <a:lstStyle/>
-          <a:p>
-            <a:pPr algn="r"/>
-            <a:r>
-              <a:rPr sz="900" b="0" i="0" spc="60">
-                <a:solidFill>
-                  <a:srgbClr val="5A4A3A"/>
-                </a:solidFill>
-                <a:latin typeface="JetBrains Mono Light"/>
-              </a:rPr>
-              <a:t>neon pgvector / hf spaces / render / vercel</a:t>
-            </a:r>
-          </a:p>
-        </p:txBody>
-      </p:sp>
-      <p:sp>
-        <p:nvSpPr>
-          <p:cNvPr id="10" name="Oval 9"/>
+              <a:t>neon pgvector  ·  hf spaces  ·  render  ·  vercel</a:t>
+            </a:r>
+          </a:p>
+        </p:txBody>
+      </p:sp>
+      <p:sp>
+        <p:nvSpPr>
+          <p:cNvPr id="27" name="Oval 26"/>
           <p:cNvSpPr/>
           <p:nvPr/>
         </p:nvSpPr>
         <p:spPr>
           <a:xfrm>
-            <a:off x="11650675" y="5859780"/>
-            <a:ext cx="76200" cy="76200"/>
+            <a:off x="11637975" y="5435600"/>
+            <a:ext cx="101600" cy="101600"/>
           </a:xfrm>
           <a:prstGeom prst="ellipse">
             <a:avLst/>
@@ -3429,7 +4079,7 @@
       </p:sp>
       <p:sp>
         <p:nvSpPr>
-          <p:cNvPr id="11" name="TextBox 10"/>
+          <p:cNvPr id="28" name="TextBox 27"/>
           <p:cNvSpPr txBox="1"/>
           <p:nvPr/>
         </p:nvSpPr>
@@ -3464,7 +4114,7 @@
       </p:sp>
       <p:sp>
         <p:nvSpPr>
-          <p:cNvPr id="12" name="TextBox 11"/>
+          <p:cNvPr id="29" name="TextBox 28"/>
           <p:cNvSpPr txBox="1"/>
           <p:nvPr/>
         </p:nvSpPr>
@@ -3492,7 +4142,7 @@
                 </a:solidFill>
                 <a:latin typeface="JetBrains Mono Light"/>
               </a:rPr>
-              <a:t>01 / 07</a:t>
+              <a:t>01 / 06</a:t>
             </a:r>
           </a:p>
         </p:txBody>
@@ -4620,7 +5270,7 @@
                 </a:solidFill>
                 <a:latin typeface="JetBrains Mono Light"/>
               </a:rPr>
-              <a:t>02 / 07</a:t>
+              <a:t>02 / 06</a:t>
             </a:r>
           </a:p>
         </p:txBody>
@@ -4695,8 +5345,8 @@
         </p:nvSpPr>
         <p:spPr>
           <a:xfrm>
-            <a:off x="548640" y="502920"/>
-            <a:ext cx="3657600" cy="228600"/>
+            <a:off x="548640" y="411480"/>
+            <a:ext cx="10972800" cy="228600"/>
           </a:xfrm>
           <a:prstGeom prst="rect">
             <a:avLst/>
@@ -4711,13 +5361,13 @@
           <a:p>
             <a:pPr algn="l"/>
             <a:r>
-              <a:rPr sz="900" b="0" i="0" spc="60">
+              <a:rPr sz="900" b="0" i="0" spc="120">
                 <a:solidFill>
                   <a:srgbClr val="5A4A3A"/>
                 </a:solidFill>
                 <a:latin typeface="JetBrains Mono Light"/>
               </a:rPr>
-              <a:t>talim, kanihama, c. 1820</a:t>
+              <a:t>solution / four interlocking layers, anchored on cryptographic provenance</a:t>
             </a:r>
           </a:p>
         </p:txBody>
@@ -4730,13 +5380,13 @@
         </p:nvCxnSpPr>
         <p:spPr>
           <a:xfrm>
-            <a:off x="1292004" y="959252"/>
-            <a:ext cx="154645" cy="150184"/>
+            <a:off x="1156572" y="1302888"/>
+            <a:ext cx="2612756" cy="1001557"/>
           </a:xfrm>
           <a:prstGeom prst="line">
             <a:avLst/>
           </a:prstGeom>
-          <a:ln w="10160">
+          <a:ln w="11430">
             <a:solidFill>
               <a:srgbClr val="1C1410"/>
             </a:solidFill>
@@ -4765,13 +5415,13 @@
         </p:nvCxnSpPr>
         <p:spPr>
           <a:xfrm>
-            <a:off x="1429088" y="1111543"/>
-            <a:ext cx="122740" cy="235386"/>
+            <a:off x="3911631" y="2358994"/>
+            <a:ext cx="2612756" cy="1001557"/>
           </a:xfrm>
           <a:prstGeom prst="line">
             <a:avLst/>
           </a:prstGeom>
-          <a:ln w="10160">
+          <a:ln w="11430">
             <a:solidFill>
               <a:srgbClr val="1C1410"/>
             </a:solidFill>
@@ -4800,13 +5450,13 @@
         </p:nvCxnSpPr>
         <p:spPr>
           <a:xfrm>
-            <a:off x="1281531" y="1477687"/>
-            <a:ext cx="122611" cy="136006"/>
+            <a:off x="6642972" y="3406008"/>
+            <a:ext cx="2624615" cy="1006103"/>
           </a:xfrm>
           <a:prstGeom prst="line">
             <a:avLst/>
           </a:prstGeom>
-          <a:ln w="10160">
+          <a:ln w="11430">
             <a:solidFill>
               <a:srgbClr val="1C1410"/>
             </a:solidFill>
@@ -4827,23 +5477,479 @@
           </a:fontRef>
         </p:style>
       </p:cxnSp>
+      <p:sp>
+        <p:nvSpPr>
+          <p:cNvPr id="7" name="Oval 6"/>
+          <p:cNvSpPr/>
+          <p:nvPr/>
+        </p:nvSpPr>
+        <p:spPr>
+          <a:xfrm>
+            <a:off x="1033780" y="1216660"/>
+            <a:ext cx="127000" cy="127000"/>
+          </a:xfrm>
+          <a:prstGeom prst="ellipse">
+            <a:avLst/>
+          </a:prstGeom>
+          <a:solidFill>
+            <a:srgbClr val="1C1410"/>
+          </a:solidFill>
+          <a:ln>
+            <a:noFill/>
+          </a:ln>
+          <a:effectLst/>
+        </p:spPr>
+        <p:style>
+          <a:lnRef idx="1">
+            <a:schemeClr val="accent1"/>
+          </a:lnRef>
+          <a:fillRef idx="3">
+            <a:schemeClr val="accent1"/>
+          </a:fillRef>
+          <a:effectRef idx="2">
+            <a:schemeClr val="accent1"/>
+          </a:effectRef>
+          <a:fontRef idx="minor">
+            <a:schemeClr val="lt1"/>
+          </a:fontRef>
+        </p:style>
+        <p:txBody>
+          <a:bodyPr rtlCol="0" anchor="ctr"/>
+          <a:lstStyle/>
+          <a:p>
+            <a:pPr algn="ctr"/>
+          </a:p>
+        </p:txBody>
+      </p:sp>
+      <p:sp>
+        <p:nvSpPr>
+          <p:cNvPr id="8" name="TextBox 7"/>
+          <p:cNvSpPr txBox="1"/>
+          <p:nvPr/>
+        </p:nvSpPr>
+        <p:spPr>
+          <a:xfrm>
+            <a:off x="1361948" y="987551"/>
+            <a:ext cx="10281107" cy="292608"/>
+          </a:xfrm>
+          <a:prstGeom prst="rect">
+            <a:avLst/>
+          </a:prstGeom>
+          <a:noFill/>
+        </p:spPr>
+        <p:txBody>
+          <a:bodyPr wrap="square" lIns="0" rIns="0" tIns="0" bIns="0" anchor="t">
+            <a:noAutofit/>
+          </a:bodyPr>
+          <a:lstStyle/>
+          <a:p>
+            <a:pPr algn="l"/>
+            <a:r>
+              <a:rPr sz="1500" b="1" i="0">
+                <a:solidFill>
+                  <a:srgbClr val="1C1410"/>
+                </a:solidFill>
+                <a:latin typeface="JetBrains Mono"/>
+              </a:rPr>
+              <a:t>vault</a:t>
+            </a:r>
+          </a:p>
+        </p:txBody>
+      </p:sp>
+      <p:sp>
+        <p:nvSpPr>
+          <p:cNvPr id="9" name="TextBox 8"/>
+          <p:cNvSpPr txBox="1"/>
+          <p:nvPr/>
+        </p:nvSpPr>
+        <p:spPr>
+          <a:xfrm>
+            <a:off x="1361948" y="1243584"/>
+            <a:ext cx="10281107" cy="292608"/>
+          </a:xfrm>
+          <a:prstGeom prst="rect">
+            <a:avLst/>
+          </a:prstGeom>
+          <a:noFill/>
+        </p:spPr>
+        <p:txBody>
+          <a:bodyPr wrap="square" lIns="0" rIns="0" tIns="0" bIns="0" anchor="t">
+            <a:noAutofit/>
+          </a:bodyPr>
+          <a:lstStyle/>
+          <a:p>
+            <a:pPr algn="l"/>
+            <a:r>
+              <a:rPr sz="1000" b="0" i="0" spc="60">
+                <a:solidFill>
+                  <a:srgbClr val="5A4A3A"/>
+                </a:solidFill>
+                <a:latin typeface="JetBrains Mono Light"/>
+              </a:rPr>
+              <a:t>captures what the master never wrote down</a:t>
+            </a:r>
+          </a:p>
+        </p:txBody>
+      </p:sp>
+      <p:sp>
+        <p:nvSpPr>
+          <p:cNvPr id="10" name="Oval 9"/>
+          <p:cNvSpPr/>
+          <p:nvPr/>
+        </p:nvSpPr>
+        <p:spPr>
+          <a:xfrm>
+            <a:off x="3764280" y="2255519"/>
+            <a:ext cx="152400" cy="152400"/>
+          </a:xfrm>
+          <a:prstGeom prst="ellipse">
+            <a:avLst/>
+          </a:prstGeom>
+          <a:solidFill>
+            <a:srgbClr val="8B1A1A"/>
+          </a:solidFill>
+          <a:ln>
+            <a:noFill/>
+          </a:ln>
+          <a:effectLst/>
+        </p:spPr>
+        <p:style>
+          <a:lnRef idx="1">
+            <a:schemeClr val="accent1"/>
+          </a:lnRef>
+          <a:fillRef idx="3">
+            <a:schemeClr val="accent1"/>
+          </a:fillRef>
+          <a:effectRef idx="2">
+            <a:schemeClr val="accent1"/>
+          </a:effectRef>
+          <a:fontRef idx="minor">
+            <a:schemeClr val="lt1"/>
+          </a:fontRef>
+        </p:style>
+        <p:txBody>
+          <a:bodyPr rtlCol="0" anchor="ctr"/>
+          <a:lstStyle/>
+          <a:p>
+            <a:pPr algn="ctr"/>
+          </a:p>
+        </p:txBody>
+      </p:sp>
+      <p:sp>
+        <p:nvSpPr>
+          <p:cNvPr id="11" name="TextBox 10"/>
+          <p:cNvSpPr txBox="1"/>
+          <p:nvPr/>
+        </p:nvSpPr>
+        <p:spPr>
+          <a:xfrm>
+            <a:off x="4117847" y="2039112"/>
+            <a:ext cx="7525207" cy="292608"/>
+          </a:xfrm>
+          <a:prstGeom prst="rect">
+            <a:avLst/>
+          </a:prstGeom>
+          <a:noFill/>
+        </p:spPr>
+        <p:txBody>
+          <a:bodyPr wrap="square" lIns="0" rIns="0" tIns="0" bIns="0" anchor="t">
+            <a:noAutofit/>
+          </a:bodyPr>
+          <a:lstStyle/>
+          <a:p>
+            <a:pPr algn="l"/>
+            <a:r>
+              <a:rPr sz="1500" b="1" i="0">
+                <a:solidFill>
+                  <a:srgbClr val="1C1410"/>
+                </a:solidFill>
+                <a:latin typeface="JetBrains Mono"/>
+              </a:rPr>
+              <a:t>sanad</a:t>
+            </a:r>
+          </a:p>
+        </p:txBody>
+      </p:sp>
+      <p:sp>
+        <p:nvSpPr>
+          <p:cNvPr id="12" name="TextBox 11"/>
+          <p:cNvSpPr txBox="1"/>
+          <p:nvPr/>
+        </p:nvSpPr>
+        <p:spPr>
+          <a:xfrm>
+            <a:off x="4117847" y="2295144"/>
+            <a:ext cx="7525207" cy="292608"/>
+          </a:xfrm>
+          <a:prstGeom prst="rect">
+            <a:avLst/>
+          </a:prstGeom>
+          <a:noFill/>
+        </p:spPr>
+        <p:txBody>
+          <a:bodyPr wrap="square" lIns="0" rIns="0" tIns="0" bIns="0" anchor="t">
+            <a:noAutofit/>
+          </a:bodyPr>
+          <a:lstStyle/>
+          <a:p>
+            <a:pPr algn="l"/>
+            <a:r>
+              <a:rPr sz="1000" b="0" i="0" spc="60">
+                <a:solidFill>
+                  <a:srgbClr val="5A4A3A"/>
+                </a:solidFill>
+                <a:latin typeface="JetBrains Mono Light"/>
+              </a:rPr>
+              <a:t>signs the piece against the master's own keypair</a:t>
+            </a:r>
+          </a:p>
+        </p:txBody>
+      </p:sp>
+      <p:sp>
+        <p:nvSpPr>
+          <p:cNvPr id="13" name="Oval 12"/>
+          <p:cNvSpPr/>
+          <p:nvPr/>
+        </p:nvSpPr>
+        <p:spPr>
+          <a:xfrm>
+            <a:off x="6520180" y="3319780"/>
+            <a:ext cx="127000" cy="127000"/>
+          </a:xfrm>
+          <a:prstGeom prst="ellipse">
+            <a:avLst/>
+          </a:prstGeom>
+          <a:solidFill>
+            <a:srgbClr val="1C1410"/>
+          </a:solidFill>
+          <a:ln>
+            <a:noFill/>
+          </a:ln>
+          <a:effectLst/>
+        </p:spPr>
+        <p:style>
+          <a:lnRef idx="1">
+            <a:schemeClr val="accent1"/>
+          </a:lnRef>
+          <a:fillRef idx="3">
+            <a:schemeClr val="accent1"/>
+          </a:fillRef>
+          <a:effectRef idx="2">
+            <a:schemeClr val="accent1"/>
+          </a:effectRef>
+          <a:fontRef idx="minor">
+            <a:schemeClr val="lt1"/>
+          </a:fontRef>
+        </p:style>
+        <p:txBody>
+          <a:bodyPr rtlCol="0" anchor="ctr"/>
+          <a:lstStyle/>
+          <a:p>
+            <a:pPr algn="ctr"/>
+          </a:p>
+        </p:txBody>
+      </p:sp>
+      <p:sp>
+        <p:nvSpPr>
+          <p:cNvPr id="14" name="TextBox 13"/>
+          <p:cNvSpPr txBox="1"/>
+          <p:nvPr/>
+        </p:nvSpPr>
+        <p:spPr>
+          <a:xfrm>
+            <a:off x="6848348" y="3090672"/>
+            <a:ext cx="4794707" cy="292608"/>
+          </a:xfrm>
+          <a:prstGeom prst="rect">
+            <a:avLst/>
+          </a:prstGeom>
+          <a:noFill/>
+        </p:spPr>
+        <p:txBody>
+          <a:bodyPr wrap="square" lIns="0" rIns="0" tIns="0" bIns="0" anchor="t">
+            <a:noAutofit/>
+          </a:bodyPr>
+          <a:lstStyle/>
+          <a:p>
+            <a:pPr algn="l"/>
+            <a:r>
+              <a:rPr sz="1500" b="1" i="0">
+                <a:solidFill>
+                  <a:srgbClr val="1C1410"/>
+                </a:solidFill>
+                <a:latin typeface="JetBrains Mono"/>
+              </a:rPr>
+              <a:t>ustaad</a:t>
+            </a:r>
+          </a:p>
+        </p:txBody>
+      </p:sp>
+      <p:sp>
+        <p:nvSpPr>
+          <p:cNvPr id="15" name="TextBox 14"/>
+          <p:cNvSpPr txBox="1"/>
+          <p:nvPr/>
+        </p:nvSpPr>
+        <p:spPr>
+          <a:xfrm>
+            <a:off x="6848348" y="3346704"/>
+            <a:ext cx="4794707" cy="292608"/>
+          </a:xfrm>
+          <a:prstGeom prst="rect">
+            <a:avLst/>
+          </a:prstGeom>
+          <a:noFill/>
+        </p:spPr>
+        <p:txBody>
+          <a:bodyPr wrap="square" lIns="0" rIns="0" tIns="0" bIns="0" anchor="t">
+            <a:noAutofit/>
+          </a:bodyPr>
+          <a:lstStyle/>
+          <a:p>
+            <a:pPr algn="l"/>
+            <a:r>
+              <a:rPr sz="1000" b="0" i="0" spc="60">
+                <a:solidFill>
+                  <a:srgbClr val="5A4A3A"/>
+                </a:solidFill>
+                <a:latin typeface="JetBrains Mono Light"/>
+              </a:rPr>
+              <a:t>sells the master's time, not the middleman's</a:t>
+            </a:r>
+          </a:p>
+        </p:txBody>
+      </p:sp>
+      <p:sp>
+        <p:nvSpPr>
+          <p:cNvPr id="16" name="Oval 15"/>
+          <p:cNvSpPr/>
+          <p:nvPr/>
+        </p:nvSpPr>
+        <p:spPr>
+          <a:xfrm>
+            <a:off x="9263380" y="4371339"/>
+            <a:ext cx="127000" cy="127000"/>
+          </a:xfrm>
+          <a:prstGeom prst="ellipse">
+            <a:avLst/>
+          </a:prstGeom>
+          <a:solidFill>
+            <a:srgbClr val="1C1410"/>
+          </a:solidFill>
+          <a:ln>
+            <a:noFill/>
+          </a:ln>
+          <a:effectLst/>
+        </p:spPr>
+        <p:style>
+          <a:lnRef idx="1">
+            <a:schemeClr val="accent1"/>
+          </a:lnRef>
+          <a:fillRef idx="3">
+            <a:schemeClr val="accent1"/>
+          </a:fillRef>
+          <a:effectRef idx="2">
+            <a:schemeClr val="accent1"/>
+          </a:effectRef>
+          <a:fontRef idx="minor">
+            <a:schemeClr val="lt1"/>
+          </a:fontRef>
+        </p:style>
+        <p:txBody>
+          <a:bodyPr rtlCol="0" anchor="ctr"/>
+          <a:lstStyle/>
+          <a:p>
+            <a:pPr algn="ctr"/>
+          </a:p>
+        </p:txBody>
+      </p:sp>
+      <p:sp>
+        <p:nvSpPr>
+          <p:cNvPr id="17" name="TextBox 16"/>
+          <p:cNvSpPr txBox="1"/>
+          <p:nvPr/>
+        </p:nvSpPr>
+        <p:spPr>
+          <a:xfrm>
+            <a:off x="9591548" y="4142231"/>
+            <a:ext cx="2051507" cy="292608"/>
+          </a:xfrm>
+          <a:prstGeom prst="rect">
+            <a:avLst/>
+          </a:prstGeom>
+          <a:noFill/>
+        </p:spPr>
+        <p:txBody>
+          <a:bodyPr wrap="square" lIns="0" rIns="0" tIns="0" bIns="0" anchor="t">
+            <a:noAutofit/>
+          </a:bodyPr>
+          <a:lstStyle/>
+          <a:p>
+            <a:pPr algn="l"/>
+            <a:r>
+              <a:rPr sz="1500" b="1" i="0">
+                <a:solidFill>
+                  <a:srgbClr val="1C1410"/>
+                </a:solidFill>
+                <a:latin typeface="JetBrains Mono"/>
+              </a:rPr>
+              <a:t>bazaar</a:t>
+            </a:r>
+          </a:p>
+        </p:txBody>
+      </p:sp>
+      <p:sp>
+        <p:nvSpPr>
+          <p:cNvPr id="18" name="TextBox 17"/>
+          <p:cNvSpPr txBox="1"/>
+          <p:nvPr/>
+        </p:nvSpPr>
+        <p:spPr>
+          <a:xfrm>
+            <a:off x="9591548" y="4398264"/>
+            <a:ext cx="2051507" cy="292608"/>
+          </a:xfrm>
+          <a:prstGeom prst="rect">
+            <a:avLst/>
+          </a:prstGeom>
+          <a:noFill/>
+        </p:spPr>
+        <p:txBody>
+          <a:bodyPr wrap="square" lIns="0" rIns="0" tIns="0" bIns="0" anchor="t">
+            <a:noAutofit/>
+          </a:bodyPr>
+          <a:lstStyle/>
+          <a:p>
+            <a:pPr algn="l"/>
+            <a:r>
+              <a:rPr sz="1000" b="0" i="0" spc="60">
+                <a:solidFill>
+                  <a:srgbClr val="5A4A3A"/>
+                </a:solidFill>
+                <a:latin typeface="JetBrains Mono Light"/>
+              </a:rPr>
+              <a:t>sells the object with provenance attached</a:t>
+            </a:r>
+          </a:p>
+        </p:txBody>
+      </p:sp>
       <p:cxnSp>
         <p:nvCxnSpPr>
-          <p:cNvPr id="7" name="Connector 6"/>
+          <p:cNvPr id="19" name="Connector 18"/>
           <p:cNvCxnSpPr/>
           <p:nvPr/>
         </p:nvCxnSpPr>
         <p:spPr>
           <a:xfrm>
-            <a:off x="1420942" y="1643981"/>
-            <a:ext cx="127877" cy="187678"/>
+            <a:off x="8961120" y="777240"/>
+            <a:ext cx="1280160" cy="0"/>
           </a:xfrm>
           <a:prstGeom prst="line">
             <a:avLst/>
           </a:prstGeom>
-          <a:ln w="10160">
+          <a:ln w="12700">
             <a:solidFill>
-              <a:srgbClr val="1C1410"/>
+              <a:srgbClr val="8B1A1A"/>
             </a:solidFill>
           </a:ln>
         </p:spPr>
@@ -4862,24 +5968,131 @@
           </a:fontRef>
         </p:style>
       </p:cxnSp>
+      <p:sp>
+        <p:nvSpPr>
+          <p:cNvPr id="20" name="TextBox 19"/>
+          <p:cNvSpPr txBox="1"/>
+          <p:nvPr/>
+        </p:nvSpPr>
+        <p:spPr>
+          <a:xfrm>
+            <a:off x="8961120" y="850392"/>
+            <a:ext cx="2377440" cy="292608"/>
+          </a:xfrm>
+          <a:prstGeom prst="rect">
+            <a:avLst/>
+          </a:prstGeom>
+          <a:noFill/>
+        </p:spPr>
+        <p:txBody>
+          <a:bodyPr wrap="square" lIns="0" rIns="0" tIns="0" bIns="0" anchor="t">
+            <a:noAutofit/>
+          </a:bodyPr>
+          <a:lstStyle/>
+          <a:p>
+            <a:pPr algn="l"/>
+            <a:r>
+              <a:rPr sz="1100" b="1" i="0">
+                <a:solidFill>
+                  <a:srgbClr val="1C1410"/>
+                </a:solidFill>
+                <a:latin typeface="JetBrains Mono"/>
+              </a:rPr>
+              <a:t>the keystone</a:t>
+            </a:r>
+          </a:p>
+        </p:txBody>
+      </p:sp>
+      <p:sp>
+        <p:nvSpPr>
+          <p:cNvPr id="21" name="TextBox 20"/>
+          <p:cNvSpPr txBox="1"/>
+          <p:nvPr/>
+        </p:nvSpPr>
+        <p:spPr>
+          <a:xfrm>
+            <a:off x="8961120" y="1106424"/>
+            <a:ext cx="3017520" cy="914400"/>
+          </a:xfrm>
+          <a:prstGeom prst="rect">
+            <a:avLst/>
+          </a:prstGeom>
+          <a:noFill/>
+        </p:spPr>
+        <p:txBody>
+          <a:bodyPr wrap="square" lIns="0" rIns="0" tIns="0" bIns="0" anchor="t">
+            <a:noAutofit/>
+          </a:bodyPr>
+          <a:lstStyle/>
+          <a:p>
+            <a:pPr algn="l">
+              <a:lnSpc>
+                <a:spcPct val="150000"/>
+              </a:lnSpc>
+            </a:pPr>
+            <a:r>
+              <a:rPr sz="900" b="0" i="0" spc="60">
+                <a:solidFill>
+                  <a:srgbClr val="5A4A3A"/>
+                </a:solidFill>
+                <a:latin typeface="JetBrains Mono Light"/>
+              </a:rPr>
+              <a:t>ed25519 + rfc 8785 jcs.</a:t>
+            </a:r>
+          </a:p>
+          <a:p>
+            <a:pPr algn="l">
+              <a:lnSpc>
+                <a:spcPct val="150000"/>
+              </a:lnSpc>
+            </a:pPr>
+            <a:r>
+              <a:rPr sz="900" b="0" i="0" spc="60">
+                <a:solidFill>
+                  <a:srgbClr val="5A4A3A"/>
+                </a:solidFill>
+                <a:latin typeface="JetBrains Mono Light"/>
+              </a:rPr>
+              <a:t>a counterfeit shawl can be made.</a:t>
+            </a:r>
+          </a:p>
+          <a:p>
+            <a:pPr algn="l">
+              <a:lnSpc>
+                <a:spcPct val="150000"/>
+              </a:lnSpc>
+            </a:pPr>
+            <a:r>
+              <a:rPr sz="900" b="0" i="0" spc="60">
+                <a:solidFill>
+                  <a:srgbClr val="5A4A3A"/>
+                </a:solidFill>
+                <a:latin typeface="JetBrains Mono Light"/>
+              </a:rPr>
+              <a:t>a sanad signed by mohammad yusuf cannot.</a:t>
+            </a:r>
+          </a:p>
+        </p:txBody>
+      </p:sp>
       <p:cxnSp>
         <p:nvCxnSpPr>
-          <p:cNvPr id="8" name="Connector 7"/>
+          <p:cNvPr id="22" name="Connector 21"/>
           <p:cNvCxnSpPr/>
           <p:nvPr/>
         </p:nvCxnSpPr>
         <p:spPr>
-          <a:xfrm>
-            <a:off x="1303108" y="2008811"/>
-            <a:ext cx="138140" cy="130184"/>
+          <a:xfrm flipH="1">
+            <a:off x="4005072" y="1874519"/>
+            <a:ext cx="5047488" cy="347472"/>
           </a:xfrm>
           <a:prstGeom prst="line">
             <a:avLst/>
           </a:prstGeom>
-          <a:ln w="10160">
+          <a:ln w="6350">
             <a:solidFill>
-              <a:srgbClr val="1C1410"/>
+              <a:srgbClr val="B7B3AE"/>
             </a:solidFill>
+            <a:prstDash val="sysDot"/>
           </a:ln>
         </p:spPr>
         <p:style>
@@ -4897,401 +6110,367 @@
           </a:fontRef>
         </p:style>
       </p:cxnSp>
-      <p:cxnSp>
-        <p:nvCxnSpPr>
-          <p:cNvPr id="9" name="Connector 8"/>
-          <p:cNvCxnSpPr/>
-          <p:nvPr/>
-        </p:nvCxnSpPr>
-        <p:spPr>
-          <a:xfrm>
-            <a:off x="1461303" y="2096957"/>
-            <a:ext cx="53927" cy="241870"/>
-          </a:xfrm>
-          <a:prstGeom prst="line">
-            <a:avLst/>
-          </a:prstGeom>
-          <a:ln w="10160">
-            <a:solidFill>
-              <a:srgbClr val="1C1410"/>
-            </a:solidFill>
+      <p:sp>
+        <p:nvSpPr>
+          <p:cNvPr id="23" name="TextBox 22"/>
+          <p:cNvSpPr txBox="1"/>
+          <p:nvPr/>
+        </p:nvSpPr>
+        <p:spPr>
+          <a:xfrm>
+            <a:off x="548640" y="4965192"/>
+            <a:ext cx="1005840" cy="292608"/>
+          </a:xfrm>
+          <a:prstGeom prst="rect">
+            <a:avLst/>
+          </a:prstGeom>
+          <a:noFill/>
+        </p:spPr>
+        <p:txBody>
+          <a:bodyPr wrap="square" lIns="0" rIns="0" tIns="0" bIns="0" anchor="t">
+            <a:noAutofit/>
+          </a:bodyPr>
+          <a:lstStyle/>
+          <a:p>
+            <a:pPr algn="l"/>
+            <a:r>
+              <a:rPr sz="1000" b="1" i="0">
+                <a:solidFill>
+                  <a:srgbClr val="1C1410"/>
+                </a:solidFill>
+                <a:latin typeface="JetBrains Mono"/>
+              </a:rPr>
+              <a:t>today</a:t>
+            </a:r>
+          </a:p>
+        </p:txBody>
+      </p:sp>
+      <p:sp>
+        <p:nvSpPr>
+          <p:cNvPr id="24" name="Rectangle 23"/>
+          <p:cNvSpPr/>
+          <p:nvPr/>
+        </p:nvSpPr>
+        <p:spPr>
+          <a:xfrm>
+            <a:off x="1645920" y="4937760"/>
+            <a:ext cx="6419088" cy="256032"/>
+          </a:xfrm>
+          <a:prstGeom prst="rect">
+            <a:avLst/>
+          </a:prstGeom>
+          <a:solidFill>
+            <a:srgbClr val="1C1410"/>
+          </a:solidFill>
+          <a:ln>
+            <a:noFill/>
           </a:ln>
+          <a:effectLst/>
         </p:spPr>
         <p:style>
-          <a:lnRef idx="2">
+          <a:lnRef idx="1">
             <a:schemeClr val="accent1"/>
           </a:lnRef>
-          <a:fillRef idx="0">
+          <a:fillRef idx="3">
             <a:schemeClr val="accent1"/>
           </a:fillRef>
-          <a:effectRef idx="1">
+          <a:effectRef idx="2">
             <a:schemeClr val="accent1"/>
           </a:effectRef>
           <a:fontRef idx="minor">
-            <a:schemeClr val="tx1"/>
+            <a:schemeClr val="lt1"/>
           </a:fontRef>
         </p:style>
-      </p:cxnSp>
-      <p:cxnSp>
-        <p:nvCxnSpPr>
-          <p:cNvPr id="10" name="Connector 9"/>
-          <p:cNvCxnSpPr/>
-          <p:nvPr/>
-        </p:nvCxnSpPr>
-        <p:spPr>
-          <a:xfrm>
-            <a:off x="1285436" y="2466198"/>
-            <a:ext cx="136162" cy="206401"/>
-          </a:xfrm>
-          <a:prstGeom prst="line">
-            <a:avLst/>
-          </a:prstGeom>
-          <a:ln w="10160">
-            <a:solidFill>
-              <a:srgbClr val="1C1410"/>
-            </a:solidFill>
+        <p:txBody>
+          <a:bodyPr rtlCol="0" anchor="ctr"/>
+          <a:lstStyle/>
+          <a:p>
+            <a:pPr algn="ctr"/>
+          </a:p>
+        </p:txBody>
+      </p:sp>
+      <p:sp>
+        <p:nvSpPr>
+          <p:cNvPr id="25" name="Rectangle 24"/>
+          <p:cNvSpPr/>
+          <p:nvPr/>
+        </p:nvSpPr>
+        <p:spPr>
+          <a:xfrm>
+            <a:off x="8065008" y="4937760"/>
+            <a:ext cx="1810511" cy="256032"/>
+          </a:xfrm>
+          <a:prstGeom prst="rect">
+            <a:avLst/>
+          </a:prstGeom>
+          <a:solidFill>
+            <a:srgbClr val="C2BAB2"/>
+          </a:solidFill>
+          <a:ln>
+            <a:noFill/>
           </a:ln>
+          <a:effectLst/>
         </p:spPr>
         <p:style>
-          <a:lnRef idx="2">
+          <a:lnRef idx="1">
             <a:schemeClr val="accent1"/>
           </a:lnRef>
-          <a:fillRef idx="0">
+          <a:fillRef idx="3">
             <a:schemeClr val="accent1"/>
           </a:fillRef>
-          <a:effectRef idx="1">
+          <a:effectRef idx="2">
             <a:schemeClr val="accent1"/>
           </a:effectRef>
           <a:fontRef idx="minor">
-            <a:schemeClr val="tx1"/>
+            <a:schemeClr val="lt1"/>
           </a:fontRef>
         </p:style>
-      </p:cxnSp>
-      <p:cxnSp>
-        <p:nvCxnSpPr>
-          <p:cNvPr id="11" name="Connector 10"/>
-          <p:cNvCxnSpPr/>
-          <p:nvPr/>
-        </p:nvCxnSpPr>
-        <p:spPr>
-          <a:xfrm>
-            <a:off x="1403108" y="2634123"/>
-            <a:ext cx="122160" cy="212923"/>
-          </a:xfrm>
-          <a:prstGeom prst="line">
-            <a:avLst/>
-          </a:prstGeom>
-          <a:ln w="10160">
-            <a:solidFill>
-              <a:srgbClr val="1C1410"/>
-            </a:solidFill>
+        <p:txBody>
+          <a:bodyPr rtlCol="0" anchor="ctr"/>
+          <a:lstStyle/>
+          <a:p>
+            <a:pPr algn="ctr"/>
+          </a:p>
+        </p:txBody>
+      </p:sp>
+      <p:sp>
+        <p:nvSpPr>
+          <p:cNvPr id="26" name="TextBox 25"/>
+          <p:cNvSpPr txBox="1"/>
+          <p:nvPr/>
+        </p:nvSpPr>
+        <p:spPr>
+          <a:xfrm>
+            <a:off x="1691640" y="5230368"/>
+            <a:ext cx="6419088" cy="201168"/>
+          </a:xfrm>
+          <a:prstGeom prst="rect">
+            <a:avLst/>
+          </a:prstGeom>
+          <a:noFill/>
+        </p:spPr>
+        <p:txBody>
+          <a:bodyPr wrap="square" lIns="0" rIns="0" tIns="0" bIns="0" anchor="t">
+            <a:noAutofit/>
+          </a:bodyPr>
+          <a:lstStyle/>
+          <a:p>
+            <a:pPr algn="l"/>
+            <a:r>
+              <a:rPr sz="900" b="0" i="0" spc="60">
+                <a:solidFill>
+                  <a:srgbClr val="5A4A3A"/>
+                </a:solidFill>
+                <a:latin typeface="JetBrains Mono Light"/>
+              </a:rPr>
+              <a:t>middleman chain  ·  70 to 85 percent</a:t>
+            </a:r>
+          </a:p>
+        </p:txBody>
+      </p:sp>
+      <p:sp>
+        <p:nvSpPr>
+          <p:cNvPr id="27" name="TextBox 26"/>
+          <p:cNvSpPr txBox="1"/>
+          <p:nvPr/>
+        </p:nvSpPr>
+        <p:spPr>
+          <a:xfrm>
+            <a:off x="8110728" y="5230368"/>
+            <a:ext cx="3273551" cy="201168"/>
+          </a:xfrm>
+          <a:prstGeom prst="rect">
+            <a:avLst/>
+          </a:prstGeom>
+          <a:noFill/>
+        </p:spPr>
+        <p:txBody>
+          <a:bodyPr wrap="square" lIns="0" rIns="0" tIns="0" bIns="0" anchor="t">
+            <a:noAutofit/>
+          </a:bodyPr>
+          <a:lstStyle/>
+          <a:p>
+            <a:pPr algn="l"/>
+            <a:r>
+              <a:rPr sz="900" b="0" i="0" spc="60">
+                <a:solidFill>
+                  <a:srgbClr val="5A4A3A"/>
+                </a:solidFill>
+                <a:latin typeface="JetBrains Mono Light"/>
+              </a:rPr>
+              <a:t>artisan  ·  15 to 30 percent</a:t>
+            </a:r>
+          </a:p>
+        </p:txBody>
+      </p:sp>
+      <p:sp>
+        <p:nvSpPr>
+          <p:cNvPr id="28" name="TextBox 27"/>
+          <p:cNvSpPr txBox="1"/>
+          <p:nvPr/>
+        </p:nvSpPr>
+        <p:spPr>
+          <a:xfrm>
+            <a:off x="548640" y="5632704"/>
+            <a:ext cx="1005840" cy="292608"/>
+          </a:xfrm>
+          <a:prstGeom prst="rect">
+            <a:avLst/>
+          </a:prstGeom>
+          <a:noFill/>
+        </p:spPr>
+        <p:txBody>
+          <a:bodyPr wrap="square" lIns="0" rIns="0" tIns="0" bIns="0" anchor="t">
+            <a:noAutofit/>
+          </a:bodyPr>
+          <a:lstStyle/>
+          <a:p>
+            <a:pPr algn="l"/>
+            <a:r>
+              <a:rPr sz="1000" b="1" i="0">
+                <a:solidFill>
+                  <a:srgbClr val="8B1A1A"/>
+                </a:solidFill>
+                <a:latin typeface="JetBrains Mono"/>
+              </a:rPr>
+              <a:t>hunarmand</a:t>
+            </a:r>
+          </a:p>
+        </p:txBody>
+      </p:sp>
+      <p:sp>
+        <p:nvSpPr>
+          <p:cNvPr id="29" name="Rectangle 28"/>
+          <p:cNvSpPr/>
+          <p:nvPr/>
+        </p:nvSpPr>
+        <p:spPr>
+          <a:xfrm>
+            <a:off x="1645920" y="5605272"/>
+            <a:ext cx="658368" cy="256032"/>
+          </a:xfrm>
+          <a:prstGeom prst="rect">
+            <a:avLst/>
+          </a:prstGeom>
+          <a:solidFill>
+            <a:srgbClr val="8B1A1A"/>
+          </a:solidFill>
+          <a:ln>
+            <a:noFill/>
           </a:ln>
+          <a:effectLst/>
         </p:spPr>
         <p:style>
-          <a:lnRef idx="2">
+          <a:lnRef idx="1">
             <a:schemeClr val="accent1"/>
           </a:lnRef>
-          <a:fillRef idx="0">
+          <a:fillRef idx="3">
             <a:schemeClr val="accent1"/>
           </a:fillRef>
-          <a:effectRef idx="1">
+          <a:effectRef idx="2">
             <a:schemeClr val="accent1"/>
           </a:effectRef>
           <a:fontRef idx="minor">
-            <a:schemeClr val="tx1"/>
+            <a:schemeClr val="lt1"/>
           </a:fontRef>
         </p:style>
-      </p:cxnSp>
-      <p:cxnSp>
-        <p:nvCxnSpPr>
-          <p:cNvPr id="12" name="Connector 11"/>
-          <p:cNvCxnSpPr/>
-          <p:nvPr/>
-        </p:nvCxnSpPr>
-        <p:spPr>
-          <a:xfrm>
-            <a:off x="1300194" y="2966100"/>
-            <a:ext cx="103197" cy="164784"/>
-          </a:xfrm>
-          <a:prstGeom prst="line">
-            <a:avLst/>
-          </a:prstGeom>
-          <a:ln w="10160">
-            <a:solidFill>
-              <a:srgbClr val="1C1410"/>
-            </a:solidFill>
+        <p:txBody>
+          <a:bodyPr rtlCol="0" anchor="ctr"/>
+          <a:lstStyle/>
+          <a:p>
+            <a:pPr algn="ctr"/>
+          </a:p>
+        </p:txBody>
+      </p:sp>
+      <p:sp>
+        <p:nvSpPr>
+          <p:cNvPr id="30" name="Rectangle 29"/>
+          <p:cNvSpPr/>
+          <p:nvPr/>
+        </p:nvSpPr>
+        <p:spPr>
+          <a:xfrm>
+            <a:off x="2304288" y="5605272"/>
+            <a:ext cx="7571231" cy="256032"/>
+          </a:xfrm>
+          <a:prstGeom prst="rect">
+            <a:avLst/>
+          </a:prstGeom>
+          <a:solidFill>
+            <a:srgbClr val="1C1410"/>
+          </a:solidFill>
+          <a:ln>
+            <a:noFill/>
           </a:ln>
+          <a:effectLst/>
         </p:spPr>
         <p:style>
-          <a:lnRef idx="2">
+          <a:lnRef idx="1">
             <a:schemeClr val="accent1"/>
           </a:lnRef>
-          <a:fillRef idx="0">
+          <a:fillRef idx="3">
             <a:schemeClr val="accent1"/>
           </a:fillRef>
-          <a:effectRef idx="1">
+          <a:effectRef idx="2">
             <a:schemeClr val="accent1"/>
           </a:effectRef>
           <a:fontRef idx="minor">
-            <a:schemeClr val="tx1"/>
+            <a:schemeClr val="lt1"/>
           </a:fontRef>
         </p:style>
-      </p:cxnSp>
-      <p:cxnSp>
-        <p:nvCxnSpPr>
-          <p:cNvPr id="13" name="Connector 12"/>
-          <p:cNvCxnSpPr/>
-          <p:nvPr/>
-        </p:nvCxnSpPr>
-        <p:spPr>
-          <a:xfrm>
-            <a:off x="1439660" y="3127185"/>
-            <a:ext cx="100457" cy="236425"/>
-          </a:xfrm>
-          <a:prstGeom prst="line">
-            <a:avLst/>
-          </a:prstGeom>
-          <a:ln w="10160">
-            <a:solidFill>
-              <a:srgbClr val="1C1410"/>
-            </a:solidFill>
-          </a:ln>
-        </p:spPr>
-        <p:style>
-          <a:lnRef idx="2">
-            <a:schemeClr val="accent1"/>
-          </a:lnRef>
-          <a:fillRef idx="0">
-            <a:schemeClr val="accent1"/>
-          </a:fillRef>
-          <a:effectRef idx="1">
-            <a:schemeClr val="accent1"/>
-          </a:effectRef>
-          <a:fontRef idx="minor">
-            <a:schemeClr val="tx1"/>
-          </a:fontRef>
-        </p:style>
-      </p:cxnSp>
-      <p:cxnSp>
-        <p:nvCxnSpPr>
-          <p:cNvPr id="14" name="Connector 13"/>
-          <p:cNvCxnSpPr/>
-          <p:nvPr/>
-        </p:nvCxnSpPr>
-        <p:spPr>
-          <a:xfrm>
-            <a:off x="1296735" y="3482022"/>
-            <a:ext cx="160407" cy="187848"/>
-          </a:xfrm>
-          <a:prstGeom prst="line">
-            <a:avLst/>
-          </a:prstGeom>
-          <a:ln w="10160">
-            <a:solidFill>
-              <a:srgbClr val="1C1410"/>
-            </a:solidFill>
-          </a:ln>
-        </p:spPr>
-        <p:style>
-          <a:lnRef idx="2">
-            <a:schemeClr val="accent1"/>
-          </a:lnRef>
-          <a:fillRef idx="0">
-            <a:schemeClr val="accent1"/>
-          </a:fillRef>
-          <a:effectRef idx="1">
-            <a:schemeClr val="accent1"/>
-          </a:effectRef>
-          <a:fontRef idx="minor">
-            <a:schemeClr val="tx1"/>
-          </a:fontRef>
-        </p:style>
-      </p:cxnSp>
-      <p:cxnSp>
-        <p:nvCxnSpPr>
-          <p:cNvPr id="15" name="Connector 14"/>
-          <p:cNvCxnSpPr/>
-          <p:nvPr/>
-        </p:nvCxnSpPr>
-        <p:spPr>
-          <a:xfrm>
-            <a:off x="1407744" y="3639503"/>
-            <a:ext cx="122724" cy="245562"/>
-          </a:xfrm>
-          <a:prstGeom prst="line">
-            <a:avLst/>
-          </a:prstGeom>
-          <a:ln w="10160">
-            <a:solidFill>
-              <a:srgbClr val="1C1410"/>
-            </a:solidFill>
-          </a:ln>
-        </p:spPr>
-        <p:style>
-          <a:lnRef idx="2">
-            <a:schemeClr val="accent1"/>
-          </a:lnRef>
-          <a:fillRef idx="0">
-            <a:schemeClr val="accent1"/>
-          </a:fillRef>
-          <a:effectRef idx="1">
-            <a:schemeClr val="accent1"/>
-          </a:effectRef>
-          <a:fontRef idx="minor">
-            <a:schemeClr val="tx1"/>
-          </a:fontRef>
-        </p:style>
-      </p:cxnSp>
-      <p:cxnSp>
-        <p:nvCxnSpPr>
-          <p:cNvPr id="16" name="Connector 15"/>
-          <p:cNvCxnSpPr/>
-          <p:nvPr/>
-        </p:nvCxnSpPr>
-        <p:spPr>
-          <a:xfrm>
-            <a:off x="1306840" y="3984293"/>
-            <a:ext cx="163893" cy="146001"/>
-          </a:xfrm>
-          <a:prstGeom prst="line">
-            <a:avLst/>
-          </a:prstGeom>
-          <a:ln w="10160">
-            <a:solidFill>
-              <a:srgbClr val="1C1410"/>
-            </a:solidFill>
-          </a:ln>
-        </p:spPr>
-        <p:style>
-          <a:lnRef idx="2">
-            <a:schemeClr val="accent1"/>
-          </a:lnRef>
-          <a:fillRef idx="0">
-            <a:schemeClr val="accent1"/>
-          </a:fillRef>
-          <a:effectRef idx="1">
-            <a:schemeClr val="accent1"/>
-          </a:effectRef>
-          <a:fontRef idx="minor">
-            <a:schemeClr val="tx1"/>
-          </a:fontRef>
-        </p:style>
-      </p:cxnSp>
-      <p:cxnSp>
-        <p:nvCxnSpPr>
-          <p:cNvPr id="17" name="Connector 16"/>
-          <p:cNvCxnSpPr/>
-          <p:nvPr/>
-        </p:nvCxnSpPr>
-        <p:spPr>
-          <a:xfrm>
-            <a:off x="1420474" y="4154119"/>
-            <a:ext cx="127057" cy="209148"/>
-          </a:xfrm>
-          <a:prstGeom prst="line">
-            <a:avLst/>
-          </a:prstGeom>
-          <a:ln w="10160">
-            <a:solidFill>
-              <a:srgbClr val="1C1410"/>
-            </a:solidFill>
-          </a:ln>
-        </p:spPr>
-        <p:style>
-          <a:lnRef idx="2">
-            <a:schemeClr val="accent1"/>
-          </a:lnRef>
-          <a:fillRef idx="0">
-            <a:schemeClr val="accent1"/>
-          </a:fillRef>
-          <a:effectRef idx="1">
-            <a:schemeClr val="accent1"/>
-          </a:effectRef>
-          <a:fontRef idx="minor">
-            <a:schemeClr val="tx1"/>
-          </a:fontRef>
-        </p:style>
-      </p:cxnSp>
-      <p:cxnSp>
-        <p:nvCxnSpPr>
-          <p:cNvPr id="18" name="Connector 17"/>
-          <p:cNvCxnSpPr/>
-          <p:nvPr/>
-        </p:nvCxnSpPr>
-        <p:spPr>
-          <a:xfrm>
-            <a:off x="1281594" y="4508076"/>
-            <a:ext cx="173367" cy="158419"/>
-          </a:xfrm>
-          <a:prstGeom prst="line">
-            <a:avLst/>
-          </a:prstGeom>
-          <a:ln w="10160">
-            <a:solidFill>
-              <a:srgbClr val="1C1410"/>
-            </a:solidFill>
-          </a:ln>
-        </p:spPr>
-        <p:style>
-          <a:lnRef idx="2">
-            <a:schemeClr val="accent1"/>
-          </a:lnRef>
-          <a:fillRef idx="0">
-            <a:schemeClr val="accent1"/>
-          </a:fillRef>
-          <a:effectRef idx="1">
-            <a:schemeClr val="accent1"/>
-          </a:effectRef>
-          <a:fontRef idx="minor">
-            <a:schemeClr val="tx1"/>
-          </a:fontRef>
-        </p:style>
-      </p:cxnSp>
-      <p:cxnSp>
-        <p:nvCxnSpPr>
-          <p:cNvPr id="19" name="Connector 18"/>
-          <p:cNvCxnSpPr/>
-          <p:nvPr/>
-        </p:nvCxnSpPr>
-        <p:spPr>
-          <a:xfrm>
-            <a:off x="1453930" y="4628658"/>
-            <a:ext cx="68761" cy="244276"/>
-          </a:xfrm>
-          <a:prstGeom prst="line">
-            <a:avLst/>
-          </a:prstGeom>
-          <a:ln w="10160">
-            <a:solidFill>
-              <a:srgbClr val="1C1410"/>
-            </a:solidFill>
-          </a:ln>
-        </p:spPr>
-        <p:style>
-          <a:lnRef idx="2">
-            <a:schemeClr val="accent1"/>
-          </a:lnRef>
-          <a:fillRef idx="0">
-            <a:schemeClr val="accent1"/>
-          </a:fillRef>
-          <a:effectRef idx="1">
-            <a:schemeClr val="accent1"/>
-          </a:effectRef>
-          <a:fontRef idx="minor">
-            <a:schemeClr val="tx1"/>
-          </a:fontRef>
-        </p:style>
-      </p:cxnSp>
-      <p:sp>
-        <p:nvSpPr>
-          <p:cNvPr id="20" name="TextBox 19"/>
-          <p:cNvSpPr txBox="1"/>
-          <p:nvPr/>
-        </p:nvSpPr>
-        <p:spPr>
-          <a:xfrm>
-            <a:off x="6766560" y="502920"/>
-            <a:ext cx="4572000" cy="228600"/>
+        <p:txBody>
+          <a:bodyPr rtlCol="0" anchor="ctr"/>
+          <a:lstStyle/>
+          <a:p>
+            <a:pPr algn="ctr"/>
+          </a:p>
+        </p:txBody>
+      </p:sp>
+      <p:sp>
+        <p:nvSpPr>
+          <p:cNvPr id="31" name="TextBox 30"/>
+          <p:cNvSpPr txBox="1"/>
+          <p:nvPr/>
+        </p:nvSpPr>
+        <p:spPr>
+          <a:xfrm>
+            <a:off x="182879" y="5897880"/>
+            <a:ext cx="2075688" cy="201168"/>
+          </a:xfrm>
+          <a:prstGeom prst="rect">
+            <a:avLst/>
+          </a:prstGeom>
+          <a:noFill/>
+        </p:spPr>
+        <p:txBody>
+          <a:bodyPr wrap="square" lIns="0" rIns="0" tIns="0" bIns="0" anchor="t">
+            <a:noAutofit/>
+          </a:bodyPr>
+          <a:lstStyle/>
+          <a:p>
+            <a:pPr algn="r"/>
+            <a:r>
+              <a:rPr sz="900" b="0" i="0" spc="60">
+                <a:solidFill>
+                  <a:srgbClr val="5A4A3A"/>
+                </a:solidFill>
+                <a:latin typeface="JetBrains Mono Light"/>
+              </a:rPr>
+              <a:t>platform  ·  6 to 9 percent</a:t>
+            </a:r>
+          </a:p>
+        </p:txBody>
+      </p:sp>
+      <p:sp>
+        <p:nvSpPr>
+          <p:cNvPr id="32" name="TextBox 31"/>
+          <p:cNvSpPr txBox="1"/>
+          <p:nvPr/>
+        </p:nvSpPr>
+        <p:spPr>
+          <a:xfrm>
+            <a:off x="2441448" y="5897880"/>
+            <a:ext cx="7571231" cy="201168"/>
           </a:xfrm>
           <a:prstGeom prst="rect">
             <a:avLst/>
@@ -5312,349 +6491,14 @@
                 </a:solidFill>
                 <a:latin typeface="JetBrains Mono Light"/>
               </a:rPr>
-              <a:t>craft dna, hunarmand, 2026</a:t>
-            </a:r>
-          </a:p>
-        </p:txBody>
-      </p:sp>
-      <p:sp>
-        <p:nvSpPr>
-          <p:cNvPr id="21" name="TextBox 20"/>
-          <p:cNvSpPr txBox="1"/>
-          <p:nvPr/>
-        </p:nvSpPr>
-        <p:spPr>
-          <a:xfrm>
-            <a:off x="6766560" y="914400"/>
-            <a:ext cx="4876495" cy="4206240"/>
-          </a:xfrm>
-          <a:prstGeom prst="rect">
-            <a:avLst/>
-          </a:prstGeom>
-          <a:noFill/>
-        </p:spPr>
-        <p:txBody>
-          <a:bodyPr wrap="none" lIns="0" rIns="0" tIns="0" bIns="0">
-            <a:noAutofit/>
-          </a:bodyPr>
-          <a:lstStyle/>
-          <a:p>
-            <a:pPr algn="l">
-              <a:lnSpc>
-                <a:spcPct val="145000"/>
-              </a:lnSpc>
-            </a:pPr>
-            <a:r>
-              <a:rPr sz="1100" b="1">
-                <a:solidFill>
-                  <a:srgbClr val="1C1410"/>
-                </a:solidFill>
-                <a:latin typeface="JetBrains Mono"/>
-              </a:rPr>
-              <a:t>{</a:t>
-            </a:r>
-          </a:p>
-          <a:p>
-            <a:pPr algn="l">
-              <a:lnSpc>
-                <a:spcPct val="145000"/>
-              </a:lnSpc>
-            </a:pPr>
-            <a:r>
-              <a:rPr sz="1100" b="1">
-                <a:solidFill>
-                  <a:srgbClr val="1C1410"/>
-                </a:solidFill>
-                <a:latin typeface="JetBrains Mono"/>
-              </a:rPr>
-              <a:t>  "piece":      </a:t>
-            </a:r>
-            <a:r>
-              <a:rPr sz="1100">
-                <a:solidFill>
-                  <a:srgbClr val="5A4A3A"/>
-                </a:solidFill>
-                <a:latin typeface="JetBrains Mono"/>
-              </a:rPr>
-              <a:t>"kani-buti pashmina shawl",</a:t>
-            </a:r>
-          </a:p>
-          <a:p>
-            <a:pPr algn="l">
-              <a:lnSpc>
-                <a:spcPct val="145000"/>
-              </a:lnSpc>
-            </a:pPr>
-            <a:r>
-              <a:rPr sz="1100" b="1">
-                <a:solidFill>
-                  <a:srgbClr val="1C1410"/>
-                </a:solidFill>
-                <a:latin typeface="JetBrains Mono"/>
-              </a:rPr>
-              <a:t>  "warp":       </a:t>
-            </a:r>
-            <a:r>
-              <a:rPr sz="1100">
-                <a:solidFill>
-                  <a:srgbClr val="5A4A3A"/>
-                </a:solidFill>
-                <a:latin typeface="JetBrains Mono"/>
-              </a:rPr>
-              <a:t>"single, 28 ends per cm",</a:t>
-            </a:r>
-          </a:p>
-          <a:p>
-            <a:pPr algn="l">
-              <a:lnSpc>
-                <a:spcPct val="145000"/>
-              </a:lnSpc>
-            </a:pPr>
-            <a:r>
-              <a:rPr sz="1100" b="1">
-                <a:solidFill>
-                  <a:srgbClr val="1C1410"/>
-                </a:solidFill>
-                <a:latin typeface="JetBrains Mono"/>
-              </a:rPr>
-              <a:t>  "weft":       </a:t>
-            </a:r>
-            <a:r>
-              <a:rPr sz="1100">
-                <a:solidFill>
-                  <a:srgbClr val="5A4A3A"/>
-                </a:solidFill>
-                <a:latin typeface="JetBrains Mono"/>
-              </a:rPr>
-              <a:t>["pashmina, ladakh", "silk, varanasi"],</a:t>
-            </a:r>
-          </a:p>
-          <a:p>
-            <a:pPr algn="l">
-              <a:lnSpc>
-                <a:spcPct val="145000"/>
-              </a:lnSpc>
-            </a:pPr>
-            <a:r>
-              <a:rPr sz="1100" b="1">
-                <a:solidFill>
-                  <a:srgbClr val="1C1410"/>
-                </a:solidFill>
-                <a:latin typeface="JetBrains Mono"/>
-              </a:rPr>
-              <a:t>  "knot":       </a:t>
-            </a:r>
-            <a:r>
-              <a:rPr sz="1100">
-                <a:solidFill>
-                  <a:srgbClr val="5A4A3A"/>
-                </a:solidFill>
-                <a:latin typeface="JetBrains Mono"/>
-              </a:rPr>
-              <a:t>"1940s srinagar twill-tapestry",</a:t>
-            </a:r>
-          </a:p>
-          <a:p>
-            <a:pPr algn="l">
-              <a:lnSpc>
-                <a:spcPct val="145000"/>
-              </a:lnSpc>
-            </a:pPr>
-            <a:r>
-              <a:rPr sz="1100" b="1">
-                <a:solidFill>
-                  <a:srgbClr val="1C1410"/>
-                </a:solidFill>
-                <a:latin typeface="JetBrains Mono"/>
-              </a:rPr>
-              <a:t>  "dye":        </a:t>
-            </a:r>
-            <a:r>
-              <a:rPr sz="1100">
-                <a:solidFill>
-                  <a:srgbClr val="5A4A3A"/>
-                </a:solidFill>
-                <a:latin typeface="JetBrains Mono"/>
-              </a:rPr>
-              <a:t>["walnut bark", "saffron stigma"],</a:t>
-            </a:r>
-          </a:p>
-          <a:p>
-            <a:pPr algn="l">
-              <a:lnSpc>
-                <a:spcPct val="145000"/>
-              </a:lnSpc>
-            </a:pPr>
-            <a:r>
-              <a:rPr sz="1100" b="1">
-                <a:solidFill>
-                  <a:srgbClr val="1C1410"/>
-                </a:solidFill>
-                <a:latin typeface="JetBrains Mono"/>
-              </a:rPr>
-              <a:t>  "kid":        </a:t>
-            </a:r>
-            <a:r>
-              <a:rPr sz="1100">
-                <a:solidFill>
-                  <a:srgbClr val="5A4A3A"/>
-                </a:solidFill>
-                <a:latin typeface="JetBrains Mono"/>
-              </a:rPr>
-              <a:t>"mohammad-yusuf:1",</a:t>
-            </a:r>
-          </a:p>
-          <a:p>
-            <a:pPr algn="l">
-              <a:lnSpc>
-                <a:spcPct val="145000"/>
-              </a:lnSpc>
-            </a:pPr>
-            <a:r>
-              <a:rPr sz="1100" b="1">
-                <a:solidFill>
-                  <a:srgbClr val="1C1410"/>
-                </a:solidFill>
-                <a:latin typeface="JetBrains Mono"/>
-              </a:rPr>
-              <a:t>  "signature":  </a:t>
-            </a:r>
-            <a:r>
-              <a:rPr sz="1100">
-                <a:solidFill>
-                  <a:srgbClr val="5A4A3A"/>
-                </a:solidFill>
-                <a:latin typeface="JetBrains Mono"/>
-              </a:rPr>
-              <a:t>"ed25519, jcs canonical"</a:t>
-            </a:r>
-          </a:p>
-          <a:p>
-            <a:pPr algn="l">
-              <a:lnSpc>
-                <a:spcPct val="145000"/>
-              </a:lnSpc>
-            </a:pPr>
-            <a:r>
-              <a:rPr sz="1100" b="1">
-                <a:solidFill>
-                  <a:srgbClr val="1C1410"/>
-                </a:solidFill>
-                <a:latin typeface="JetBrains Mono"/>
-              </a:rPr>
-              <a:t>}</a:t>
-            </a:r>
-          </a:p>
-        </p:txBody>
-      </p:sp>
-      <p:cxnSp>
-        <p:nvCxnSpPr>
-          <p:cNvPr id="22" name="Connector 21"/>
-          <p:cNvCxnSpPr/>
-          <p:nvPr/>
-        </p:nvCxnSpPr>
-        <p:spPr>
-          <a:xfrm flipV="1">
-            <a:off x="1463040" y="3291840"/>
-            <a:ext cx="2628900" cy="1554480"/>
-          </a:xfrm>
-          <a:prstGeom prst="line">
-            <a:avLst/>
-          </a:prstGeom>
-          <a:ln w="12700">
-            <a:solidFill>
-              <a:srgbClr val="8B1A1A"/>
-            </a:solidFill>
-          </a:ln>
-        </p:spPr>
-        <p:style>
-          <a:lnRef idx="2">
-            <a:schemeClr val="accent1"/>
-          </a:lnRef>
-          <a:fillRef idx="0">
-            <a:schemeClr val="accent1"/>
-          </a:fillRef>
-          <a:effectRef idx="1">
-            <a:schemeClr val="accent1"/>
-          </a:effectRef>
-          <a:fontRef idx="minor">
-            <a:schemeClr val="tx1"/>
-          </a:fontRef>
-        </p:style>
-      </p:cxnSp>
-      <p:cxnSp>
-        <p:nvCxnSpPr>
-          <p:cNvPr id="23" name="Connector 22"/>
-          <p:cNvCxnSpPr/>
-          <p:nvPr/>
-        </p:nvCxnSpPr>
-        <p:spPr>
-          <a:xfrm flipV="1">
-            <a:off x="4091940" y="1417320"/>
-            <a:ext cx="2601468" cy="1874520"/>
-          </a:xfrm>
-          <a:prstGeom prst="line">
-            <a:avLst/>
-          </a:prstGeom>
-          <a:ln w="12700">
-            <a:solidFill>
-              <a:srgbClr val="8B1A1A"/>
-            </a:solidFill>
-          </a:ln>
-        </p:spPr>
-        <p:style>
-          <a:lnRef idx="2">
-            <a:schemeClr val="accent1"/>
-          </a:lnRef>
-          <a:fillRef idx="0">
-            <a:schemeClr val="accent1"/>
-          </a:fillRef>
-          <a:effectRef idx="1">
-            <a:schemeClr val="accent1"/>
-          </a:effectRef>
-          <a:fontRef idx="minor">
-            <a:schemeClr val="tx1"/>
-          </a:fontRef>
-        </p:style>
-      </p:cxnSp>
-      <p:sp>
-        <p:nvSpPr>
-          <p:cNvPr id="24" name="TextBox 23"/>
-          <p:cNvSpPr txBox="1"/>
-          <p:nvPr/>
-        </p:nvSpPr>
-        <p:spPr>
-          <a:xfrm>
-            <a:off x="548640" y="5577840"/>
-            <a:ext cx="11094415" cy="365760"/>
-          </a:xfrm>
-          <a:prstGeom prst="rect">
-            <a:avLst/>
-          </a:prstGeom>
-          <a:noFill/>
-        </p:spPr>
-        <p:txBody>
-          <a:bodyPr wrap="square" lIns="0" rIns="0" tIns="0" bIns="0" anchor="t">
-            <a:noAutofit/>
-          </a:bodyPr>
-          <a:lstStyle/>
-          <a:p>
-            <a:pPr algn="l"/>
-            <a:r>
-              <a:rPr sz="1800" b="1" i="0">
-                <a:solidFill>
-                  <a:srgbClr val="1C1410"/>
-                </a:solidFill>
-                <a:latin typeface="JetBrains Mono"/>
-              </a:rPr>
-              <a:t>same instruction.  seventh medium.</a:t>
-            </a:r>
-          </a:p>
-        </p:txBody>
-      </p:sp>
-      <p:sp>
-        <p:nvSpPr>
-          <p:cNvPr id="25" name="TextBox 24"/>
+              <a:t>artisan  ·  91 to 94 percent</a:t>
+            </a:r>
+          </a:p>
+        </p:txBody>
+      </p:sp>
+      <p:sp>
+        <p:nvSpPr>
+          <p:cNvPr id="33" name="TextBox 32"/>
           <p:cNvSpPr txBox="1"/>
           <p:nvPr/>
         </p:nvSpPr>
@@ -5689,7 +6533,7 @@
       </p:sp>
       <p:sp>
         <p:nvSpPr>
-          <p:cNvPr id="26" name="TextBox 25"/>
+          <p:cNvPr id="34" name="TextBox 33"/>
           <p:cNvSpPr txBox="1"/>
           <p:nvPr/>
         </p:nvSpPr>
@@ -5717,7 +6561,7 @@
                 </a:solidFill>
                 <a:latin typeface="JetBrains Mono Light"/>
               </a:rPr>
-              <a:t>03 / 07</a:t>
+              <a:t>03 / 06</a:t>
             </a:r>
           </a:p>
         </p:txBody>
@@ -5793,7 +6637,7 @@
         <p:spPr>
           <a:xfrm>
             <a:off x="548640" y="411480"/>
-            <a:ext cx="4572000" cy="228600"/>
+            <a:ext cx="10972800" cy="228600"/>
           </a:xfrm>
           <a:prstGeom prst="rect">
             <a:avLst/>
@@ -5814,7 +6658,7 @@
                 </a:solidFill>
                 <a:latin typeface="JetBrains Mono Light"/>
               </a:rPr>
-              <a:t>architecture / 2026.q2</a:t>
+              <a:t>methodology / how tacit knowledge becomes infrastructure</a:t>
             </a:r>
           </a:p>
         </p:txBody>
@@ -5827,13 +6671,13 @@
         </p:nvCxnSpPr>
         <p:spPr>
           <a:xfrm>
-            <a:off x="1154776" y="1489991"/>
-            <a:ext cx="2799588" cy="1312307"/>
+            <a:off x="1163988" y="1050692"/>
+            <a:ext cx="145501" cy="129610"/>
           </a:xfrm>
           <a:prstGeom prst="line">
             <a:avLst/>
           </a:prstGeom>
-          <a:ln w="11430">
+          <a:ln w="10160">
             <a:solidFill>
               <a:srgbClr val="1C1410"/>
             </a:solidFill>
@@ -5862,13 +6706,13 @@
         </p:nvCxnSpPr>
         <p:spPr>
           <a:xfrm>
-            <a:off x="4092767" y="2866090"/>
-            <a:ext cx="2798833" cy="1268221"/>
+            <a:off x="1291928" y="1184695"/>
+            <a:ext cx="113596" cy="214812"/>
           </a:xfrm>
           <a:prstGeom prst="line">
             <a:avLst/>
           </a:prstGeom>
-          <a:ln w="11430">
+          <a:ln w="10160">
             <a:solidFill>
               <a:srgbClr val="1C1410"/>
             </a:solidFill>
@@ -5897,13 +6741,13 @@
         </p:nvCxnSpPr>
         <p:spPr>
           <a:xfrm>
-            <a:off x="7005827" y="4189720"/>
-            <a:ext cx="2447545" cy="1267479"/>
+            <a:off x="1153515" y="1523407"/>
+            <a:ext cx="113467" cy="115432"/>
           </a:xfrm>
           <a:prstGeom prst="line">
             <a:avLst/>
           </a:prstGeom>
-          <a:ln w="11430">
+          <a:ln w="10160">
             <a:solidFill>
               <a:srgbClr val="1C1410"/>
             </a:solidFill>
@@ -5924,479 +6768,23 @@
           </a:fontRef>
         </p:style>
       </p:cxnSp>
-      <p:sp>
-        <p:nvSpPr>
-          <p:cNvPr id="7" name="Oval 6"/>
-          <p:cNvSpPr/>
-          <p:nvPr/>
-        </p:nvSpPr>
-        <p:spPr>
-          <a:xfrm>
-            <a:off x="1033780" y="1399540"/>
-            <a:ext cx="127000" cy="127000"/>
-          </a:xfrm>
-          <a:prstGeom prst="ellipse">
-            <a:avLst/>
-          </a:prstGeom>
-          <a:solidFill>
-            <a:srgbClr val="1C1410"/>
-          </a:solidFill>
-          <a:ln>
-            <a:noFill/>
-          </a:ln>
-          <a:effectLst/>
-        </p:spPr>
-        <p:style>
-          <a:lnRef idx="1">
-            <a:schemeClr val="accent1"/>
-          </a:lnRef>
-          <a:fillRef idx="3">
-            <a:schemeClr val="accent1"/>
-          </a:fillRef>
-          <a:effectRef idx="2">
-            <a:schemeClr val="accent1"/>
-          </a:effectRef>
-          <a:fontRef idx="minor">
-            <a:schemeClr val="lt1"/>
-          </a:fontRef>
-        </p:style>
-        <p:txBody>
-          <a:bodyPr rtlCol="0" anchor="ctr"/>
-          <a:lstStyle/>
-          <a:p>
-            <a:pPr algn="ctr"/>
-          </a:p>
-        </p:txBody>
-      </p:sp>
-      <p:sp>
-        <p:nvSpPr>
-          <p:cNvPr id="8" name="TextBox 7"/>
-          <p:cNvSpPr txBox="1"/>
-          <p:nvPr/>
-        </p:nvSpPr>
-        <p:spPr>
-          <a:xfrm>
-            <a:off x="1361948" y="1170432"/>
-            <a:ext cx="10281107" cy="292608"/>
-          </a:xfrm>
-          <a:prstGeom prst="rect">
-            <a:avLst/>
-          </a:prstGeom>
-          <a:noFill/>
-        </p:spPr>
-        <p:txBody>
-          <a:bodyPr wrap="square" lIns="0" rIns="0" tIns="0" bIns="0" anchor="t">
-            <a:noAutofit/>
-          </a:bodyPr>
-          <a:lstStyle/>
-          <a:p>
-            <a:pPr algn="l"/>
-            <a:r>
-              <a:rPr sz="1600" b="1" i="0">
-                <a:solidFill>
-                  <a:srgbClr val="1C1410"/>
-                </a:solidFill>
-                <a:latin typeface="JetBrains Mono"/>
-              </a:rPr>
-              <a:t>vault</a:t>
-            </a:r>
-          </a:p>
-        </p:txBody>
-      </p:sp>
-      <p:sp>
-        <p:nvSpPr>
-          <p:cNvPr id="9" name="TextBox 8"/>
-          <p:cNvSpPr txBox="1"/>
-          <p:nvPr/>
-        </p:nvSpPr>
-        <p:spPr>
-          <a:xfrm>
-            <a:off x="1361948" y="1426464"/>
-            <a:ext cx="10281107" cy="292608"/>
-          </a:xfrm>
-          <a:prstGeom prst="rect">
-            <a:avLst/>
-          </a:prstGeom>
-          <a:noFill/>
-        </p:spPr>
-        <p:txBody>
-          <a:bodyPr wrap="square" lIns="0" rIns="0" tIns="0" bIns="0" anchor="t">
-            <a:noAutofit/>
-          </a:bodyPr>
-          <a:lstStyle/>
-          <a:p>
-            <a:pPr algn="l"/>
-            <a:r>
-              <a:rPr sz="1000" b="0" i="0" spc="60">
-                <a:solidFill>
-                  <a:srgbClr val="5A4A3A"/>
-                </a:solidFill>
-                <a:latin typeface="JetBrains Mono Light"/>
-              </a:rPr>
-              <a:t>captures what the master never wrote down</a:t>
-            </a:r>
-          </a:p>
-        </p:txBody>
-      </p:sp>
-      <p:sp>
-        <p:nvSpPr>
-          <p:cNvPr id="10" name="Oval 9"/>
-          <p:cNvSpPr/>
-          <p:nvPr/>
-        </p:nvSpPr>
-        <p:spPr>
-          <a:xfrm>
-            <a:off x="3947160" y="2758440"/>
-            <a:ext cx="152400" cy="152400"/>
-          </a:xfrm>
-          <a:prstGeom prst="ellipse">
-            <a:avLst/>
-          </a:prstGeom>
-          <a:solidFill>
-            <a:srgbClr val="8B1A1A"/>
-          </a:solidFill>
-          <a:ln>
-            <a:noFill/>
-          </a:ln>
-          <a:effectLst/>
-        </p:spPr>
-        <p:style>
-          <a:lnRef idx="1">
-            <a:schemeClr val="accent1"/>
-          </a:lnRef>
-          <a:fillRef idx="3">
-            <a:schemeClr val="accent1"/>
-          </a:fillRef>
-          <a:effectRef idx="2">
-            <a:schemeClr val="accent1"/>
-          </a:effectRef>
-          <a:fontRef idx="minor">
-            <a:schemeClr val="lt1"/>
-          </a:fontRef>
-        </p:style>
-        <p:txBody>
-          <a:bodyPr rtlCol="0" anchor="ctr"/>
-          <a:lstStyle/>
-          <a:p>
-            <a:pPr algn="ctr"/>
-          </a:p>
-        </p:txBody>
-      </p:sp>
-      <p:sp>
-        <p:nvSpPr>
-          <p:cNvPr id="11" name="TextBox 10"/>
-          <p:cNvSpPr txBox="1"/>
-          <p:nvPr/>
-        </p:nvSpPr>
-        <p:spPr>
-          <a:xfrm>
-            <a:off x="4300728" y="2542032"/>
-            <a:ext cx="7342327" cy="292608"/>
-          </a:xfrm>
-          <a:prstGeom prst="rect">
-            <a:avLst/>
-          </a:prstGeom>
-          <a:noFill/>
-        </p:spPr>
-        <p:txBody>
-          <a:bodyPr wrap="square" lIns="0" rIns="0" tIns="0" bIns="0" anchor="t">
-            <a:noAutofit/>
-          </a:bodyPr>
-          <a:lstStyle/>
-          <a:p>
-            <a:pPr algn="l"/>
-            <a:r>
-              <a:rPr sz="1600" b="1" i="0">
-                <a:solidFill>
-                  <a:srgbClr val="1C1410"/>
-                </a:solidFill>
-                <a:latin typeface="JetBrains Mono"/>
-              </a:rPr>
-              <a:t>sanad</a:t>
-            </a:r>
-          </a:p>
-        </p:txBody>
-      </p:sp>
-      <p:sp>
-        <p:nvSpPr>
-          <p:cNvPr id="12" name="TextBox 11"/>
-          <p:cNvSpPr txBox="1"/>
-          <p:nvPr/>
-        </p:nvSpPr>
-        <p:spPr>
-          <a:xfrm>
-            <a:off x="4300728" y="2798064"/>
-            <a:ext cx="7342327" cy="292608"/>
-          </a:xfrm>
-          <a:prstGeom prst="rect">
-            <a:avLst/>
-          </a:prstGeom>
-          <a:noFill/>
-        </p:spPr>
-        <p:txBody>
-          <a:bodyPr wrap="square" lIns="0" rIns="0" tIns="0" bIns="0" anchor="t">
-            <a:noAutofit/>
-          </a:bodyPr>
-          <a:lstStyle/>
-          <a:p>
-            <a:pPr algn="l"/>
-            <a:r>
-              <a:rPr sz="1000" b="0" i="0" spc="60">
-                <a:solidFill>
-                  <a:srgbClr val="5A4A3A"/>
-                </a:solidFill>
-                <a:latin typeface="JetBrains Mono Light"/>
-              </a:rPr>
-              <a:t>signs the piece against the master's keypair</a:t>
-            </a:r>
-          </a:p>
-        </p:txBody>
-      </p:sp>
-      <p:sp>
-        <p:nvSpPr>
-          <p:cNvPr id="13" name="Oval 12"/>
-          <p:cNvSpPr/>
-          <p:nvPr/>
-        </p:nvSpPr>
-        <p:spPr>
-          <a:xfrm>
-            <a:off x="6885939" y="4097019"/>
-            <a:ext cx="127000" cy="127000"/>
-          </a:xfrm>
-          <a:prstGeom prst="ellipse">
-            <a:avLst/>
-          </a:prstGeom>
-          <a:solidFill>
-            <a:srgbClr val="1C1410"/>
-          </a:solidFill>
-          <a:ln>
-            <a:noFill/>
-          </a:ln>
-          <a:effectLst/>
-        </p:spPr>
-        <p:style>
-          <a:lnRef idx="1">
-            <a:schemeClr val="accent1"/>
-          </a:lnRef>
-          <a:fillRef idx="3">
-            <a:schemeClr val="accent1"/>
-          </a:fillRef>
-          <a:effectRef idx="2">
-            <a:schemeClr val="accent1"/>
-          </a:effectRef>
-          <a:fontRef idx="minor">
-            <a:schemeClr val="lt1"/>
-          </a:fontRef>
-        </p:style>
-        <p:txBody>
-          <a:bodyPr rtlCol="0" anchor="ctr"/>
-          <a:lstStyle/>
-          <a:p>
-            <a:pPr algn="ctr"/>
-          </a:p>
-        </p:txBody>
-      </p:sp>
-      <p:sp>
-        <p:nvSpPr>
-          <p:cNvPr id="14" name="TextBox 13"/>
-          <p:cNvSpPr txBox="1"/>
-          <p:nvPr/>
-        </p:nvSpPr>
-        <p:spPr>
-          <a:xfrm>
-            <a:off x="7214108" y="3867911"/>
-            <a:ext cx="4428947" cy="292608"/>
-          </a:xfrm>
-          <a:prstGeom prst="rect">
-            <a:avLst/>
-          </a:prstGeom>
-          <a:noFill/>
-        </p:spPr>
-        <p:txBody>
-          <a:bodyPr wrap="square" lIns="0" rIns="0" tIns="0" bIns="0" anchor="t">
-            <a:noAutofit/>
-          </a:bodyPr>
-          <a:lstStyle/>
-          <a:p>
-            <a:pPr algn="l"/>
-            <a:r>
-              <a:rPr sz="1600" b="1" i="0">
-                <a:solidFill>
-                  <a:srgbClr val="1C1410"/>
-                </a:solidFill>
-                <a:latin typeface="JetBrains Mono"/>
-              </a:rPr>
-              <a:t>ustaad</a:t>
-            </a:r>
-          </a:p>
-        </p:txBody>
-      </p:sp>
-      <p:sp>
-        <p:nvSpPr>
-          <p:cNvPr id="15" name="TextBox 14"/>
-          <p:cNvSpPr txBox="1"/>
-          <p:nvPr/>
-        </p:nvSpPr>
-        <p:spPr>
-          <a:xfrm>
-            <a:off x="7214108" y="4123944"/>
-            <a:ext cx="4428947" cy="292608"/>
-          </a:xfrm>
-          <a:prstGeom prst="rect">
-            <a:avLst/>
-          </a:prstGeom>
-          <a:noFill/>
-        </p:spPr>
-        <p:txBody>
-          <a:bodyPr wrap="square" lIns="0" rIns="0" tIns="0" bIns="0" anchor="t">
-            <a:noAutofit/>
-          </a:bodyPr>
-          <a:lstStyle/>
-          <a:p>
-            <a:pPr algn="l"/>
-            <a:r>
-              <a:rPr sz="1000" b="0" i="0" spc="60">
-                <a:solidFill>
-                  <a:srgbClr val="5A4A3A"/>
-                </a:solidFill>
-                <a:latin typeface="JetBrains Mono Light"/>
-              </a:rPr>
-              <a:t>sells the master's own time, not the middleman's</a:t>
-            </a:r>
-          </a:p>
-        </p:txBody>
-      </p:sp>
-      <p:sp>
-        <p:nvSpPr>
-          <p:cNvPr id="16" name="Oval 15"/>
-          <p:cNvSpPr/>
-          <p:nvPr/>
-        </p:nvSpPr>
-        <p:spPr>
-          <a:xfrm>
-            <a:off x="9446260" y="5422900"/>
-            <a:ext cx="127000" cy="127000"/>
-          </a:xfrm>
-          <a:prstGeom prst="ellipse">
-            <a:avLst/>
-          </a:prstGeom>
-          <a:solidFill>
-            <a:srgbClr val="1C1410"/>
-          </a:solidFill>
-          <a:ln>
-            <a:noFill/>
-          </a:ln>
-          <a:effectLst/>
-        </p:spPr>
-        <p:style>
-          <a:lnRef idx="1">
-            <a:schemeClr val="accent1"/>
-          </a:lnRef>
-          <a:fillRef idx="3">
-            <a:schemeClr val="accent1"/>
-          </a:fillRef>
-          <a:effectRef idx="2">
-            <a:schemeClr val="accent1"/>
-          </a:effectRef>
-          <a:fontRef idx="minor">
-            <a:schemeClr val="lt1"/>
-          </a:fontRef>
-        </p:style>
-        <p:txBody>
-          <a:bodyPr rtlCol="0" anchor="ctr"/>
-          <a:lstStyle/>
-          <a:p>
-            <a:pPr algn="ctr"/>
-          </a:p>
-        </p:txBody>
-      </p:sp>
-      <p:sp>
-        <p:nvSpPr>
-          <p:cNvPr id="17" name="TextBox 16"/>
-          <p:cNvSpPr txBox="1"/>
-          <p:nvPr/>
-        </p:nvSpPr>
-        <p:spPr>
-          <a:xfrm>
-            <a:off x="9774428" y="5193792"/>
-            <a:ext cx="1868627" cy="292608"/>
-          </a:xfrm>
-          <a:prstGeom prst="rect">
-            <a:avLst/>
-          </a:prstGeom>
-          <a:noFill/>
-        </p:spPr>
-        <p:txBody>
-          <a:bodyPr wrap="square" lIns="0" rIns="0" tIns="0" bIns="0" anchor="t">
-            <a:noAutofit/>
-          </a:bodyPr>
-          <a:lstStyle/>
-          <a:p>
-            <a:pPr algn="l"/>
-            <a:r>
-              <a:rPr sz="1600" b="1" i="0">
-                <a:solidFill>
-                  <a:srgbClr val="1C1410"/>
-                </a:solidFill>
-                <a:latin typeface="JetBrains Mono"/>
-              </a:rPr>
-              <a:t>bazaar</a:t>
-            </a:r>
-          </a:p>
-        </p:txBody>
-      </p:sp>
-      <p:sp>
-        <p:nvSpPr>
-          <p:cNvPr id="18" name="TextBox 17"/>
-          <p:cNvSpPr txBox="1"/>
-          <p:nvPr/>
-        </p:nvSpPr>
-        <p:spPr>
-          <a:xfrm>
-            <a:off x="9774428" y="5449824"/>
-            <a:ext cx="1868627" cy="292608"/>
-          </a:xfrm>
-          <a:prstGeom prst="rect">
-            <a:avLst/>
-          </a:prstGeom>
-          <a:noFill/>
-        </p:spPr>
-        <p:txBody>
-          <a:bodyPr wrap="square" lIns="0" rIns="0" tIns="0" bIns="0" anchor="t">
-            <a:noAutofit/>
-          </a:bodyPr>
-          <a:lstStyle/>
-          <a:p>
-            <a:pPr algn="l"/>
-            <a:r>
-              <a:rPr sz="1000" b="0" i="0" spc="60">
-                <a:solidFill>
-                  <a:srgbClr val="5A4A3A"/>
-                </a:solidFill>
-                <a:latin typeface="JetBrains Mono Light"/>
-              </a:rPr>
-              <a:t>sells the object, with provenance attached</a:t>
-            </a:r>
-          </a:p>
-        </p:txBody>
-      </p:sp>
       <p:cxnSp>
         <p:nvCxnSpPr>
-          <p:cNvPr id="19" name="Connector 18"/>
+          <p:cNvPr id="7" name="Connector 6"/>
           <p:cNvCxnSpPr/>
           <p:nvPr/>
         </p:nvCxnSpPr>
         <p:spPr>
           <a:xfrm>
-            <a:off x="8778240" y="868680"/>
-            <a:ext cx="1280160" cy="0"/>
+            <a:off x="1283782" y="1671413"/>
+            <a:ext cx="118733" cy="167104"/>
           </a:xfrm>
           <a:prstGeom prst="line">
             <a:avLst/>
           </a:prstGeom>
-          <a:ln w="12700">
+          <a:ln w="10160">
             <a:solidFill>
-              <a:srgbClr val="8B1A1A"/>
+              <a:srgbClr val="1C1410"/>
             </a:solidFill>
           </a:ln>
         </p:spPr>
@@ -6415,115 +6803,24 @@
           </a:fontRef>
         </p:style>
       </p:cxnSp>
-      <p:sp>
-        <p:nvSpPr>
-          <p:cNvPr id="20" name="TextBox 19"/>
-          <p:cNvSpPr txBox="1"/>
-          <p:nvPr/>
-        </p:nvSpPr>
-        <p:spPr>
-          <a:xfrm>
-            <a:off x="8778240" y="941832"/>
-            <a:ext cx="2377440" cy="292608"/>
-          </a:xfrm>
-          <a:prstGeom prst="rect">
-            <a:avLst/>
-          </a:prstGeom>
-          <a:noFill/>
-        </p:spPr>
-        <p:txBody>
-          <a:bodyPr wrap="square" lIns="0" rIns="0" tIns="0" bIns="0" anchor="t">
-            <a:noAutofit/>
-          </a:bodyPr>
-          <a:lstStyle/>
-          <a:p>
-            <a:pPr algn="l"/>
-            <a:r>
-              <a:rPr sz="1100" b="1" i="0">
-                <a:solidFill>
-                  <a:srgbClr val="1C1410"/>
-                </a:solidFill>
-                <a:latin typeface="JetBrains Mono"/>
-              </a:rPr>
-              <a:t>the keystone</a:t>
-            </a:r>
-          </a:p>
-        </p:txBody>
-      </p:sp>
-      <p:sp>
-        <p:nvSpPr>
-          <p:cNvPr id="21" name="TextBox 20"/>
-          <p:cNvSpPr txBox="1"/>
-          <p:nvPr/>
-        </p:nvSpPr>
-        <p:spPr>
-          <a:xfrm>
-            <a:off x="8778240" y="1197864"/>
-            <a:ext cx="3017520" cy="640080"/>
-          </a:xfrm>
-          <a:prstGeom prst="rect">
-            <a:avLst/>
-          </a:prstGeom>
-          <a:noFill/>
-        </p:spPr>
-        <p:txBody>
-          <a:bodyPr wrap="square" lIns="0" rIns="0" tIns="0" bIns="0" anchor="t">
-            <a:noAutofit/>
-          </a:bodyPr>
-          <a:lstStyle/>
-          <a:p>
-            <a:pPr algn="l">
-              <a:lnSpc>
-                <a:spcPct val="140000"/>
-              </a:lnSpc>
-            </a:pPr>
-            <a:r>
-              <a:rPr sz="900" b="0" i="0" spc="60">
-                <a:solidFill>
-                  <a:srgbClr val="5A4A3A"/>
-                </a:solidFill>
-                <a:latin typeface="JetBrains Mono Light"/>
-              </a:rPr>
-              <a:t>provenance is what buyers pay</a:t>
-            </a:r>
-          </a:p>
-          <a:p>
-            <a:pPr algn="l">
-              <a:lnSpc>
-                <a:spcPct val="140000"/>
-              </a:lnSpc>
-            </a:pPr>
-            <a:r>
-              <a:rPr sz="900" b="0" i="0" spc="60">
-                <a:solidFill>
-                  <a:srgbClr val="5A4A3A"/>
-                </a:solidFill>
-                <a:latin typeface="JetBrains Mono Light"/>
-              </a:rPr>
-              <a:t>a premium for, today</a:t>
-            </a:r>
-          </a:p>
-        </p:txBody>
-      </p:sp>
       <p:cxnSp>
         <p:nvCxnSpPr>
-          <p:cNvPr id="22" name="Connector 21"/>
+          <p:cNvPr id="8" name="Connector 7"/>
           <p:cNvCxnSpPr/>
           <p:nvPr/>
         </p:nvCxnSpPr>
         <p:spPr>
-          <a:xfrm flipH="1">
-            <a:off x="4187952" y="1645919"/>
-            <a:ext cx="4681728" cy="1078993"/>
+          <a:xfrm>
+            <a:off x="1175092" y="2008811"/>
+            <a:ext cx="128996" cy="109610"/>
           </a:xfrm>
           <a:prstGeom prst="line">
             <a:avLst/>
           </a:prstGeom>
-          <a:ln w="6350">
+          <a:ln w="10160">
             <a:solidFill>
-              <a:srgbClr val="B7B3AE"/>
+              <a:srgbClr val="1C1410"/>
             </a:solidFill>
-            <a:prstDash val="sysDot"/>
           </a:ln>
         </p:spPr>
         <p:style>
@@ -6541,9 +6838,1166 @@
           </a:fontRef>
         </p:style>
       </p:cxnSp>
+      <p:cxnSp>
+        <p:nvCxnSpPr>
+          <p:cNvPr id="9" name="Connector 8"/>
+          <p:cNvCxnSpPr/>
+          <p:nvPr/>
+        </p:nvCxnSpPr>
+        <p:spPr>
+          <a:xfrm>
+            <a:off x="1324143" y="2078669"/>
+            <a:ext cx="44783" cy="221296"/>
+          </a:xfrm>
+          <a:prstGeom prst="line">
+            <a:avLst/>
+          </a:prstGeom>
+          <a:ln w="10160">
+            <a:solidFill>
+              <a:srgbClr val="1C1410"/>
+            </a:solidFill>
+          </a:ln>
+        </p:spPr>
+        <p:style>
+          <a:lnRef idx="2">
+            <a:schemeClr val="accent1"/>
+          </a:lnRef>
+          <a:fillRef idx="0">
+            <a:schemeClr val="accent1"/>
+          </a:fillRef>
+          <a:effectRef idx="1">
+            <a:schemeClr val="accent1"/>
+          </a:effectRef>
+          <a:fontRef idx="minor">
+            <a:schemeClr val="tx1"/>
+          </a:fontRef>
+        </p:style>
+      </p:cxnSp>
+      <p:cxnSp>
+        <p:nvCxnSpPr>
+          <p:cNvPr id="10" name="Connector 9"/>
+          <p:cNvCxnSpPr/>
+          <p:nvPr/>
+        </p:nvCxnSpPr>
+        <p:spPr>
+          <a:xfrm>
+            <a:off x="1157420" y="2420478"/>
+            <a:ext cx="127018" cy="185827"/>
+          </a:xfrm>
+          <a:prstGeom prst="line">
+            <a:avLst/>
+          </a:prstGeom>
+          <a:ln w="10160">
+            <a:solidFill>
+              <a:srgbClr val="1C1410"/>
+            </a:solidFill>
+          </a:ln>
+        </p:spPr>
+        <p:style>
+          <a:lnRef idx="2">
+            <a:schemeClr val="accent1"/>
+          </a:lnRef>
+          <a:fillRef idx="0">
+            <a:schemeClr val="accent1"/>
+          </a:fillRef>
+          <a:effectRef idx="1">
+            <a:schemeClr val="accent1"/>
+          </a:effectRef>
+          <a:fontRef idx="minor">
+            <a:schemeClr val="tx1"/>
+          </a:fontRef>
+        </p:style>
+      </p:cxnSp>
+      <p:cxnSp>
+        <p:nvCxnSpPr>
+          <p:cNvPr id="11" name="Connector 10"/>
+          <p:cNvCxnSpPr/>
+          <p:nvPr/>
+        </p:nvCxnSpPr>
+        <p:spPr>
+          <a:xfrm>
+            <a:off x="1265948" y="2570115"/>
+            <a:ext cx="113016" cy="192349"/>
+          </a:xfrm>
+          <a:prstGeom prst="line">
+            <a:avLst/>
+          </a:prstGeom>
+          <a:ln w="10160">
+            <a:solidFill>
+              <a:srgbClr val="1C1410"/>
+            </a:solidFill>
+          </a:ln>
+        </p:spPr>
+        <p:style>
+          <a:lnRef idx="2">
+            <a:schemeClr val="accent1"/>
+          </a:lnRef>
+          <a:fillRef idx="0">
+            <a:schemeClr val="accent1"/>
+          </a:fillRef>
+          <a:effectRef idx="1">
+            <a:schemeClr val="accent1"/>
+          </a:effectRef>
+          <a:fontRef idx="minor">
+            <a:schemeClr val="tx1"/>
+          </a:fontRef>
+        </p:style>
+      </p:cxnSp>
+      <p:cxnSp>
+        <p:nvCxnSpPr>
+          <p:cNvPr id="12" name="Connector 11"/>
+          <p:cNvCxnSpPr/>
+          <p:nvPr/>
+        </p:nvCxnSpPr>
+        <p:spPr>
+          <a:xfrm>
+            <a:off x="1172178" y="2874660"/>
+            <a:ext cx="94053" cy="144210"/>
+          </a:xfrm>
+          <a:prstGeom prst="line">
+            <a:avLst/>
+          </a:prstGeom>
+          <a:ln w="10160">
+            <a:solidFill>
+              <a:srgbClr val="1C1410"/>
+            </a:solidFill>
+          </a:ln>
+        </p:spPr>
+        <p:style>
+          <a:lnRef idx="2">
+            <a:schemeClr val="accent1"/>
+          </a:lnRef>
+          <a:fillRef idx="0">
+            <a:schemeClr val="accent1"/>
+          </a:fillRef>
+          <a:effectRef idx="1">
+            <a:schemeClr val="accent1"/>
+          </a:effectRef>
+          <a:fontRef idx="minor">
+            <a:schemeClr val="tx1"/>
+          </a:fontRef>
+        </p:style>
+      </p:cxnSp>
+      <p:cxnSp>
+        <p:nvCxnSpPr>
+          <p:cNvPr id="13" name="Connector 12"/>
+          <p:cNvCxnSpPr/>
+          <p:nvPr/>
+        </p:nvCxnSpPr>
+        <p:spPr>
+          <a:xfrm>
+            <a:off x="1302500" y="3017457"/>
+            <a:ext cx="91313" cy="215851"/>
+          </a:xfrm>
+          <a:prstGeom prst="line">
+            <a:avLst/>
+          </a:prstGeom>
+          <a:ln w="10160">
+            <a:solidFill>
+              <a:srgbClr val="1C1410"/>
+            </a:solidFill>
+          </a:ln>
+        </p:spPr>
+        <p:style>
+          <a:lnRef idx="2">
+            <a:schemeClr val="accent1"/>
+          </a:lnRef>
+          <a:fillRef idx="0">
+            <a:schemeClr val="accent1"/>
+          </a:fillRef>
+          <a:effectRef idx="1">
+            <a:schemeClr val="accent1"/>
+          </a:effectRef>
+          <a:fontRef idx="minor">
+            <a:schemeClr val="tx1"/>
+          </a:fontRef>
+        </p:style>
+      </p:cxnSp>
+      <p:cxnSp>
+        <p:nvCxnSpPr>
+          <p:cNvPr id="14" name="Connector 13"/>
+          <p:cNvCxnSpPr/>
+          <p:nvPr/>
+        </p:nvCxnSpPr>
+        <p:spPr>
+          <a:xfrm>
+            <a:off x="1168719" y="3344862"/>
+            <a:ext cx="151263" cy="167274"/>
+          </a:xfrm>
+          <a:prstGeom prst="line">
+            <a:avLst/>
+          </a:prstGeom>
+          <a:ln w="10160">
+            <a:solidFill>
+              <a:srgbClr val="1C1410"/>
+            </a:solidFill>
+          </a:ln>
+        </p:spPr>
+        <p:style>
+          <a:lnRef idx="2">
+            <a:schemeClr val="accent1"/>
+          </a:lnRef>
+          <a:fillRef idx="0">
+            <a:schemeClr val="accent1"/>
+          </a:fillRef>
+          <a:effectRef idx="1">
+            <a:schemeClr val="accent1"/>
+          </a:effectRef>
+          <a:fontRef idx="minor">
+            <a:schemeClr val="tx1"/>
+          </a:fontRef>
+        </p:style>
+      </p:cxnSp>
+      <p:cxnSp>
+        <p:nvCxnSpPr>
+          <p:cNvPr id="15" name="Connector 14"/>
+          <p:cNvCxnSpPr/>
+          <p:nvPr/>
+        </p:nvCxnSpPr>
+        <p:spPr>
+          <a:xfrm>
+            <a:off x="1270584" y="3484055"/>
+            <a:ext cx="113580" cy="224988"/>
+          </a:xfrm>
+          <a:prstGeom prst="line">
+            <a:avLst/>
+          </a:prstGeom>
+          <a:ln w="10160">
+            <a:solidFill>
+              <a:srgbClr val="1C1410"/>
+            </a:solidFill>
+          </a:ln>
+        </p:spPr>
+        <p:style>
+          <a:lnRef idx="2">
+            <a:schemeClr val="accent1"/>
+          </a:lnRef>
+          <a:fillRef idx="0">
+            <a:schemeClr val="accent1"/>
+          </a:fillRef>
+          <a:effectRef idx="1">
+            <a:schemeClr val="accent1"/>
+          </a:effectRef>
+          <a:fontRef idx="minor">
+            <a:schemeClr val="tx1"/>
+          </a:fontRef>
+        </p:style>
+      </p:cxnSp>
+      <p:sp>
+        <p:nvSpPr>
+          <p:cNvPr id="16" name="TextBox 15"/>
+          <p:cNvSpPr txBox="1"/>
+          <p:nvPr/>
+        </p:nvSpPr>
+        <p:spPr>
+          <a:xfrm>
+            <a:off x="320039" y="713232"/>
+            <a:ext cx="2011680" cy="274320"/>
+          </a:xfrm>
+          <a:prstGeom prst="rect">
+            <a:avLst/>
+          </a:prstGeom>
+          <a:noFill/>
+        </p:spPr>
+        <p:txBody>
+          <a:bodyPr wrap="square" lIns="0" rIns="0" tIns="0" bIns="0" anchor="t">
+            <a:noAutofit/>
+          </a:bodyPr>
+          <a:lstStyle/>
+          <a:p>
+            <a:pPr algn="l"/>
+            <a:r>
+              <a:rPr sz="900" b="0" i="0" spc="60">
+                <a:solidFill>
+                  <a:srgbClr val="5A4A3A"/>
+                </a:solidFill>
+                <a:latin typeface="JetBrains Mono Light"/>
+              </a:rPr>
+              <a:t>talim,  kanihama,  c. 1820</a:t>
+            </a:r>
+          </a:p>
+        </p:txBody>
+      </p:sp>
+      <p:cxnSp>
+        <p:nvCxnSpPr>
+          <p:cNvPr id="17" name="Connector 16"/>
+          <p:cNvCxnSpPr/>
+          <p:nvPr/>
+        </p:nvCxnSpPr>
+        <p:spPr>
+          <a:xfrm>
+            <a:off x="1371600" y="3657599"/>
+            <a:ext cx="1005840" cy="777241"/>
+          </a:xfrm>
+          <a:prstGeom prst="line">
+            <a:avLst/>
+          </a:prstGeom>
+          <a:ln w="12700">
+            <a:solidFill>
+              <a:srgbClr val="8B1A1A"/>
+            </a:solidFill>
+          </a:ln>
+        </p:spPr>
+        <p:style>
+          <a:lnRef idx="2">
+            <a:schemeClr val="accent1"/>
+          </a:lnRef>
+          <a:fillRef idx="0">
+            <a:schemeClr val="accent1"/>
+          </a:fillRef>
+          <a:effectRef idx="1">
+            <a:schemeClr val="accent1"/>
+          </a:effectRef>
+          <a:fontRef idx="minor">
+            <a:schemeClr val="tx1"/>
+          </a:fontRef>
+        </p:style>
+      </p:cxnSp>
+      <p:sp>
+        <p:nvSpPr>
+          <p:cNvPr id="18" name="TextBox 17"/>
+          <p:cNvSpPr txBox="1"/>
+          <p:nvPr/>
+        </p:nvSpPr>
+        <p:spPr>
+          <a:xfrm>
+            <a:off x="548640" y="4526280"/>
+            <a:ext cx="4206240" cy="914400"/>
+          </a:xfrm>
+          <a:prstGeom prst="rect">
+            <a:avLst/>
+          </a:prstGeom>
+          <a:noFill/>
+        </p:spPr>
+        <p:txBody>
+          <a:bodyPr wrap="square" lIns="0" rIns="0" tIns="0" bIns="0" anchor="t">
+            <a:noAutofit/>
+          </a:bodyPr>
+          <a:lstStyle/>
+          <a:p>
+            <a:pPr algn="l">
+              <a:lnSpc>
+                <a:spcPct val="140000"/>
+              </a:lnSpc>
+            </a:pPr>
+            <a:r>
+              <a:rPr sz="1400" b="1" i="0">
+                <a:solidFill>
+                  <a:srgbClr val="1C1410"/>
+                </a:solidFill>
+                <a:latin typeface="JetBrains Mono"/>
+              </a:rPr>
+              <a:t>twelve hours of speech.</a:t>
+            </a:r>
+          </a:p>
+          <a:p>
+            <a:pPr algn="l">
+              <a:lnSpc>
+                <a:spcPct val="140000"/>
+              </a:lnSpc>
+            </a:pPr>
+            <a:r>
+              <a:rPr sz="1400" b="1" i="0">
+                <a:solidFill>
+                  <a:srgbClr val="1C1410"/>
+                </a:solidFill>
+                <a:latin typeface="JetBrains Mono"/>
+              </a:rPr>
+              <a:t>four hundred fields.</a:t>
+            </a:r>
+          </a:p>
+          <a:p>
+            <a:pPr algn="l">
+              <a:lnSpc>
+                <a:spcPct val="140000"/>
+              </a:lnSpc>
+            </a:pPr>
+            <a:r>
+              <a:rPr sz="1400" b="1" i="0">
+                <a:solidFill>
+                  <a:srgbClr val="1C1410"/>
+                </a:solidFill>
+                <a:latin typeface="JetBrains Mono"/>
+              </a:rPr>
+              <a:t>one signed artefact.</a:t>
+            </a:r>
+          </a:p>
+        </p:txBody>
+      </p:sp>
+      <p:sp>
+        <p:nvSpPr>
+          <p:cNvPr id="19" name="TextBox 18"/>
+          <p:cNvSpPr txBox="1"/>
+          <p:nvPr/>
+        </p:nvSpPr>
+        <p:spPr>
+          <a:xfrm>
+            <a:off x="548640" y="5486400"/>
+            <a:ext cx="4572000" cy="914400"/>
+          </a:xfrm>
+          <a:prstGeom prst="rect">
+            <a:avLst/>
+          </a:prstGeom>
+          <a:noFill/>
+        </p:spPr>
+        <p:txBody>
+          <a:bodyPr wrap="square" lIns="0" rIns="0" tIns="0" bIns="0" anchor="t">
+            <a:noAutofit/>
+          </a:bodyPr>
+          <a:lstStyle/>
+          <a:p>
+            <a:pPr algn="l">
+              <a:lnSpc>
+                <a:spcPct val="150000"/>
+              </a:lnSpc>
+            </a:pPr>
+            <a:r>
+              <a:rPr sz="1100" b="0" i="0">
+                <a:solidFill>
+                  <a:srgbClr val="5A4A3A"/>
+                </a:solidFill>
+                <a:latin typeface="JetBrains Mono Light"/>
+              </a:rPr>
+              <a:t>the master's tacit knowledge,</a:t>
+            </a:r>
+          </a:p>
+          <a:p>
+            <a:pPr algn="l">
+              <a:lnSpc>
+                <a:spcPct val="150000"/>
+              </a:lnSpc>
+            </a:pPr>
+            <a:r>
+              <a:rPr sz="1100" b="0" i="0">
+                <a:solidFill>
+                  <a:srgbClr val="5A4A3A"/>
+                </a:solidFill>
+                <a:latin typeface="JetBrains Mono Light"/>
+              </a:rPr>
+              <a:t>structured under their own keypair,</a:t>
+            </a:r>
+          </a:p>
+          <a:p>
+            <a:pPr algn="l">
+              <a:lnSpc>
+                <a:spcPct val="150000"/>
+              </a:lnSpc>
+            </a:pPr>
+            <a:r>
+              <a:rPr sz="1100" b="0" i="0">
+                <a:solidFill>
+                  <a:srgbClr val="5A4A3A"/>
+                </a:solidFill>
+                <a:latin typeface="JetBrains Mono Light"/>
+              </a:rPr>
+              <a:t>owned by the master in perpetuity.</a:t>
+            </a:r>
+          </a:p>
+        </p:txBody>
+      </p:sp>
+      <p:sp>
+        <p:nvSpPr>
+          <p:cNvPr id="20" name="TextBox 19"/>
+          <p:cNvSpPr txBox="1"/>
+          <p:nvPr/>
+        </p:nvSpPr>
+        <p:spPr>
+          <a:xfrm>
+            <a:off x="5852160" y="960120"/>
+            <a:ext cx="822960" cy="640080"/>
+          </a:xfrm>
+          <a:prstGeom prst="rect">
+            <a:avLst/>
+          </a:prstGeom>
+          <a:noFill/>
+        </p:spPr>
+        <p:txBody>
+          <a:bodyPr wrap="square" lIns="0" rIns="0" tIns="0" bIns="0" anchor="t">
+            <a:noAutofit/>
+          </a:bodyPr>
+          <a:lstStyle/>
+          <a:p>
+            <a:pPr algn="l"/>
+            <a:r>
+              <a:rPr sz="3600" b="0" i="0">
+                <a:solidFill>
+                  <a:srgbClr val="9A8F84"/>
+                </a:solidFill>
+                <a:latin typeface="JetBrains Mono Light"/>
+              </a:rPr>
+              <a:t>01</a:t>
+            </a:r>
+          </a:p>
+        </p:txBody>
+      </p:sp>
+      <p:cxnSp>
+        <p:nvCxnSpPr>
+          <p:cNvPr id="21" name="Connector 20"/>
+          <p:cNvCxnSpPr/>
+          <p:nvPr/>
+        </p:nvCxnSpPr>
+        <p:spPr>
+          <a:xfrm>
+            <a:off x="6766560" y="1051560"/>
+            <a:ext cx="4876495" cy="0"/>
+          </a:xfrm>
+          <a:prstGeom prst="line">
+            <a:avLst/>
+          </a:prstGeom>
+          <a:ln w="6350">
+            <a:solidFill>
+              <a:srgbClr val="D4C8B8"/>
+            </a:solidFill>
+          </a:ln>
+        </p:spPr>
+        <p:style>
+          <a:lnRef idx="2">
+            <a:schemeClr val="accent1"/>
+          </a:lnRef>
+          <a:fillRef idx="0">
+            <a:schemeClr val="accent1"/>
+          </a:fillRef>
+          <a:effectRef idx="1">
+            <a:schemeClr val="accent1"/>
+          </a:effectRef>
+          <a:fontRef idx="minor">
+            <a:schemeClr val="tx1"/>
+          </a:fontRef>
+        </p:style>
+      </p:cxnSp>
+      <p:sp>
+        <p:nvSpPr>
+          <p:cNvPr id="22" name="TextBox 21"/>
+          <p:cNvSpPr txBox="1"/>
+          <p:nvPr/>
+        </p:nvSpPr>
+        <p:spPr>
+          <a:xfrm>
+            <a:off x="6812280" y="1124712"/>
+            <a:ext cx="1828800" cy="292608"/>
+          </a:xfrm>
+          <a:prstGeom prst="rect">
+            <a:avLst/>
+          </a:prstGeom>
+          <a:noFill/>
+        </p:spPr>
+        <p:txBody>
+          <a:bodyPr wrap="square" lIns="0" rIns="0" tIns="0" bIns="0" anchor="t">
+            <a:noAutofit/>
+          </a:bodyPr>
+          <a:lstStyle/>
+          <a:p>
+            <a:pPr algn="l"/>
+            <a:r>
+              <a:rPr sz="1400" b="1" i="0">
+                <a:solidFill>
+                  <a:srgbClr val="1C1410"/>
+                </a:solidFill>
+                <a:latin typeface="JetBrains Mono"/>
+              </a:rPr>
+              <a:t>session</a:t>
+            </a:r>
+          </a:p>
+        </p:txBody>
+      </p:sp>
       <p:sp>
         <p:nvSpPr>
           <p:cNvPr id="23" name="TextBox 22"/>
+          <p:cNvSpPr txBox="1"/>
+          <p:nvPr/>
+        </p:nvSpPr>
+        <p:spPr>
+          <a:xfrm>
+            <a:off x="6812280" y="1380744"/>
+            <a:ext cx="4876495" cy="292608"/>
+          </a:xfrm>
+          <a:prstGeom prst="rect">
+            <a:avLst/>
+          </a:prstGeom>
+          <a:noFill/>
+        </p:spPr>
+        <p:txBody>
+          <a:bodyPr wrap="square" lIns="0" rIns="0" tIns="0" bIns="0" anchor="t">
+            <a:noAutofit/>
+          </a:bodyPr>
+          <a:lstStyle/>
+          <a:p>
+            <a:pPr algn="l"/>
+            <a:r>
+              <a:rPr sz="1000" b="0" i="0" spc="60">
+                <a:solidFill>
+                  <a:srgbClr val="5A4A3A"/>
+                </a:solidFill>
+                <a:latin typeface="JetBrains Mono Light"/>
+              </a:rPr>
+              <a:t>master in own workshop, interview led in koshur</a:t>
+            </a:r>
+          </a:p>
+        </p:txBody>
+      </p:sp>
+      <p:sp>
+        <p:nvSpPr>
+          <p:cNvPr id="24" name="TextBox 23"/>
+          <p:cNvSpPr txBox="1"/>
+          <p:nvPr/>
+        </p:nvSpPr>
+        <p:spPr>
+          <a:xfrm>
+            <a:off x="5852160" y="1828800"/>
+            <a:ext cx="822960" cy="640080"/>
+          </a:xfrm>
+          <a:prstGeom prst="rect">
+            <a:avLst/>
+          </a:prstGeom>
+          <a:noFill/>
+        </p:spPr>
+        <p:txBody>
+          <a:bodyPr wrap="square" lIns="0" rIns="0" tIns="0" bIns="0" anchor="t">
+            <a:noAutofit/>
+          </a:bodyPr>
+          <a:lstStyle/>
+          <a:p>
+            <a:pPr algn="l"/>
+            <a:r>
+              <a:rPr sz="3600" b="0" i="0">
+                <a:solidFill>
+                  <a:srgbClr val="9A8F84"/>
+                </a:solidFill>
+                <a:latin typeface="JetBrains Mono Light"/>
+              </a:rPr>
+              <a:t>02</a:t>
+            </a:r>
+          </a:p>
+        </p:txBody>
+      </p:sp>
+      <p:cxnSp>
+        <p:nvCxnSpPr>
+          <p:cNvPr id="25" name="Connector 24"/>
+          <p:cNvCxnSpPr/>
+          <p:nvPr/>
+        </p:nvCxnSpPr>
+        <p:spPr>
+          <a:xfrm>
+            <a:off x="6766560" y="1920240"/>
+            <a:ext cx="4876495" cy="0"/>
+          </a:xfrm>
+          <a:prstGeom prst="line">
+            <a:avLst/>
+          </a:prstGeom>
+          <a:ln w="6350">
+            <a:solidFill>
+              <a:srgbClr val="D4C8B8"/>
+            </a:solidFill>
+          </a:ln>
+        </p:spPr>
+        <p:style>
+          <a:lnRef idx="2">
+            <a:schemeClr val="accent1"/>
+          </a:lnRef>
+          <a:fillRef idx="0">
+            <a:schemeClr val="accent1"/>
+          </a:fillRef>
+          <a:effectRef idx="1">
+            <a:schemeClr val="accent1"/>
+          </a:effectRef>
+          <a:fontRef idx="minor">
+            <a:schemeClr val="tx1"/>
+          </a:fontRef>
+        </p:style>
+      </p:cxnSp>
+      <p:sp>
+        <p:nvSpPr>
+          <p:cNvPr id="26" name="TextBox 25"/>
+          <p:cNvSpPr txBox="1"/>
+          <p:nvPr/>
+        </p:nvSpPr>
+        <p:spPr>
+          <a:xfrm>
+            <a:off x="6812280" y="1993392"/>
+            <a:ext cx="1828800" cy="292608"/>
+          </a:xfrm>
+          <a:prstGeom prst="rect">
+            <a:avLst/>
+          </a:prstGeom>
+          <a:noFill/>
+        </p:spPr>
+        <p:txBody>
+          <a:bodyPr wrap="square" lIns="0" rIns="0" tIns="0" bIns="0" anchor="t">
+            <a:noAutofit/>
+          </a:bodyPr>
+          <a:lstStyle/>
+          <a:p>
+            <a:pPr algn="l"/>
+            <a:r>
+              <a:rPr sz="1400" b="1" i="0">
+                <a:solidFill>
+                  <a:srgbClr val="1C1410"/>
+                </a:solidFill>
+                <a:latin typeface="JetBrains Mono"/>
+              </a:rPr>
+              <a:t>transcribe</a:t>
+            </a:r>
+          </a:p>
+        </p:txBody>
+      </p:sp>
+      <p:sp>
+        <p:nvSpPr>
+          <p:cNvPr id="27" name="TextBox 26"/>
+          <p:cNvSpPr txBox="1"/>
+          <p:nvPr/>
+        </p:nvSpPr>
+        <p:spPr>
+          <a:xfrm>
+            <a:off x="6812280" y="2249424"/>
+            <a:ext cx="4876495" cy="292608"/>
+          </a:xfrm>
+          <a:prstGeom prst="rect">
+            <a:avLst/>
+          </a:prstGeom>
+          <a:noFill/>
+        </p:spPr>
+        <p:txBody>
+          <a:bodyPr wrap="square" lIns="0" rIns="0" tIns="0" bIns="0" anchor="t">
+            <a:noAutofit/>
+          </a:bodyPr>
+          <a:lstStyle/>
+          <a:p>
+            <a:pPr algn="l"/>
+            <a:r>
+              <a:rPr sz="1000" b="0" i="0" spc="60">
+                <a:solidFill>
+                  <a:srgbClr val="5A4A3A"/>
+                </a:solidFill>
+                <a:latin typeface="JetBrains Mono Light"/>
+              </a:rPr>
+              <a:t>bhashini  &gt;  ai4bharat  &gt;  groq  &gt;  whisper, ladder</a:t>
+            </a:r>
+          </a:p>
+        </p:txBody>
+      </p:sp>
+      <p:sp>
+        <p:nvSpPr>
+          <p:cNvPr id="28" name="TextBox 27"/>
+          <p:cNvSpPr txBox="1"/>
+          <p:nvPr/>
+        </p:nvSpPr>
+        <p:spPr>
+          <a:xfrm>
+            <a:off x="5852160" y="2697480"/>
+            <a:ext cx="822960" cy="640080"/>
+          </a:xfrm>
+          <a:prstGeom prst="rect">
+            <a:avLst/>
+          </a:prstGeom>
+          <a:noFill/>
+        </p:spPr>
+        <p:txBody>
+          <a:bodyPr wrap="square" lIns="0" rIns="0" tIns="0" bIns="0" anchor="t">
+            <a:noAutofit/>
+          </a:bodyPr>
+          <a:lstStyle/>
+          <a:p>
+            <a:pPr algn="l"/>
+            <a:r>
+              <a:rPr sz="3600" b="0" i="0">
+                <a:solidFill>
+                  <a:srgbClr val="9A8F84"/>
+                </a:solidFill>
+                <a:latin typeface="JetBrains Mono Light"/>
+              </a:rPr>
+              <a:t>03</a:t>
+            </a:r>
+          </a:p>
+        </p:txBody>
+      </p:sp>
+      <p:cxnSp>
+        <p:nvCxnSpPr>
+          <p:cNvPr id="29" name="Connector 28"/>
+          <p:cNvCxnSpPr/>
+          <p:nvPr/>
+        </p:nvCxnSpPr>
+        <p:spPr>
+          <a:xfrm>
+            <a:off x="6766560" y="2788920"/>
+            <a:ext cx="4876495" cy="0"/>
+          </a:xfrm>
+          <a:prstGeom prst="line">
+            <a:avLst/>
+          </a:prstGeom>
+          <a:ln w="6350">
+            <a:solidFill>
+              <a:srgbClr val="D4C8B8"/>
+            </a:solidFill>
+          </a:ln>
+        </p:spPr>
+        <p:style>
+          <a:lnRef idx="2">
+            <a:schemeClr val="accent1"/>
+          </a:lnRef>
+          <a:fillRef idx="0">
+            <a:schemeClr val="accent1"/>
+          </a:fillRef>
+          <a:effectRef idx="1">
+            <a:schemeClr val="accent1"/>
+          </a:effectRef>
+          <a:fontRef idx="minor">
+            <a:schemeClr val="tx1"/>
+          </a:fontRef>
+        </p:style>
+      </p:cxnSp>
+      <p:sp>
+        <p:nvSpPr>
+          <p:cNvPr id="30" name="TextBox 29"/>
+          <p:cNvSpPr txBox="1"/>
+          <p:nvPr/>
+        </p:nvSpPr>
+        <p:spPr>
+          <a:xfrm>
+            <a:off x="6812280" y="2862072"/>
+            <a:ext cx="1828800" cy="292608"/>
+          </a:xfrm>
+          <a:prstGeom prst="rect">
+            <a:avLst/>
+          </a:prstGeom>
+          <a:noFill/>
+        </p:spPr>
+        <p:txBody>
+          <a:bodyPr wrap="square" lIns="0" rIns="0" tIns="0" bIns="0" anchor="t">
+            <a:noAutofit/>
+          </a:bodyPr>
+          <a:lstStyle/>
+          <a:p>
+            <a:pPr algn="l"/>
+            <a:r>
+              <a:rPr sz="1400" b="1" i="0">
+                <a:solidFill>
+                  <a:srgbClr val="1C1410"/>
+                </a:solidFill>
+                <a:latin typeface="JetBrains Mono"/>
+              </a:rPr>
+              <a:t>extract</a:t>
+            </a:r>
+          </a:p>
+        </p:txBody>
+      </p:sp>
+      <p:sp>
+        <p:nvSpPr>
+          <p:cNvPr id="31" name="TextBox 30"/>
+          <p:cNvSpPr txBox="1"/>
+          <p:nvPr/>
+        </p:nvSpPr>
+        <p:spPr>
+          <a:xfrm>
+            <a:off x="6812280" y="3118104"/>
+            <a:ext cx="4876495" cy="292608"/>
+          </a:xfrm>
+          <a:prstGeom prst="rect">
+            <a:avLst/>
+          </a:prstGeom>
+          <a:noFill/>
+        </p:spPr>
+        <p:txBody>
+          <a:bodyPr wrap="square" lIns="0" rIns="0" tIns="0" bIns="0" anchor="t">
+            <a:noAutofit/>
+          </a:bodyPr>
+          <a:lstStyle/>
+          <a:p>
+            <a:pPr algn="l"/>
+            <a:r>
+              <a:rPr sz="1000" b="0" i="0" spc="60">
+                <a:solidFill>
+                  <a:srgbClr val="5A4A3A"/>
+                </a:solidFill>
+                <a:latin typeface="JetBrains Mono Light"/>
+              </a:rPr>
+              <a:t>multi-pass llm, strict json schema, repair loop</a:t>
+            </a:r>
+          </a:p>
+        </p:txBody>
+      </p:sp>
+      <p:sp>
+        <p:nvSpPr>
+          <p:cNvPr id="32" name="TextBox 31"/>
+          <p:cNvSpPr txBox="1"/>
+          <p:nvPr/>
+        </p:nvSpPr>
+        <p:spPr>
+          <a:xfrm>
+            <a:off x="5852160" y="3566159"/>
+            <a:ext cx="822960" cy="640080"/>
+          </a:xfrm>
+          <a:prstGeom prst="rect">
+            <a:avLst/>
+          </a:prstGeom>
+          <a:noFill/>
+        </p:spPr>
+        <p:txBody>
+          <a:bodyPr wrap="square" lIns="0" rIns="0" tIns="0" bIns="0" anchor="t">
+            <a:noAutofit/>
+          </a:bodyPr>
+          <a:lstStyle/>
+          <a:p>
+            <a:pPr algn="l"/>
+            <a:r>
+              <a:rPr sz="3600" b="0" i="0">
+                <a:solidFill>
+                  <a:srgbClr val="9A8F84"/>
+                </a:solidFill>
+                <a:latin typeface="JetBrains Mono Light"/>
+              </a:rPr>
+              <a:t>04</a:t>
+            </a:r>
+          </a:p>
+        </p:txBody>
+      </p:sp>
+      <p:cxnSp>
+        <p:nvCxnSpPr>
+          <p:cNvPr id="33" name="Connector 32"/>
+          <p:cNvCxnSpPr/>
+          <p:nvPr/>
+        </p:nvCxnSpPr>
+        <p:spPr>
+          <a:xfrm>
+            <a:off x="6766560" y="3657599"/>
+            <a:ext cx="4876495" cy="0"/>
+          </a:xfrm>
+          <a:prstGeom prst="line">
+            <a:avLst/>
+          </a:prstGeom>
+          <a:ln w="6350">
+            <a:solidFill>
+              <a:srgbClr val="D4C8B8"/>
+            </a:solidFill>
+          </a:ln>
+        </p:spPr>
+        <p:style>
+          <a:lnRef idx="2">
+            <a:schemeClr val="accent1"/>
+          </a:lnRef>
+          <a:fillRef idx="0">
+            <a:schemeClr val="accent1"/>
+          </a:fillRef>
+          <a:effectRef idx="1">
+            <a:schemeClr val="accent1"/>
+          </a:effectRef>
+          <a:fontRef idx="minor">
+            <a:schemeClr val="tx1"/>
+          </a:fontRef>
+        </p:style>
+      </p:cxnSp>
+      <p:sp>
+        <p:nvSpPr>
+          <p:cNvPr id="34" name="TextBox 33"/>
+          <p:cNvSpPr txBox="1"/>
+          <p:nvPr/>
+        </p:nvSpPr>
+        <p:spPr>
+          <a:xfrm>
+            <a:off x="6812280" y="3730751"/>
+            <a:ext cx="1828800" cy="292608"/>
+          </a:xfrm>
+          <a:prstGeom prst="rect">
+            <a:avLst/>
+          </a:prstGeom>
+          <a:noFill/>
+        </p:spPr>
+        <p:txBody>
+          <a:bodyPr wrap="square" lIns="0" rIns="0" tIns="0" bIns="0" anchor="t">
+            <a:noAutofit/>
+          </a:bodyPr>
+          <a:lstStyle/>
+          <a:p>
+            <a:pPr algn="l"/>
+            <a:r>
+              <a:rPr sz="1400" b="1" i="0">
+                <a:solidFill>
+                  <a:srgbClr val="1C1410"/>
+                </a:solidFill>
+                <a:latin typeface="JetBrains Mono"/>
+              </a:rPr>
+              <a:t>sign</a:t>
+            </a:r>
+          </a:p>
+        </p:txBody>
+      </p:sp>
+      <p:sp>
+        <p:nvSpPr>
+          <p:cNvPr id="35" name="TextBox 34"/>
+          <p:cNvSpPr txBox="1"/>
+          <p:nvPr/>
+        </p:nvSpPr>
+        <p:spPr>
+          <a:xfrm>
+            <a:off x="6812280" y="3986783"/>
+            <a:ext cx="4876495" cy="292608"/>
+          </a:xfrm>
+          <a:prstGeom prst="rect">
+            <a:avLst/>
+          </a:prstGeom>
+          <a:noFill/>
+        </p:spPr>
+        <p:txBody>
+          <a:bodyPr wrap="square" lIns="0" rIns="0" tIns="0" bIns="0" anchor="t">
+            <a:noAutofit/>
+          </a:bodyPr>
+          <a:lstStyle/>
+          <a:p>
+            <a:pPr algn="l"/>
+            <a:r>
+              <a:rPr sz="1000" b="0" i="0" spc="60">
+                <a:solidFill>
+                  <a:srgbClr val="5A4A3A"/>
+                </a:solidFill>
+                <a:latin typeface="JetBrains Mono Light"/>
+              </a:rPr>
+              <a:t>ed25519 over rfc 8785 jcs, one keypair per master</a:t>
+            </a:r>
+          </a:p>
+        </p:txBody>
+      </p:sp>
+      <p:sp>
+        <p:nvSpPr>
+          <p:cNvPr id="36" name="TextBox 35"/>
+          <p:cNvSpPr txBox="1"/>
+          <p:nvPr/>
+        </p:nvSpPr>
+        <p:spPr>
+          <a:xfrm>
+            <a:off x="5852160" y="4434840"/>
+            <a:ext cx="822960" cy="640080"/>
+          </a:xfrm>
+          <a:prstGeom prst="rect">
+            <a:avLst/>
+          </a:prstGeom>
+          <a:noFill/>
+        </p:spPr>
+        <p:txBody>
+          <a:bodyPr wrap="square" lIns="0" rIns="0" tIns="0" bIns="0" anchor="t">
+            <a:noAutofit/>
+          </a:bodyPr>
+          <a:lstStyle/>
+          <a:p>
+            <a:pPr algn="l"/>
+            <a:r>
+              <a:rPr sz="3600" b="0" i="0">
+                <a:solidFill>
+                  <a:srgbClr val="9A8F84"/>
+                </a:solidFill>
+                <a:latin typeface="JetBrains Mono Light"/>
+              </a:rPr>
+              <a:t>05</a:t>
+            </a:r>
+          </a:p>
+        </p:txBody>
+      </p:sp>
+      <p:cxnSp>
+        <p:nvCxnSpPr>
+          <p:cNvPr id="37" name="Connector 36"/>
+          <p:cNvCxnSpPr/>
+          <p:nvPr/>
+        </p:nvCxnSpPr>
+        <p:spPr>
+          <a:xfrm>
+            <a:off x="6766560" y="4526279"/>
+            <a:ext cx="4876495" cy="0"/>
+          </a:xfrm>
+          <a:prstGeom prst="line">
+            <a:avLst/>
+          </a:prstGeom>
+          <a:ln w="6350">
+            <a:solidFill>
+              <a:srgbClr val="D4C8B8"/>
+            </a:solidFill>
+          </a:ln>
+        </p:spPr>
+        <p:style>
+          <a:lnRef idx="2">
+            <a:schemeClr val="accent1"/>
+          </a:lnRef>
+          <a:fillRef idx="0">
+            <a:schemeClr val="accent1"/>
+          </a:fillRef>
+          <a:effectRef idx="1">
+            <a:schemeClr val="accent1"/>
+          </a:effectRef>
+          <a:fontRef idx="minor">
+            <a:schemeClr val="tx1"/>
+          </a:fontRef>
+        </p:style>
+      </p:cxnSp>
+      <p:sp>
+        <p:nvSpPr>
+          <p:cNvPr id="38" name="TextBox 37"/>
+          <p:cNvSpPr txBox="1"/>
+          <p:nvPr/>
+        </p:nvSpPr>
+        <p:spPr>
+          <a:xfrm>
+            <a:off x="6812280" y="4599431"/>
+            <a:ext cx="1828800" cy="292608"/>
+          </a:xfrm>
+          <a:prstGeom prst="rect">
+            <a:avLst/>
+          </a:prstGeom>
+          <a:noFill/>
+        </p:spPr>
+        <p:txBody>
+          <a:bodyPr wrap="square" lIns="0" rIns="0" tIns="0" bIns="0" anchor="t">
+            <a:noAutofit/>
+          </a:bodyPr>
+          <a:lstStyle/>
+          <a:p>
+            <a:pPr algn="l"/>
+            <a:r>
+              <a:rPr sz="1400" b="1" i="0">
+                <a:solidFill>
+                  <a:srgbClr val="1C1410"/>
+                </a:solidFill>
+                <a:latin typeface="JetBrains Mono"/>
+              </a:rPr>
+              <a:t>index</a:t>
+            </a:r>
+          </a:p>
+        </p:txBody>
+      </p:sp>
+      <p:sp>
+        <p:nvSpPr>
+          <p:cNvPr id="39" name="TextBox 38"/>
+          <p:cNvSpPr txBox="1"/>
+          <p:nvPr/>
+        </p:nvSpPr>
+        <p:spPr>
+          <a:xfrm>
+            <a:off x="6812280" y="4855464"/>
+            <a:ext cx="4876495" cy="292608"/>
+          </a:xfrm>
+          <a:prstGeom prst="rect">
+            <a:avLst/>
+          </a:prstGeom>
+          <a:noFill/>
+        </p:spPr>
+        <p:txBody>
+          <a:bodyPr wrap="square" lIns="0" rIns="0" tIns="0" bIns="0" anchor="t">
+            <a:noAutofit/>
+          </a:bodyPr>
+          <a:lstStyle/>
+          <a:p>
+            <a:pPr algn="l"/>
+            <a:r>
+              <a:rPr sz="1000" b="0" i="0" spc="60">
+                <a:solidFill>
+                  <a:srgbClr val="5A4A3A"/>
+                </a:solidFill>
+                <a:latin typeface="JetBrains Mono Light"/>
+              </a:rPr>
+              <a:t>pgvector embeddings, public api in under a second</a:t>
+            </a:r>
+          </a:p>
+        </p:txBody>
+      </p:sp>
+      <p:sp>
+        <p:nvSpPr>
+          <p:cNvPr id="40" name="TextBox 39"/>
           <p:cNvSpPr txBox="1"/>
           <p:nvPr/>
         </p:nvSpPr>
@@ -6578,7 +8032,7 @@
       </p:sp>
       <p:sp>
         <p:nvSpPr>
-          <p:cNvPr id="24" name="TextBox 23"/>
+          <p:cNvPr id="41" name="TextBox 40"/>
           <p:cNvSpPr txBox="1"/>
           <p:nvPr/>
         </p:nvSpPr>
@@ -6606,7 +8060,7 @@
                 </a:solidFill>
                 <a:latin typeface="JetBrains Mono Light"/>
               </a:rPr>
-              <a:t>04 / 07</a:t>
+              <a:t>04 / 06</a:t>
             </a:r>
           </a:p>
         </p:txBody>
@@ -6681,8 +8135,8 @@
         </p:nvSpPr>
         <p:spPr>
           <a:xfrm>
-            <a:off x="548640" y="502920"/>
-            <a:ext cx="7315200" cy="228600"/>
+            <a:off x="548640" y="411480"/>
+            <a:ext cx="10972800" cy="228600"/>
           </a:xfrm>
           <a:prstGeom prst="rect">
             <a:avLst/>
@@ -6703,7 +8157,7 @@
                 </a:solidFill>
                 <a:latin typeface="JetBrains Mono Light"/>
               </a:rPr>
-              <a:t>who keeps the value of a hand-knotted shawl</a:t>
+              <a:t>technology / deployed today, free tier, queryable now</a:t>
             </a:r>
           </a:p>
         </p:txBody>
@@ -6716,8 +8170,8 @@
         </p:nvSpPr>
         <p:spPr>
           <a:xfrm>
-            <a:off x="548640" y="2299716"/>
-            <a:ext cx="1188720" cy="292608"/>
+            <a:off x="548640" y="1005840"/>
+            <a:ext cx="1463040" cy="292608"/>
           </a:xfrm>
           <a:prstGeom prst="rect">
             <a:avLst/>
@@ -6732,222 +8186,1139 @@
           <a:p>
             <a:pPr algn="l"/>
             <a:r>
-              <a:rPr sz="1100" b="1" i="0">
+              <a:rPr sz="1100" b="1" i="0" spc="60">
                 <a:solidFill>
                   <a:srgbClr val="1C1410"/>
                 </a:solidFill>
                 <a:latin typeface="JetBrains Mono"/>
               </a:rPr>
-              <a:t>today</a:t>
-            </a:r>
-          </a:p>
-        </p:txBody>
-      </p:sp>
-      <p:sp>
-        <p:nvSpPr>
-          <p:cNvPr id="5" name="Rectangle 4"/>
+              <a:t>frontend</a:t>
+            </a:r>
+          </a:p>
+        </p:txBody>
+      </p:sp>
+      <p:sp>
+        <p:nvSpPr>
+          <p:cNvPr id="5" name="TextBox 4"/>
+          <p:cNvSpPr txBox="1"/>
+          <p:nvPr/>
+        </p:nvSpPr>
+        <p:spPr>
+          <a:xfrm>
+            <a:off x="2057400" y="1005840"/>
+            <a:ext cx="182880" cy="292608"/>
+          </a:xfrm>
+          <a:prstGeom prst="rect">
+            <a:avLst/>
+          </a:prstGeom>
+          <a:noFill/>
+        </p:spPr>
+        <p:txBody>
+          <a:bodyPr wrap="square" lIns="0" rIns="0" tIns="0" bIns="0" anchor="t">
+            <a:noAutofit/>
+          </a:bodyPr>
+          <a:lstStyle/>
+          <a:p>
+            <a:pPr algn="l"/>
+            <a:r>
+              <a:rPr sz="1100" b="0" i="0">
+                <a:solidFill>
+                  <a:srgbClr val="A19C98"/>
+                </a:solidFill>
+                <a:latin typeface="JetBrains Mono Light"/>
+              </a:rPr>
+              <a:t>·</a:t>
+            </a:r>
+          </a:p>
+        </p:txBody>
+      </p:sp>
+      <p:sp>
+        <p:nvSpPr>
+          <p:cNvPr id="6" name="TextBox 5"/>
+          <p:cNvSpPr txBox="1"/>
+          <p:nvPr/>
+        </p:nvSpPr>
+        <p:spPr>
+          <a:xfrm>
+            <a:off x="2331720" y="1005840"/>
+            <a:ext cx="6858000" cy="292608"/>
+          </a:xfrm>
+          <a:prstGeom prst="rect">
+            <a:avLst/>
+          </a:prstGeom>
+          <a:noFill/>
+        </p:spPr>
+        <p:txBody>
+          <a:bodyPr wrap="square" lIns="0" rIns="0" tIns="0" bIns="0" anchor="t">
+            <a:noAutofit/>
+          </a:bodyPr>
+          <a:lstStyle/>
+          <a:p>
+            <a:pPr algn="l"/>
+            <a:r>
+              <a:rPr sz="1100" b="0" i="0">
+                <a:solidFill>
+                  <a:srgbClr val="5A4A3A"/>
+                </a:solidFill>
+                <a:latin typeface="JetBrains Mono Light"/>
+              </a:rPr>
+              <a:t>next.js 16  ·  vercel  ·  hunarmand.sal.lol</a:t>
+            </a:r>
+          </a:p>
+        </p:txBody>
+      </p:sp>
+      <p:sp>
+        <p:nvSpPr>
+          <p:cNvPr id="7" name="TextBox 6"/>
+          <p:cNvSpPr txBox="1"/>
+          <p:nvPr/>
+        </p:nvSpPr>
+        <p:spPr>
+          <a:xfrm>
+            <a:off x="548640" y="1389888"/>
+            <a:ext cx="1463040" cy="292608"/>
+          </a:xfrm>
+          <a:prstGeom prst="rect">
+            <a:avLst/>
+          </a:prstGeom>
+          <a:noFill/>
+        </p:spPr>
+        <p:txBody>
+          <a:bodyPr wrap="square" lIns="0" rIns="0" tIns="0" bIns="0" anchor="t">
+            <a:noAutofit/>
+          </a:bodyPr>
+          <a:lstStyle/>
+          <a:p>
+            <a:pPr algn="l"/>
+            <a:r>
+              <a:rPr sz="1100" b="1" i="0" spc="60">
+                <a:solidFill>
+                  <a:srgbClr val="1C1410"/>
+                </a:solidFill>
+                <a:latin typeface="JetBrains Mono"/>
+              </a:rPr>
+              <a:t>backend</a:t>
+            </a:r>
+          </a:p>
+        </p:txBody>
+      </p:sp>
+      <p:sp>
+        <p:nvSpPr>
+          <p:cNvPr id="8" name="TextBox 7"/>
+          <p:cNvSpPr txBox="1"/>
+          <p:nvPr/>
+        </p:nvSpPr>
+        <p:spPr>
+          <a:xfrm>
+            <a:off x="2057400" y="1389888"/>
+            <a:ext cx="182880" cy="292608"/>
+          </a:xfrm>
+          <a:prstGeom prst="rect">
+            <a:avLst/>
+          </a:prstGeom>
+          <a:noFill/>
+        </p:spPr>
+        <p:txBody>
+          <a:bodyPr wrap="square" lIns="0" rIns="0" tIns="0" bIns="0" anchor="t">
+            <a:noAutofit/>
+          </a:bodyPr>
+          <a:lstStyle/>
+          <a:p>
+            <a:pPr algn="l"/>
+            <a:r>
+              <a:rPr sz="1100" b="0" i="0">
+                <a:solidFill>
+                  <a:srgbClr val="A19C98"/>
+                </a:solidFill>
+                <a:latin typeface="JetBrains Mono Light"/>
+              </a:rPr>
+              <a:t>·</a:t>
+            </a:r>
+          </a:p>
+        </p:txBody>
+      </p:sp>
+      <p:sp>
+        <p:nvSpPr>
+          <p:cNvPr id="9" name="TextBox 8"/>
+          <p:cNvSpPr txBox="1"/>
+          <p:nvPr/>
+        </p:nvSpPr>
+        <p:spPr>
+          <a:xfrm>
+            <a:off x="2331720" y="1389888"/>
+            <a:ext cx="6858000" cy="292608"/>
+          </a:xfrm>
+          <a:prstGeom prst="rect">
+            <a:avLst/>
+          </a:prstGeom>
+          <a:noFill/>
+        </p:spPr>
+        <p:txBody>
+          <a:bodyPr wrap="square" lIns="0" rIns="0" tIns="0" bIns="0" anchor="t">
+            <a:noAutofit/>
+          </a:bodyPr>
+          <a:lstStyle/>
+          <a:p>
+            <a:pPr algn="l"/>
+            <a:r>
+              <a:rPr sz="1100" b="0" i="0">
+                <a:solidFill>
+                  <a:srgbClr val="5A4A3A"/>
+                </a:solidFill>
+                <a:latin typeface="JetBrains Mono Light"/>
+              </a:rPr>
+              <a:t>fastapi  ·  render  ·  alembic on every deploy</a:t>
+            </a:r>
+          </a:p>
+        </p:txBody>
+      </p:sp>
+      <p:sp>
+        <p:nvSpPr>
+          <p:cNvPr id="10" name="TextBox 9"/>
+          <p:cNvSpPr txBox="1"/>
+          <p:nvPr/>
+        </p:nvSpPr>
+        <p:spPr>
+          <a:xfrm>
+            <a:off x="548640" y="1773936"/>
+            <a:ext cx="1463040" cy="292608"/>
+          </a:xfrm>
+          <a:prstGeom prst="rect">
+            <a:avLst/>
+          </a:prstGeom>
+          <a:noFill/>
+        </p:spPr>
+        <p:txBody>
+          <a:bodyPr wrap="square" lIns="0" rIns="0" tIns="0" bIns="0" anchor="t">
+            <a:noAutofit/>
+          </a:bodyPr>
+          <a:lstStyle/>
+          <a:p>
+            <a:pPr algn="l"/>
+            <a:r>
+              <a:rPr sz="1100" b="1" i="0" spc="60">
+                <a:solidFill>
+                  <a:srgbClr val="1C1410"/>
+                </a:solidFill>
+                <a:latin typeface="JetBrains Mono"/>
+              </a:rPr>
+              <a:t>ai core</a:t>
+            </a:r>
+          </a:p>
+        </p:txBody>
+      </p:sp>
+      <p:sp>
+        <p:nvSpPr>
+          <p:cNvPr id="11" name="TextBox 10"/>
+          <p:cNvSpPr txBox="1"/>
+          <p:nvPr/>
+        </p:nvSpPr>
+        <p:spPr>
+          <a:xfrm>
+            <a:off x="2057400" y="1773936"/>
+            <a:ext cx="182880" cy="292608"/>
+          </a:xfrm>
+          <a:prstGeom prst="rect">
+            <a:avLst/>
+          </a:prstGeom>
+          <a:noFill/>
+        </p:spPr>
+        <p:txBody>
+          <a:bodyPr wrap="square" lIns="0" rIns="0" tIns="0" bIns="0" anchor="t">
+            <a:noAutofit/>
+          </a:bodyPr>
+          <a:lstStyle/>
+          <a:p>
+            <a:pPr algn="l"/>
+            <a:r>
+              <a:rPr sz="1100" b="0" i="0">
+                <a:solidFill>
+                  <a:srgbClr val="A19C98"/>
+                </a:solidFill>
+                <a:latin typeface="JetBrains Mono Light"/>
+              </a:rPr>
+              <a:t>·</a:t>
+            </a:r>
+          </a:p>
+        </p:txBody>
+      </p:sp>
+      <p:sp>
+        <p:nvSpPr>
+          <p:cNvPr id="12" name="TextBox 11"/>
+          <p:cNvSpPr txBox="1"/>
+          <p:nvPr/>
+        </p:nvSpPr>
+        <p:spPr>
+          <a:xfrm>
+            <a:off x="2331720" y="1773936"/>
+            <a:ext cx="6858000" cy="292608"/>
+          </a:xfrm>
+          <a:prstGeom prst="rect">
+            <a:avLst/>
+          </a:prstGeom>
+          <a:noFill/>
+        </p:spPr>
+        <p:txBody>
+          <a:bodyPr wrap="square" lIns="0" rIns="0" tIns="0" bIns="0" anchor="t">
+            <a:noAutofit/>
+          </a:bodyPr>
+          <a:lstStyle/>
+          <a:p>
+            <a:pPr algn="l"/>
+            <a:r>
+              <a:rPr sz="1100" b="0" i="0">
+                <a:solidFill>
+                  <a:srgbClr val="5A4A3A"/>
+                </a:solidFill>
+                <a:latin typeface="JetBrains Mono Light"/>
+              </a:rPr>
+              <a:t>fastapi  ·  hugging face spaces  ·  ed25519 sanad service</a:t>
+            </a:r>
+          </a:p>
+        </p:txBody>
+      </p:sp>
+      <p:sp>
+        <p:nvSpPr>
+          <p:cNvPr id="13" name="TextBox 12"/>
+          <p:cNvSpPr txBox="1"/>
+          <p:nvPr/>
+        </p:nvSpPr>
+        <p:spPr>
+          <a:xfrm>
+            <a:off x="548640" y="2157984"/>
+            <a:ext cx="1463040" cy="292608"/>
+          </a:xfrm>
+          <a:prstGeom prst="rect">
+            <a:avLst/>
+          </a:prstGeom>
+          <a:noFill/>
+        </p:spPr>
+        <p:txBody>
+          <a:bodyPr wrap="square" lIns="0" rIns="0" tIns="0" bIns="0" anchor="t">
+            <a:noAutofit/>
+          </a:bodyPr>
+          <a:lstStyle/>
+          <a:p>
+            <a:pPr algn="l"/>
+            <a:r>
+              <a:rPr sz="1100" b="1" i="0" spc="60">
+                <a:solidFill>
+                  <a:srgbClr val="1C1410"/>
+                </a:solidFill>
+                <a:latin typeface="JetBrains Mono"/>
+              </a:rPr>
+              <a:t>postgres</a:t>
+            </a:r>
+          </a:p>
+        </p:txBody>
+      </p:sp>
+      <p:sp>
+        <p:nvSpPr>
+          <p:cNvPr id="14" name="TextBox 13"/>
+          <p:cNvSpPr txBox="1"/>
+          <p:nvPr/>
+        </p:nvSpPr>
+        <p:spPr>
+          <a:xfrm>
+            <a:off x="2057400" y="2157984"/>
+            <a:ext cx="182880" cy="292608"/>
+          </a:xfrm>
+          <a:prstGeom prst="rect">
+            <a:avLst/>
+          </a:prstGeom>
+          <a:noFill/>
+        </p:spPr>
+        <p:txBody>
+          <a:bodyPr wrap="square" lIns="0" rIns="0" tIns="0" bIns="0" anchor="t">
+            <a:noAutofit/>
+          </a:bodyPr>
+          <a:lstStyle/>
+          <a:p>
+            <a:pPr algn="l"/>
+            <a:r>
+              <a:rPr sz="1100" b="0" i="0">
+                <a:solidFill>
+                  <a:srgbClr val="A19C98"/>
+                </a:solidFill>
+                <a:latin typeface="JetBrains Mono Light"/>
+              </a:rPr>
+              <a:t>·</a:t>
+            </a:r>
+          </a:p>
+        </p:txBody>
+      </p:sp>
+      <p:sp>
+        <p:nvSpPr>
+          <p:cNvPr id="15" name="TextBox 14"/>
+          <p:cNvSpPr txBox="1"/>
+          <p:nvPr/>
+        </p:nvSpPr>
+        <p:spPr>
+          <a:xfrm>
+            <a:off x="2331720" y="2157984"/>
+            <a:ext cx="6858000" cy="292608"/>
+          </a:xfrm>
+          <a:prstGeom prst="rect">
+            <a:avLst/>
+          </a:prstGeom>
+          <a:noFill/>
+        </p:spPr>
+        <p:txBody>
+          <a:bodyPr wrap="square" lIns="0" rIns="0" tIns="0" bIns="0" anchor="t">
+            <a:noAutofit/>
+          </a:bodyPr>
+          <a:lstStyle/>
+          <a:p>
+            <a:pPr algn="l"/>
+            <a:r>
+              <a:rPr sz="1100" b="0" i="0">
+                <a:solidFill>
+                  <a:srgbClr val="5A4A3A"/>
+                </a:solidFill>
+                <a:latin typeface="JetBrains Mono Light"/>
+              </a:rPr>
+              <a:t>neon  ·  pgvector  ·  shared between backend + ai core</a:t>
+            </a:r>
+          </a:p>
+        </p:txBody>
+      </p:sp>
+      <p:sp>
+        <p:nvSpPr>
+          <p:cNvPr id="16" name="TextBox 15"/>
+          <p:cNvSpPr txBox="1"/>
+          <p:nvPr/>
+        </p:nvSpPr>
+        <p:spPr>
+          <a:xfrm>
+            <a:off x="548640" y="2542032"/>
+            <a:ext cx="1463040" cy="292608"/>
+          </a:xfrm>
+          <a:prstGeom prst="rect">
+            <a:avLst/>
+          </a:prstGeom>
+          <a:noFill/>
+        </p:spPr>
+        <p:txBody>
+          <a:bodyPr wrap="square" lIns="0" rIns="0" tIns="0" bIns="0" anchor="t">
+            <a:noAutofit/>
+          </a:bodyPr>
+          <a:lstStyle/>
+          <a:p>
+            <a:pPr algn="l"/>
+            <a:r>
+              <a:rPr sz="1100" b="1" i="0" spc="60">
+                <a:solidFill>
+                  <a:srgbClr val="1C1410"/>
+                </a:solidFill>
+                <a:latin typeface="JetBrains Mono"/>
+              </a:rPr>
+              <a:t>asr</a:t>
+            </a:r>
+          </a:p>
+        </p:txBody>
+      </p:sp>
+      <p:sp>
+        <p:nvSpPr>
+          <p:cNvPr id="17" name="TextBox 16"/>
+          <p:cNvSpPr txBox="1"/>
+          <p:nvPr/>
+        </p:nvSpPr>
+        <p:spPr>
+          <a:xfrm>
+            <a:off x="2057400" y="2542032"/>
+            <a:ext cx="182880" cy="292608"/>
+          </a:xfrm>
+          <a:prstGeom prst="rect">
+            <a:avLst/>
+          </a:prstGeom>
+          <a:noFill/>
+        </p:spPr>
+        <p:txBody>
+          <a:bodyPr wrap="square" lIns="0" rIns="0" tIns="0" bIns="0" anchor="t">
+            <a:noAutofit/>
+          </a:bodyPr>
+          <a:lstStyle/>
+          <a:p>
+            <a:pPr algn="l"/>
+            <a:r>
+              <a:rPr sz="1100" b="0" i="0">
+                <a:solidFill>
+                  <a:srgbClr val="A19C98"/>
+                </a:solidFill>
+                <a:latin typeface="JetBrains Mono Light"/>
+              </a:rPr>
+              <a:t>·</a:t>
+            </a:r>
+          </a:p>
+        </p:txBody>
+      </p:sp>
+      <p:sp>
+        <p:nvSpPr>
+          <p:cNvPr id="18" name="TextBox 17"/>
+          <p:cNvSpPr txBox="1"/>
+          <p:nvPr/>
+        </p:nvSpPr>
+        <p:spPr>
+          <a:xfrm>
+            <a:off x="2331720" y="2542032"/>
+            <a:ext cx="6858000" cy="292608"/>
+          </a:xfrm>
+          <a:prstGeom prst="rect">
+            <a:avLst/>
+          </a:prstGeom>
+          <a:noFill/>
+        </p:spPr>
+        <p:txBody>
+          <a:bodyPr wrap="square" lIns="0" rIns="0" tIns="0" bIns="0" anchor="t">
+            <a:noAutofit/>
+          </a:bodyPr>
+          <a:lstStyle/>
+          <a:p>
+            <a:pPr algn="l"/>
+            <a:r>
+              <a:rPr sz="1100" b="0" i="0">
+                <a:solidFill>
+                  <a:srgbClr val="5A4A3A"/>
+                </a:solidFill>
+                <a:latin typeface="JetBrains Mono Light"/>
+              </a:rPr>
+              <a:t>bhashini  &gt;  ai4bharat  &gt;  groq  &gt;  hf inference  &gt;  whisper</a:t>
+            </a:r>
+          </a:p>
+        </p:txBody>
+      </p:sp>
+      <p:sp>
+        <p:nvSpPr>
+          <p:cNvPr id="19" name="TextBox 18"/>
+          <p:cNvSpPr txBox="1"/>
+          <p:nvPr/>
+        </p:nvSpPr>
+        <p:spPr>
+          <a:xfrm>
+            <a:off x="548640" y="2926080"/>
+            <a:ext cx="1463040" cy="292608"/>
+          </a:xfrm>
+          <a:prstGeom prst="rect">
+            <a:avLst/>
+          </a:prstGeom>
+          <a:noFill/>
+        </p:spPr>
+        <p:txBody>
+          <a:bodyPr wrap="square" lIns="0" rIns="0" tIns="0" bIns="0" anchor="t">
+            <a:noAutofit/>
+          </a:bodyPr>
+          <a:lstStyle/>
+          <a:p>
+            <a:pPr algn="l"/>
+            <a:r>
+              <a:rPr sz="1100" b="1" i="0" spc="60">
+                <a:solidFill>
+                  <a:srgbClr val="1C1410"/>
+                </a:solidFill>
+                <a:latin typeface="JetBrains Mono"/>
+              </a:rPr>
+              <a:t>llm</a:t>
+            </a:r>
+          </a:p>
+        </p:txBody>
+      </p:sp>
+      <p:sp>
+        <p:nvSpPr>
+          <p:cNvPr id="20" name="TextBox 19"/>
+          <p:cNvSpPr txBox="1"/>
+          <p:nvPr/>
+        </p:nvSpPr>
+        <p:spPr>
+          <a:xfrm>
+            <a:off x="2057400" y="2926080"/>
+            <a:ext cx="182880" cy="292608"/>
+          </a:xfrm>
+          <a:prstGeom prst="rect">
+            <a:avLst/>
+          </a:prstGeom>
+          <a:noFill/>
+        </p:spPr>
+        <p:txBody>
+          <a:bodyPr wrap="square" lIns="0" rIns="0" tIns="0" bIns="0" anchor="t">
+            <a:noAutofit/>
+          </a:bodyPr>
+          <a:lstStyle/>
+          <a:p>
+            <a:pPr algn="l"/>
+            <a:r>
+              <a:rPr sz="1100" b="0" i="0">
+                <a:solidFill>
+                  <a:srgbClr val="A19C98"/>
+                </a:solidFill>
+                <a:latin typeface="JetBrains Mono Light"/>
+              </a:rPr>
+              <a:t>·</a:t>
+            </a:r>
+          </a:p>
+        </p:txBody>
+      </p:sp>
+      <p:sp>
+        <p:nvSpPr>
+          <p:cNvPr id="21" name="TextBox 20"/>
+          <p:cNvSpPr txBox="1"/>
+          <p:nvPr/>
+        </p:nvSpPr>
+        <p:spPr>
+          <a:xfrm>
+            <a:off x="2331720" y="2926080"/>
+            <a:ext cx="6858000" cy="292608"/>
+          </a:xfrm>
+          <a:prstGeom prst="rect">
+            <a:avLst/>
+          </a:prstGeom>
+          <a:noFill/>
+        </p:spPr>
+        <p:txBody>
+          <a:bodyPr wrap="square" lIns="0" rIns="0" tIns="0" bIns="0" anchor="t">
+            <a:noAutofit/>
+          </a:bodyPr>
+          <a:lstStyle/>
+          <a:p>
+            <a:pPr algn="l"/>
+            <a:r>
+              <a:rPr sz="1100" b="0" i="0">
+                <a:solidFill>
+                  <a:srgbClr val="5A4A3A"/>
+                </a:solidFill>
+                <a:latin typeface="JetBrains Mono Light"/>
+              </a:rPr>
+              <a:t>openrouter  ·  free + premium models behind one interface</a:t>
+            </a:r>
+          </a:p>
+        </p:txBody>
+      </p:sp>
+      <p:sp>
+        <p:nvSpPr>
+          <p:cNvPr id="22" name="TextBox 21"/>
+          <p:cNvSpPr txBox="1"/>
+          <p:nvPr/>
+        </p:nvSpPr>
+        <p:spPr>
+          <a:xfrm>
+            <a:off x="548640" y="3310128"/>
+            <a:ext cx="1463040" cy="292608"/>
+          </a:xfrm>
+          <a:prstGeom prst="rect">
+            <a:avLst/>
+          </a:prstGeom>
+          <a:noFill/>
+        </p:spPr>
+        <p:txBody>
+          <a:bodyPr wrap="square" lIns="0" rIns="0" tIns="0" bIns="0" anchor="t">
+            <a:noAutofit/>
+          </a:bodyPr>
+          <a:lstStyle/>
+          <a:p>
+            <a:pPr algn="l"/>
+            <a:r>
+              <a:rPr sz="1100" b="1" i="0" spc="60">
+                <a:solidFill>
+                  <a:srgbClr val="1C1410"/>
+                </a:solidFill>
+                <a:latin typeface="JetBrains Mono"/>
+              </a:rPr>
+              <a:t>embeddings</a:t>
+            </a:r>
+          </a:p>
+        </p:txBody>
+      </p:sp>
+      <p:sp>
+        <p:nvSpPr>
+          <p:cNvPr id="23" name="TextBox 22"/>
+          <p:cNvSpPr txBox="1"/>
+          <p:nvPr/>
+        </p:nvSpPr>
+        <p:spPr>
+          <a:xfrm>
+            <a:off x="2057400" y="3310128"/>
+            <a:ext cx="182880" cy="292608"/>
+          </a:xfrm>
+          <a:prstGeom prst="rect">
+            <a:avLst/>
+          </a:prstGeom>
+          <a:noFill/>
+        </p:spPr>
+        <p:txBody>
+          <a:bodyPr wrap="square" lIns="0" rIns="0" tIns="0" bIns="0" anchor="t">
+            <a:noAutofit/>
+          </a:bodyPr>
+          <a:lstStyle/>
+          <a:p>
+            <a:pPr algn="l"/>
+            <a:r>
+              <a:rPr sz="1100" b="0" i="0">
+                <a:solidFill>
+                  <a:srgbClr val="A19C98"/>
+                </a:solidFill>
+                <a:latin typeface="JetBrains Mono Light"/>
+              </a:rPr>
+              <a:t>·</a:t>
+            </a:r>
+          </a:p>
+        </p:txBody>
+      </p:sp>
+      <p:sp>
+        <p:nvSpPr>
+          <p:cNvPr id="24" name="TextBox 23"/>
+          <p:cNvSpPr txBox="1"/>
+          <p:nvPr/>
+        </p:nvSpPr>
+        <p:spPr>
+          <a:xfrm>
+            <a:off x="2331720" y="3310128"/>
+            <a:ext cx="6858000" cy="292608"/>
+          </a:xfrm>
+          <a:prstGeom prst="rect">
+            <a:avLst/>
+          </a:prstGeom>
+          <a:noFill/>
+        </p:spPr>
+        <p:txBody>
+          <a:bodyPr wrap="square" lIns="0" rIns="0" tIns="0" bIns="0" anchor="t">
+            <a:noAutofit/>
+          </a:bodyPr>
+          <a:lstStyle/>
+          <a:p>
+            <a:pPr algn="l"/>
+            <a:r>
+              <a:rPr sz="1100" b="0" i="0">
+                <a:solidFill>
+                  <a:srgbClr val="5A4A3A"/>
+                </a:solidFill>
+                <a:latin typeface="JetBrains Mono Light"/>
+              </a:rPr>
+              <a:t>sentence-transformers  ·  intfloat / multilingual-e5-small</a:t>
+            </a:r>
+          </a:p>
+        </p:txBody>
+      </p:sp>
+      <p:sp>
+        <p:nvSpPr>
+          <p:cNvPr id="25" name="TextBox 24"/>
+          <p:cNvSpPr txBox="1"/>
+          <p:nvPr/>
+        </p:nvSpPr>
+        <p:spPr>
+          <a:xfrm>
+            <a:off x="548640" y="3694176"/>
+            <a:ext cx="1463040" cy="292608"/>
+          </a:xfrm>
+          <a:prstGeom prst="rect">
+            <a:avLst/>
+          </a:prstGeom>
+          <a:noFill/>
+        </p:spPr>
+        <p:txBody>
+          <a:bodyPr wrap="square" lIns="0" rIns="0" tIns="0" bIns="0" anchor="t">
+            <a:noAutofit/>
+          </a:bodyPr>
+          <a:lstStyle/>
+          <a:p>
+            <a:pPr algn="l"/>
+            <a:r>
+              <a:rPr sz="1100" b="1" i="0" spc="60">
+                <a:solidFill>
+                  <a:srgbClr val="1C1410"/>
+                </a:solidFill>
+                <a:latin typeface="JetBrains Mono"/>
+              </a:rPr>
+              <a:t>signature</a:t>
+            </a:r>
+          </a:p>
+        </p:txBody>
+      </p:sp>
+      <p:sp>
+        <p:nvSpPr>
+          <p:cNvPr id="26" name="TextBox 25"/>
+          <p:cNvSpPr txBox="1"/>
+          <p:nvPr/>
+        </p:nvSpPr>
+        <p:spPr>
+          <a:xfrm>
+            <a:off x="2057400" y="3694176"/>
+            <a:ext cx="182880" cy="292608"/>
+          </a:xfrm>
+          <a:prstGeom prst="rect">
+            <a:avLst/>
+          </a:prstGeom>
+          <a:noFill/>
+        </p:spPr>
+        <p:txBody>
+          <a:bodyPr wrap="square" lIns="0" rIns="0" tIns="0" bIns="0" anchor="t">
+            <a:noAutofit/>
+          </a:bodyPr>
+          <a:lstStyle/>
+          <a:p>
+            <a:pPr algn="l"/>
+            <a:r>
+              <a:rPr sz="1100" b="0" i="0">
+                <a:solidFill>
+                  <a:srgbClr val="A19C98"/>
+                </a:solidFill>
+                <a:latin typeface="JetBrains Mono Light"/>
+              </a:rPr>
+              <a:t>·</a:t>
+            </a:r>
+          </a:p>
+        </p:txBody>
+      </p:sp>
+      <p:sp>
+        <p:nvSpPr>
+          <p:cNvPr id="27" name="TextBox 26"/>
+          <p:cNvSpPr txBox="1"/>
+          <p:nvPr/>
+        </p:nvSpPr>
+        <p:spPr>
+          <a:xfrm>
+            <a:off x="2331720" y="3694176"/>
+            <a:ext cx="6858000" cy="292608"/>
+          </a:xfrm>
+          <a:prstGeom prst="rect">
+            <a:avLst/>
+          </a:prstGeom>
+          <a:noFill/>
+        </p:spPr>
+        <p:txBody>
+          <a:bodyPr wrap="square" lIns="0" rIns="0" tIns="0" bIns="0" anchor="t">
+            <a:noAutofit/>
+          </a:bodyPr>
+          <a:lstStyle/>
+          <a:p>
+            <a:pPr algn="l"/>
+            <a:r>
+              <a:rPr sz="1100" b="0" i="0">
+                <a:solidFill>
+                  <a:srgbClr val="5A4A3A"/>
+                </a:solidFill>
+                <a:latin typeface="JetBrains Mono Light"/>
+              </a:rPr>
+              <a:t>ed25519 over rfc 8785 jcs  ·  jws-compact qr  ·  offline verify</a:t>
+            </a:r>
+          </a:p>
+        </p:txBody>
+      </p:sp>
+      <p:sp>
+        <p:nvSpPr>
+          <p:cNvPr id="28" name="TextBox 27"/>
+          <p:cNvSpPr txBox="1"/>
+          <p:nvPr/>
+        </p:nvSpPr>
+        <p:spPr>
+          <a:xfrm>
+            <a:off x="548640" y="4306824"/>
+            <a:ext cx="9144000" cy="292608"/>
+          </a:xfrm>
+          <a:prstGeom prst="rect">
+            <a:avLst/>
+          </a:prstGeom>
+          <a:noFill/>
+        </p:spPr>
+        <p:txBody>
+          <a:bodyPr wrap="square" lIns="0" rIns="0" tIns="0" bIns="0" anchor="t">
+            <a:noAutofit/>
+          </a:bodyPr>
+          <a:lstStyle/>
+          <a:p>
+            <a:pPr algn="l"/>
+            <a:r>
+              <a:rPr sz="1200" b="1" i="0">
+                <a:solidFill>
+                  <a:srgbClr val="1C1410"/>
+                </a:solidFill>
+                <a:latin typeface="JetBrains Mono"/>
+              </a:rPr>
+              <a:t>every dependency above is on a free tier today.</a:t>
+            </a:r>
+          </a:p>
+        </p:txBody>
+      </p:sp>
+      <p:sp>
+        <p:nvSpPr>
+          <p:cNvPr id="29" name="TextBox 28"/>
+          <p:cNvSpPr txBox="1"/>
+          <p:nvPr/>
+        </p:nvSpPr>
+        <p:spPr>
+          <a:xfrm>
+            <a:off x="9509760" y="1005840"/>
+            <a:ext cx="2286000" cy="868680"/>
+          </a:xfrm>
+          <a:prstGeom prst="rect">
+            <a:avLst/>
+          </a:prstGeom>
+          <a:noFill/>
+        </p:spPr>
+        <p:txBody>
+          <a:bodyPr wrap="square" lIns="0" rIns="0" tIns="0" bIns="0" anchor="t">
+            <a:noAutofit/>
+          </a:bodyPr>
+          <a:lstStyle/>
+          <a:p>
+            <a:pPr algn="l"/>
+            <a:r>
+              <a:rPr sz="6400" b="0" i="0">
+                <a:solidFill>
+                  <a:srgbClr val="1C1410"/>
+                </a:solidFill>
+                <a:latin typeface="JetBrains Mono Light"/>
+              </a:rPr>
+              <a:t>18</a:t>
+            </a:r>
+          </a:p>
+        </p:txBody>
+      </p:sp>
+      <p:sp>
+        <p:nvSpPr>
+          <p:cNvPr id="30" name="TextBox 29"/>
+          <p:cNvSpPr txBox="1"/>
+          <p:nvPr/>
+        </p:nvSpPr>
+        <p:spPr>
+          <a:xfrm>
+            <a:off x="9509760" y="1874519"/>
+            <a:ext cx="2286000" cy="502920"/>
+          </a:xfrm>
+          <a:prstGeom prst="rect">
+            <a:avLst/>
+          </a:prstGeom>
+          <a:noFill/>
+        </p:spPr>
+        <p:txBody>
+          <a:bodyPr wrap="square" lIns="0" rIns="0" tIns="0" bIns="0" anchor="t">
+            <a:noAutofit/>
+          </a:bodyPr>
+          <a:lstStyle/>
+          <a:p>
+            <a:pPr algn="l">
+              <a:lnSpc>
+                <a:spcPct val="140000"/>
+              </a:lnSpc>
+            </a:pPr>
+            <a:r>
+              <a:rPr sz="900" b="0" i="0" spc="60">
+                <a:solidFill>
+                  <a:srgbClr val="5A4A3A"/>
+                </a:solidFill>
+                <a:latin typeface="JetBrains Mono Light"/>
+              </a:rPr>
+              <a:t>seeded</a:t>
+            </a:r>
+          </a:p>
+          <a:p>
+            <a:pPr algn="l">
+              <a:lnSpc>
+                <a:spcPct val="140000"/>
+              </a:lnSpc>
+            </a:pPr>
+            <a:r>
+              <a:rPr sz="900" b="0" i="0" spc="60">
+                <a:solidFill>
+                  <a:srgbClr val="5A4A3A"/>
+                </a:solidFill>
+                <a:latin typeface="JetBrains Mono Light"/>
+              </a:rPr>
+              <a:t>artisan masters</a:t>
+            </a:r>
+          </a:p>
+        </p:txBody>
+      </p:sp>
+      <p:sp>
+        <p:nvSpPr>
+          <p:cNvPr id="31" name="TextBox 30"/>
+          <p:cNvSpPr txBox="1"/>
+          <p:nvPr/>
+        </p:nvSpPr>
+        <p:spPr>
+          <a:xfrm>
+            <a:off x="9509760" y="2423160"/>
+            <a:ext cx="2286000" cy="868680"/>
+          </a:xfrm>
+          <a:prstGeom prst="rect">
+            <a:avLst/>
+          </a:prstGeom>
+          <a:noFill/>
+        </p:spPr>
+        <p:txBody>
+          <a:bodyPr wrap="square" lIns="0" rIns="0" tIns="0" bIns="0" anchor="t">
+            <a:noAutofit/>
+          </a:bodyPr>
+          <a:lstStyle/>
+          <a:p>
+            <a:pPr algn="l"/>
+            <a:r>
+              <a:rPr sz="6400" b="0" i="0">
+                <a:solidFill>
+                  <a:srgbClr val="1C1410"/>
+                </a:solidFill>
+                <a:latin typeface="JetBrains Mono Light"/>
+              </a:rPr>
+              <a:t>54</a:t>
+            </a:r>
+          </a:p>
+        </p:txBody>
+      </p:sp>
+      <p:sp>
+        <p:nvSpPr>
+          <p:cNvPr id="32" name="TextBox 31"/>
+          <p:cNvSpPr txBox="1"/>
+          <p:nvPr/>
+        </p:nvSpPr>
+        <p:spPr>
+          <a:xfrm>
+            <a:off x="9509760" y="3291840"/>
+            <a:ext cx="2286000" cy="502920"/>
+          </a:xfrm>
+          <a:prstGeom prst="rect">
+            <a:avLst/>
+          </a:prstGeom>
+          <a:noFill/>
+        </p:spPr>
+        <p:txBody>
+          <a:bodyPr wrap="square" lIns="0" rIns="0" tIns="0" bIns="0" anchor="t">
+            <a:noAutofit/>
+          </a:bodyPr>
+          <a:lstStyle/>
+          <a:p>
+            <a:pPr algn="l">
+              <a:lnSpc>
+                <a:spcPct val="140000"/>
+              </a:lnSpc>
+            </a:pPr>
+            <a:r>
+              <a:rPr sz="900" b="0" i="0" spc="60">
+                <a:solidFill>
+                  <a:srgbClr val="5A4A3A"/>
+                </a:solidFill>
+                <a:latin typeface="JetBrains Mono Light"/>
+              </a:rPr>
+              <a:t>bookable</a:t>
+            </a:r>
+          </a:p>
+          <a:p>
+            <a:pPr algn="l">
+              <a:lnSpc>
+                <a:spcPct val="140000"/>
+              </a:lnSpc>
+            </a:pPr>
+            <a:r>
+              <a:rPr sz="900" b="0" i="0" spc="60">
+                <a:solidFill>
+                  <a:srgbClr val="5A4A3A"/>
+                </a:solidFill>
+                <a:latin typeface="JetBrains Mono Light"/>
+              </a:rPr>
+              <a:t>workshops</a:t>
+            </a:r>
+          </a:p>
+        </p:txBody>
+      </p:sp>
+      <p:sp>
+        <p:nvSpPr>
+          <p:cNvPr id="33" name="TextBox 32"/>
+          <p:cNvSpPr txBox="1"/>
+          <p:nvPr/>
+        </p:nvSpPr>
+        <p:spPr>
+          <a:xfrm>
+            <a:off x="9509760" y="3840480"/>
+            <a:ext cx="2286000" cy="868680"/>
+          </a:xfrm>
+          <a:prstGeom prst="rect">
+            <a:avLst/>
+          </a:prstGeom>
+          <a:noFill/>
+        </p:spPr>
+        <p:txBody>
+          <a:bodyPr wrap="square" lIns="0" rIns="0" tIns="0" bIns="0" anchor="t">
+            <a:noAutofit/>
+          </a:bodyPr>
+          <a:lstStyle/>
+          <a:p>
+            <a:pPr algn="l"/>
+            <a:r>
+              <a:rPr sz="6400" b="0" i="0">
+                <a:solidFill>
+                  <a:srgbClr val="1C1410"/>
+                </a:solidFill>
+                <a:latin typeface="JetBrains Mono Light"/>
+              </a:rPr>
+              <a:t>2.8s</a:t>
+            </a:r>
+          </a:p>
+        </p:txBody>
+      </p:sp>
+      <p:sp>
+        <p:nvSpPr>
+          <p:cNvPr id="34" name="TextBox 33"/>
+          <p:cNvSpPr txBox="1"/>
+          <p:nvPr/>
+        </p:nvSpPr>
+        <p:spPr>
+          <a:xfrm>
+            <a:off x="9509760" y="4709160"/>
+            <a:ext cx="2286000" cy="502920"/>
+          </a:xfrm>
+          <a:prstGeom prst="rect">
+            <a:avLst/>
+          </a:prstGeom>
+          <a:noFill/>
+        </p:spPr>
+        <p:txBody>
+          <a:bodyPr wrap="square" lIns="0" rIns="0" tIns="0" bIns="0" anchor="t">
+            <a:noAutofit/>
+          </a:bodyPr>
+          <a:lstStyle/>
+          <a:p>
+            <a:pPr algn="l">
+              <a:lnSpc>
+                <a:spcPct val="140000"/>
+              </a:lnSpc>
+            </a:pPr>
+            <a:r>
+              <a:rPr sz="900" b="0" i="0" spc="60">
+                <a:solidFill>
+                  <a:srgbClr val="5A4A3A"/>
+                </a:solidFill>
+                <a:latin typeface="JetBrains Mono Light"/>
+              </a:rPr>
+              <a:t>median latency,</a:t>
+            </a:r>
+          </a:p>
+          <a:p>
+            <a:pPr algn="l">
+              <a:lnSpc>
+                <a:spcPct val="140000"/>
+              </a:lnSpc>
+            </a:pPr>
+            <a:r>
+              <a:rPr sz="900" b="0" i="0" spc="60">
+                <a:solidFill>
+                  <a:srgbClr val="5A4A3A"/>
+                </a:solidFill>
+                <a:latin typeface="JetBrains Mono Light"/>
+              </a:rPr>
+              <a:t>sign + persist</a:t>
+            </a:r>
+          </a:p>
+        </p:txBody>
+      </p:sp>
+      <p:sp>
+        <p:nvSpPr>
+          <p:cNvPr id="35" name="Oval 34"/>
           <p:cNvSpPr/>
           <p:nvPr/>
         </p:nvSpPr>
         <p:spPr>
           <a:xfrm>
-            <a:off x="1828800" y="2194560"/>
-            <a:ext cx="6419088" cy="411480"/>
-          </a:xfrm>
-          <a:prstGeom prst="rect">
-            <a:avLst/>
-          </a:prstGeom>
-          <a:solidFill>
-            <a:srgbClr val="1C1410"/>
-          </a:solidFill>
-          <a:ln>
-            <a:noFill/>
-          </a:ln>
-          <a:effectLst/>
-        </p:spPr>
-        <p:style>
-          <a:lnRef idx="1">
-            <a:schemeClr val="accent1"/>
-          </a:lnRef>
-          <a:fillRef idx="3">
-            <a:schemeClr val="accent1"/>
-          </a:fillRef>
-          <a:effectRef idx="2">
-            <a:schemeClr val="accent1"/>
-          </a:effectRef>
-          <a:fontRef idx="minor">
-            <a:schemeClr val="lt1"/>
-          </a:fontRef>
-        </p:style>
-        <p:txBody>
-          <a:bodyPr rtlCol="0" anchor="ctr"/>
-          <a:lstStyle/>
-          <a:p>
-            <a:pPr algn="ctr"/>
-          </a:p>
-        </p:txBody>
-      </p:sp>
-      <p:sp>
-        <p:nvSpPr>
-          <p:cNvPr id="6" name="Rectangle 5"/>
-          <p:cNvSpPr/>
-          <p:nvPr/>
-        </p:nvSpPr>
-        <p:spPr>
-          <a:xfrm>
-            <a:off x="8247888" y="2194560"/>
-            <a:ext cx="1810511" cy="411480"/>
-          </a:xfrm>
-          <a:prstGeom prst="rect">
-            <a:avLst/>
-          </a:prstGeom>
-          <a:solidFill>
-            <a:srgbClr val="C2BAB2"/>
-          </a:solidFill>
-          <a:ln>
-            <a:noFill/>
-          </a:ln>
-          <a:effectLst/>
-        </p:spPr>
-        <p:style>
-          <a:lnRef idx="1">
-            <a:schemeClr val="accent1"/>
-          </a:lnRef>
-          <a:fillRef idx="3">
-            <a:schemeClr val="accent1"/>
-          </a:fillRef>
-          <a:effectRef idx="2">
-            <a:schemeClr val="accent1"/>
-          </a:effectRef>
-          <a:fontRef idx="minor">
-            <a:schemeClr val="lt1"/>
-          </a:fontRef>
-        </p:style>
-        <p:txBody>
-          <a:bodyPr rtlCol="0" anchor="ctr"/>
-          <a:lstStyle/>
-          <a:p>
-            <a:pPr algn="ctr"/>
-          </a:p>
-        </p:txBody>
-      </p:sp>
-      <p:sp>
-        <p:nvSpPr>
-          <p:cNvPr id="7" name="TextBox 6"/>
-          <p:cNvSpPr txBox="1"/>
-          <p:nvPr/>
-        </p:nvSpPr>
-        <p:spPr>
-          <a:xfrm>
-            <a:off x="1828800" y="2715768"/>
-            <a:ext cx="6419088" cy="228600"/>
-          </a:xfrm>
-          <a:prstGeom prst="rect">
-            <a:avLst/>
-          </a:prstGeom>
-          <a:noFill/>
-        </p:spPr>
-        <p:txBody>
-          <a:bodyPr wrap="square" lIns="0" rIns="0" tIns="0" bIns="0" anchor="t">
-            <a:noAutofit/>
-          </a:bodyPr>
-          <a:lstStyle/>
-          <a:p>
-            <a:pPr algn="l"/>
-            <a:r>
-              <a:rPr sz="900" b="0" i="0" spc="60">
-                <a:solidFill>
-                  <a:srgbClr val="5A4A3A"/>
-                </a:solidFill>
-                <a:latin typeface="JetBrains Mono Light"/>
-              </a:rPr>
-              <a:t>middleman chain, 70 to 85 percent</a:t>
-            </a:r>
-          </a:p>
-        </p:txBody>
-      </p:sp>
-      <p:sp>
-        <p:nvSpPr>
-          <p:cNvPr id="8" name="TextBox 7"/>
-          <p:cNvSpPr txBox="1"/>
-          <p:nvPr/>
-        </p:nvSpPr>
-        <p:spPr>
-          <a:xfrm>
-            <a:off x="8247888" y="2715768"/>
-            <a:ext cx="2724911" cy="228600"/>
-          </a:xfrm>
-          <a:prstGeom prst="rect">
-            <a:avLst/>
-          </a:prstGeom>
-          <a:noFill/>
-        </p:spPr>
-        <p:txBody>
-          <a:bodyPr wrap="square" lIns="0" rIns="0" tIns="0" bIns="0" anchor="t">
-            <a:noAutofit/>
-          </a:bodyPr>
-          <a:lstStyle/>
-          <a:p>
-            <a:pPr algn="l"/>
-            <a:r>
-              <a:rPr sz="900" b="0" i="0" spc="60">
-                <a:solidFill>
-                  <a:srgbClr val="5A4A3A"/>
-                </a:solidFill>
-                <a:latin typeface="JetBrains Mono Light"/>
-              </a:rPr>
-              <a:t>artisan, 15 to 30 percent</a:t>
-            </a:r>
-          </a:p>
-        </p:txBody>
-      </p:sp>
-      <p:sp>
-        <p:nvSpPr>
-          <p:cNvPr id="9" name="TextBox 8"/>
-          <p:cNvSpPr txBox="1"/>
-          <p:nvPr/>
-        </p:nvSpPr>
-        <p:spPr>
-          <a:xfrm>
-            <a:off x="548640" y="3717036"/>
-            <a:ext cx="1188720" cy="292608"/>
-          </a:xfrm>
-          <a:prstGeom prst="rect">
-            <a:avLst/>
-          </a:prstGeom>
-          <a:noFill/>
-        </p:spPr>
-        <p:txBody>
-          <a:bodyPr wrap="square" lIns="0" rIns="0" tIns="0" bIns="0" anchor="t">
-            <a:noAutofit/>
-          </a:bodyPr>
-          <a:lstStyle/>
-          <a:p>
-            <a:pPr algn="l"/>
-            <a:r>
-              <a:rPr sz="1100" b="1" i="0">
-                <a:solidFill>
-                  <a:srgbClr val="8B1A1A"/>
-                </a:solidFill>
-                <a:latin typeface="JetBrains Mono"/>
-              </a:rPr>
-              <a:t>hunarmand</a:t>
-            </a:r>
-          </a:p>
-        </p:txBody>
-      </p:sp>
-      <p:sp>
-        <p:nvSpPr>
-          <p:cNvPr id="10" name="Rectangle 9"/>
-          <p:cNvSpPr/>
-          <p:nvPr/>
-        </p:nvSpPr>
-        <p:spPr>
-          <a:xfrm>
-            <a:off x="1828800" y="3611880"/>
-            <a:ext cx="658368" cy="411480"/>
-          </a:xfrm>
-          <a:prstGeom prst="rect">
+            <a:off x="589279" y="6130544"/>
+            <a:ext cx="101600" cy="101600"/>
+          </a:xfrm>
+          <a:prstGeom prst="ellipse">
             <a:avLst/>
           </a:prstGeom>
           <a:solidFill>
@@ -6982,156 +9353,77 @@
       </p:sp>
       <p:sp>
         <p:nvSpPr>
-          <p:cNvPr id="11" name="Rectangle 10"/>
-          <p:cNvSpPr/>
-          <p:nvPr/>
-        </p:nvSpPr>
-        <p:spPr>
-          <a:xfrm>
-            <a:off x="2487168" y="3611880"/>
-            <a:ext cx="7571231" cy="411480"/>
-          </a:xfrm>
-          <a:prstGeom prst="rect">
-            <a:avLst/>
-          </a:prstGeom>
-          <a:solidFill>
-            <a:srgbClr val="1C1410"/>
-          </a:solidFill>
-          <a:ln>
-            <a:noFill/>
+          <p:cNvPr id="36" name="TextBox 35"/>
+          <p:cNvSpPr txBox="1"/>
+          <p:nvPr/>
+        </p:nvSpPr>
+        <p:spPr>
+          <a:xfrm>
+            <a:off x="868680" y="6080760"/>
+            <a:ext cx="9601200" cy="292608"/>
+          </a:xfrm>
+          <a:prstGeom prst="rect">
+            <a:avLst/>
+          </a:prstGeom>
+          <a:noFill/>
+        </p:spPr>
+        <p:txBody>
+          <a:bodyPr wrap="square" lIns="0" rIns="0" tIns="0" bIns="0" anchor="t">
+            <a:noAutofit/>
+          </a:bodyPr>
+          <a:lstStyle/>
+          <a:p>
+            <a:pPr algn="l"/>
+            <a:r>
+              <a:rPr sz="1200" b="1" i="0">
+                <a:solidFill>
+                  <a:srgbClr val="1C1410"/>
+                </a:solidFill>
+                <a:latin typeface="JetBrains Mono"/>
+              </a:rPr>
+              <a:t>every number is queryable from the public api right now.</a:t>
+            </a:r>
+          </a:p>
+        </p:txBody>
+      </p:sp>
+      <p:cxnSp>
+        <p:nvCxnSpPr>
+          <p:cNvPr id="37" name="Connector 36"/>
+          <p:cNvCxnSpPr/>
+          <p:nvPr/>
+        </p:nvCxnSpPr>
+        <p:spPr>
+          <a:xfrm>
+            <a:off x="868680" y="6391656"/>
+            <a:ext cx="2194559" cy="0"/>
+          </a:xfrm>
+          <a:prstGeom prst="line">
+            <a:avLst/>
+          </a:prstGeom>
+          <a:ln w="11430">
+            <a:solidFill>
+              <a:srgbClr val="8B1A1A"/>
+            </a:solidFill>
           </a:ln>
-          <a:effectLst/>
         </p:spPr>
         <p:style>
-          <a:lnRef idx="1">
+          <a:lnRef idx="2">
             <a:schemeClr val="accent1"/>
           </a:lnRef>
-          <a:fillRef idx="3">
+          <a:fillRef idx="0">
             <a:schemeClr val="accent1"/>
           </a:fillRef>
-          <a:effectRef idx="2">
+          <a:effectRef idx="1">
             <a:schemeClr val="accent1"/>
           </a:effectRef>
           <a:fontRef idx="minor">
-            <a:schemeClr val="lt1"/>
+            <a:schemeClr val="tx1"/>
           </a:fontRef>
         </p:style>
-        <p:txBody>
-          <a:bodyPr rtlCol="0" anchor="ctr"/>
-          <a:lstStyle/>
-          <a:p>
-            <a:pPr algn="ctr"/>
-          </a:p>
-        </p:txBody>
-      </p:sp>
-      <p:sp>
-        <p:nvSpPr>
-          <p:cNvPr id="12" name="TextBox 11"/>
-          <p:cNvSpPr txBox="1"/>
-          <p:nvPr/>
-        </p:nvSpPr>
-        <p:spPr>
-          <a:xfrm>
-            <a:off x="365759" y="4133088"/>
-            <a:ext cx="2075688" cy="228600"/>
-          </a:xfrm>
-          <a:prstGeom prst="rect">
-            <a:avLst/>
-          </a:prstGeom>
-          <a:noFill/>
-        </p:spPr>
-        <p:txBody>
-          <a:bodyPr wrap="square" lIns="0" rIns="0" tIns="0" bIns="0" anchor="t">
-            <a:noAutofit/>
-          </a:bodyPr>
-          <a:lstStyle/>
-          <a:p>
-            <a:pPr algn="r"/>
-            <a:r>
-              <a:rPr sz="900" b="0" i="0" spc="60">
-                <a:solidFill>
-                  <a:srgbClr val="5A4A3A"/>
-                </a:solidFill>
-                <a:latin typeface="JetBrains Mono Light"/>
-              </a:rPr>
-              <a:t>platform, 6 to 9 percent</a:t>
-            </a:r>
-          </a:p>
-        </p:txBody>
-      </p:sp>
-      <p:sp>
-        <p:nvSpPr>
-          <p:cNvPr id="13" name="TextBox 12"/>
-          <p:cNvSpPr txBox="1"/>
-          <p:nvPr/>
-        </p:nvSpPr>
-        <p:spPr>
-          <a:xfrm>
-            <a:off x="2624327" y="4133088"/>
-            <a:ext cx="7571231" cy="228600"/>
-          </a:xfrm>
-          <a:prstGeom prst="rect">
-            <a:avLst/>
-          </a:prstGeom>
-          <a:noFill/>
-        </p:spPr>
-        <p:txBody>
-          <a:bodyPr wrap="square" lIns="0" rIns="0" tIns="0" bIns="0" anchor="t">
-            <a:noAutofit/>
-          </a:bodyPr>
-          <a:lstStyle/>
-          <a:p>
-            <a:pPr algn="l"/>
-            <a:r>
-              <a:rPr sz="900" b="0" i="0" spc="60">
-                <a:solidFill>
-                  <a:srgbClr val="5A4A3A"/>
-                </a:solidFill>
-                <a:latin typeface="JetBrains Mono Light"/>
-              </a:rPr>
-              <a:t>artisan, 91 to 94 percent</a:t>
-            </a:r>
-          </a:p>
-        </p:txBody>
-      </p:sp>
-      <p:sp>
-        <p:nvSpPr>
-          <p:cNvPr id="14" name="TextBox 13"/>
-          <p:cNvSpPr txBox="1"/>
-          <p:nvPr/>
-        </p:nvSpPr>
-        <p:spPr>
-          <a:xfrm>
-            <a:off x="1828800" y="4773168"/>
-            <a:ext cx="9144000" cy="365760"/>
-          </a:xfrm>
-          <a:prstGeom prst="rect">
-            <a:avLst/>
-          </a:prstGeom>
-          <a:noFill/>
-        </p:spPr>
-        <p:txBody>
-          <a:bodyPr wrap="square" lIns="0" rIns="0" tIns="0" bIns="0" anchor="t">
-            <a:noAutofit/>
-          </a:bodyPr>
-          <a:lstStyle/>
-          <a:p>
-            <a:pPr algn="l"/>
-            <a:r>
-              <a:rPr sz="1400" b="1" i="0">
-                <a:solidFill>
-                  <a:srgbClr val="1C1410"/>
-                </a:solidFill>
-                <a:latin typeface="JetBrains Mono"/>
-              </a:rPr>
-              <a:t>the artisan keeps the rest.</a:t>
-            </a:r>
-          </a:p>
-        </p:txBody>
-      </p:sp>
-      <p:sp>
-        <p:nvSpPr>
-          <p:cNvPr id="15" name="TextBox 14"/>
+      </p:cxnSp>
+      <p:sp>
+        <p:nvSpPr>
+          <p:cNvPr id="38" name="TextBox 37"/>
           <p:cNvSpPr txBox="1"/>
           <p:nvPr/>
         </p:nvSpPr>
@@ -7166,7 +9458,7 @@
       </p:sp>
       <p:sp>
         <p:nvSpPr>
-          <p:cNvPr id="16" name="TextBox 15"/>
+          <p:cNvPr id="39" name="TextBox 38"/>
           <p:cNvSpPr txBox="1"/>
           <p:nvPr/>
         </p:nvSpPr>
@@ -7194,7 +9486,7 @@
                 </a:solidFill>
                 <a:latin typeface="JetBrains Mono Light"/>
               </a:rPr>
-              <a:t>05 / 07</a:t>
+              <a:t>05 / 06</a:t>
             </a:r>
           </a:p>
         </p:txBody>
@@ -7269,29 +9561,29 @@
         </p:nvSpPr>
         <p:spPr>
           <a:xfrm>
-            <a:off x="548640" y="502920"/>
-            <a:ext cx="5486400" cy="228600"/>
-          </a:xfrm>
-          <a:prstGeom prst="rect">
-            <a:avLst/>
-          </a:prstGeom>
-          <a:noFill/>
-        </p:spPr>
-        <p:txBody>
-          <a:bodyPr wrap="square" lIns="0" rIns="0" tIns="0" bIns="0" anchor="t">
-            <a:noAutofit/>
-          </a:bodyPr>
-          <a:lstStyle/>
-          <a:p>
-            <a:pPr algn="l"/>
-            <a:r>
-              <a:rPr sz="900" b="0" i="0" spc="120">
-                <a:solidFill>
-                  <a:srgbClr val="5A4A3A"/>
+            <a:off x="457200" y="2240280"/>
+            <a:ext cx="11277295" cy="640080"/>
+          </a:xfrm>
+          <a:prstGeom prst="rect">
+            <a:avLst/>
+          </a:prstGeom>
+          <a:noFill/>
+        </p:spPr>
+        <p:txBody>
+          <a:bodyPr wrap="square" lIns="0" rIns="0" tIns="0" bIns="0" anchor="t">
+            <a:noAutofit/>
+          </a:bodyPr>
+          <a:lstStyle/>
+          <a:p>
+            <a:pPr algn="ctr"/>
+            <a:r>
+              <a:rPr sz="2800" b="0" i="0">
+                <a:solidFill>
+                  <a:srgbClr val="756F6A"/>
                 </a:solidFill>
                 <a:latin typeface="JetBrains Mono Light"/>
               </a:rPr>
-              <a:t>live build / hunarmand.sal.lol</a:t>
+              <a:t>we are not bringing foreign technology to kashmir.</a:t>
             </a:r>
           </a:p>
         </p:txBody>
@@ -7304,253 +9596,43 @@
         </p:nvSpPr>
         <p:spPr>
           <a:xfrm>
-            <a:off x="548640" y="1371600"/>
-            <a:ext cx="3657600" cy="1280160"/>
-          </a:xfrm>
-          <a:prstGeom prst="rect">
-            <a:avLst/>
-          </a:prstGeom>
-          <a:noFill/>
-        </p:spPr>
-        <p:txBody>
-          <a:bodyPr wrap="square" lIns="0" rIns="0" tIns="0" bIns="0" anchor="t">
-            <a:noAutofit/>
-          </a:bodyPr>
-          <a:lstStyle/>
-          <a:p>
-            <a:pPr algn="l"/>
-            <a:r>
-              <a:rPr sz="9600" b="0" i="0">
+            <a:off x="457200" y="2953512"/>
+            <a:ext cx="11277295" cy="640080"/>
+          </a:xfrm>
+          <a:prstGeom prst="rect">
+            <a:avLst/>
+          </a:prstGeom>
+          <a:noFill/>
+        </p:spPr>
+        <p:txBody>
+          <a:bodyPr wrap="square" lIns="0" rIns="0" tIns="0" bIns="0" anchor="t">
+            <a:noAutofit/>
+          </a:bodyPr>
+          <a:lstStyle/>
+          <a:p>
+            <a:pPr algn="ctr"/>
+            <a:r>
+              <a:rPr sz="2800" b="1" i="0">
                 <a:solidFill>
                   <a:srgbClr val="1C1410"/>
                 </a:solidFill>
-                <a:latin typeface="JetBrains Mono Light"/>
-              </a:rPr>
-              <a:t>18</a:t>
-            </a:r>
-          </a:p>
-        </p:txBody>
-      </p:sp>
-      <p:sp>
-        <p:nvSpPr>
-          <p:cNvPr id="5" name="TextBox 4"/>
-          <p:cNvSpPr txBox="1"/>
-          <p:nvPr/>
-        </p:nvSpPr>
-        <p:spPr>
-          <a:xfrm>
-            <a:off x="4297680" y="1874519"/>
-            <a:ext cx="7315200" cy="365760"/>
-          </a:xfrm>
-          <a:prstGeom prst="rect">
-            <a:avLst/>
-          </a:prstGeom>
-          <a:noFill/>
-        </p:spPr>
-        <p:txBody>
-          <a:bodyPr wrap="square" lIns="0" rIns="0" tIns="0" bIns="0" anchor="t">
-            <a:noAutofit/>
-          </a:bodyPr>
-          <a:lstStyle/>
-          <a:p>
-            <a:pPr algn="l"/>
-            <a:r>
-              <a:rPr sz="1100" b="0" i="0" spc="60">
-                <a:solidFill>
-                  <a:srgbClr val="5A4A3A"/>
-                </a:solidFill>
-                <a:latin typeface="JetBrains Mono Light"/>
-              </a:rPr>
-              <a:t>seeded artisan masters, four crafts, six villages</a:t>
-            </a:r>
-          </a:p>
-        </p:txBody>
-      </p:sp>
-      <p:sp>
-        <p:nvSpPr>
-          <p:cNvPr id="6" name="TextBox 5"/>
-          <p:cNvSpPr txBox="1"/>
-          <p:nvPr/>
-        </p:nvSpPr>
-        <p:spPr>
-          <a:xfrm>
-            <a:off x="548640" y="2834640"/>
-            <a:ext cx="3657600" cy="1280160"/>
-          </a:xfrm>
-          <a:prstGeom prst="rect">
-            <a:avLst/>
-          </a:prstGeom>
-          <a:noFill/>
-        </p:spPr>
-        <p:txBody>
-          <a:bodyPr wrap="square" lIns="0" rIns="0" tIns="0" bIns="0" anchor="t">
-            <a:noAutofit/>
-          </a:bodyPr>
-          <a:lstStyle/>
-          <a:p>
-            <a:pPr algn="l"/>
-            <a:r>
-              <a:rPr sz="9600" b="0" i="0">
-                <a:solidFill>
-                  <a:srgbClr val="1C1410"/>
-                </a:solidFill>
-                <a:latin typeface="JetBrains Mono Light"/>
-              </a:rPr>
-              <a:t>54</a:t>
-            </a:r>
-          </a:p>
-        </p:txBody>
-      </p:sp>
-      <p:sp>
-        <p:nvSpPr>
-          <p:cNvPr id="7" name="TextBox 6"/>
-          <p:cNvSpPr txBox="1"/>
-          <p:nvPr/>
-        </p:nvSpPr>
-        <p:spPr>
-          <a:xfrm>
-            <a:off x="4297680" y="3337560"/>
-            <a:ext cx="7315200" cy="365760"/>
-          </a:xfrm>
-          <a:prstGeom prst="rect">
-            <a:avLst/>
-          </a:prstGeom>
-          <a:noFill/>
-        </p:spPr>
-        <p:txBody>
-          <a:bodyPr wrap="square" lIns="0" rIns="0" tIns="0" bIns="0" anchor="t">
-            <a:noAutofit/>
-          </a:bodyPr>
-          <a:lstStyle/>
-          <a:p>
-            <a:pPr algn="l"/>
-            <a:r>
-              <a:rPr sz="1100" b="0" i="0" spc="60">
-                <a:solidFill>
-                  <a:srgbClr val="5A4A3A"/>
-                </a:solidFill>
-                <a:latin typeface="JetBrains Mono Light"/>
-              </a:rPr>
-              <a:t>bookable workshops, four formats, six regions</a:t>
-            </a:r>
-          </a:p>
-        </p:txBody>
-      </p:sp>
-      <p:sp>
-        <p:nvSpPr>
-          <p:cNvPr id="8" name="TextBox 7"/>
-          <p:cNvSpPr txBox="1"/>
-          <p:nvPr/>
-        </p:nvSpPr>
-        <p:spPr>
-          <a:xfrm>
-            <a:off x="548640" y="4297680"/>
-            <a:ext cx="3657600" cy="1280160"/>
-          </a:xfrm>
-          <a:prstGeom prst="rect">
-            <a:avLst/>
-          </a:prstGeom>
-          <a:noFill/>
-        </p:spPr>
-        <p:txBody>
-          <a:bodyPr wrap="square" lIns="0" rIns="0" tIns="0" bIns="0" anchor="t">
-            <a:noAutofit/>
-          </a:bodyPr>
-          <a:lstStyle/>
-          <a:p>
-            <a:pPr algn="l"/>
-            <a:r>
-              <a:rPr sz="9600" b="0" i="0">
-                <a:solidFill>
-                  <a:srgbClr val="1C1410"/>
-                </a:solidFill>
-                <a:latin typeface="JetBrains Mono Light"/>
-              </a:rPr>
-              <a:t>2.8 s</a:t>
-            </a:r>
-          </a:p>
-        </p:txBody>
-      </p:sp>
-      <p:sp>
-        <p:nvSpPr>
-          <p:cNvPr id="9" name="TextBox 8"/>
-          <p:cNvSpPr txBox="1"/>
-          <p:nvPr/>
-        </p:nvSpPr>
-        <p:spPr>
-          <a:xfrm>
-            <a:off x="4297680" y="4800600"/>
-            <a:ext cx="7315200" cy="365760"/>
-          </a:xfrm>
-          <a:prstGeom prst="rect">
-            <a:avLst/>
-          </a:prstGeom>
-          <a:noFill/>
-        </p:spPr>
-        <p:txBody>
-          <a:bodyPr wrap="square" lIns="0" rIns="0" tIns="0" bIns="0" anchor="t">
-            <a:noAutofit/>
-          </a:bodyPr>
-          <a:lstStyle/>
-          <a:p>
-            <a:pPr algn="l"/>
-            <a:r>
-              <a:rPr sz="1100" b="0" i="0" spc="60">
-                <a:solidFill>
-                  <a:srgbClr val="5A4A3A"/>
-                </a:solidFill>
-                <a:latin typeface="JetBrains Mono Light"/>
-              </a:rPr>
-              <a:t>median latency, ed25519 sign and persist, neon to vercel</a:t>
-            </a:r>
-          </a:p>
-        </p:txBody>
-      </p:sp>
-      <p:sp>
-        <p:nvSpPr>
-          <p:cNvPr id="10" name="TextBox 9"/>
-          <p:cNvSpPr txBox="1"/>
-          <p:nvPr/>
-        </p:nvSpPr>
-        <p:spPr>
-          <a:xfrm>
-            <a:off x="548640" y="6080760"/>
-            <a:ext cx="4206240" cy="274320"/>
-          </a:xfrm>
-          <a:prstGeom prst="rect">
-            <a:avLst/>
-          </a:prstGeom>
-          <a:noFill/>
-        </p:spPr>
-        <p:txBody>
-          <a:bodyPr wrap="square" lIns="0" rIns="0" tIns="0" bIns="0" anchor="t">
-            <a:noAutofit/>
-          </a:bodyPr>
-          <a:lstStyle/>
-          <a:p>
-            <a:pPr algn="l"/>
-            <a:r>
-              <a:rPr sz="1100" b="1" i="0">
-                <a:solidFill>
-                  <a:srgbClr val="1C1410"/>
-                </a:solidFill>
                 <a:latin typeface="JetBrains Mono"/>
               </a:rPr>
-              <a:t>nothing on these slides is a mockup.</a:t>
+              <a:t>we are upgrading what kashmir already invented.</a:t>
             </a:r>
           </a:p>
         </p:txBody>
       </p:sp>
       <p:cxnSp>
         <p:nvCxnSpPr>
-          <p:cNvPr id="11" name="Connector 10"/>
+          <p:cNvPr id="5" name="Connector 4"/>
           <p:cNvCxnSpPr/>
           <p:nvPr/>
         </p:nvCxnSpPr>
         <p:spPr>
           <a:xfrm>
-            <a:off x="548640" y="6373368"/>
-            <a:ext cx="1828800" cy="0"/>
+            <a:off x="5455767" y="4050792"/>
+            <a:ext cx="1280160" cy="0"/>
           </a:xfrm>
           <a:prstGeom prst="line">
             <a:avLst/>
@@ -7578,86 +9660,77 @@
       </p:cxnSp>
       <p:sp>
         <p:nvSpPr>
-          <p:cNvPr id="12" name="Oval 11"/>
-          <p:cNvSpPr/>
-          <p:nvPr/>
-        </p:nvSpPr>
-        <p:spPr>
-          <a:xfrm>
-            <a:off x="4978400" y="6130544"/>
-            <a:ext cx="101600" cy="101600"/>
-          </a:xfrm>
-          <a:prstGeom prst="ellipse">
-            <a:avLst/>
-          </a:prstGeom>
-          <a:solidFill>
-            <a:srgbClr val="8B1A1A"/>
-          </a:solidFill>
-          <a:ln>
-            <a:noFill/>
-          </a:ln>
-          <a:effectLst/>
-        </p:spPr>
-        <p:style>
-          <a:lnRef idx="1">
-            <a:schemeClr val="accent1"/>
-          </a:lnRef>
-          <a:fillRef idx="3">
-            <a:schemeClr val="accent1"/>
-          </a:fillRef>
-          <a:effectRef idx="2">
-            <a:schemeClr val="accent1"/>
-          </a:effectRef>
-          <a:fontRef idx="minor">
-            <a:schemeClr val="lt1"/>
-          </a:fontRef>
-        </p:style>
-        <p:txBody>
-          <a:bodyPr rtlCol="0" anchor="ctr"/>
+          <p:cNvPr id="6" name="TextBox 5"/>
+          <p:cNvSpPr txBox="1"/>
+          <p:nvPr/>
+        </p:nvSpPr>
+        <p:spPr>
+          <a:xfrm>
+            <a:off x="0" y="4325112"/>
+            <a:ext cx="12191695" cy="365760"/>
+          </a:xfrm>
+          <a:prstGeom prst="rect">
+            <a:avLst/>
+          </a:prstGeom>
+          <a:noFill/>
+        </p:spPr>
+        <p:txBody>
+          <a:bodyPr wrap="square" lIns="0" rIns="0" tIns="0" bIns="0" anchor="t">
+            <a:noAutofit/>
+          </a:bodyPr>
           <a:lstStyle/>
           <a:p>
             <a:pPr algn="ctr"/>
-          </a:p>
-        </p:txBody>
-      </p:sp>
-      <p:sp>
-        <p:nvSpPr>
-          <p:cNvPr id="13" name="TextBox 12"/>
-          <p:cNvSpPr txBox="1"/>
-          <p:nvPr/>
-        </p:nvSpPr>
-        <p:spPr>
-          <a:xfrm>
-            <a:off x="5212080" y="6080760"/>
-            <a:ext cx="6858000" cy="274320"/>
-          </a:xfrm>
-          <a:prstGeom prst="rect">
-            <a:avLst/>
-          </a:prstGeom>
-          <a:noFill/>
-        </p:spPr>
-        <p:txBody>
-          <a:bodyPr wrap="square" lIns="0" rIns="0" tIns="0" bIns="0" anchor="t">
-            <a:noAutofit/>
-          </a:bodyPr>
-          <a:lstStyle/>
-          <a:p>
-            <a:pPr algn="l"/>
-            <a:r>
-              <a:rPr sz="900" b="0" i="0" spc="60">
+            <a:r>
+              <a:rPr sz="1800" b="1" i="0">
+                <a:solidFill>
+                  <a:srgbClr val="1C1410"/>
+                </a:solidFill>
+                <a:latin typeface="JetBrains Mono"/>
+              </a:rPr>
+              <a:t>hunarmand</a:t>
+            </a:r>
+          </a:p>
+        </p:txBody>
+      </p:sp>
+      <p:sp>
+        <p:nvSpPr>
+          <p:cNvPr id="7" name="TextBox 6"/>
+          <p:cNvSpPr txBox="1"/>
+          <p:nvPr/>
+        </p:nvSpPr>
+        <p:spPr>
+          <a:xfrm>
+            <a:off x="0" y="4764024"/>
+            <a:ext cx="12191695" cy="274320"/>
+          </a:xfrm>
+          <a:prstGeom prst="rect">
+            <a:avLst/>
+          </a:prstGeom>
+          <a:noFill/>
+        </p:spPr>
+        <p:txBody>
+          <a:bodyPr wrap="square" lIns="0" rIns="0" tIns="0" bIns="0" anchor="t">
+            <a:noAutofit/>
+          </a:bodyPr>
+          <a:lstStyle/>
+          <a:p>
+            <a:pPr algn="ctr"/>
+            <a:r>
+              <a:rPr sz="900" b="0" i="0" spc="120">
                 <a:solidFill>
                   <a:srgbClr val="5A4A3A"/>
                 </a:solidFill>
                 <a:latin typeface="JetBrains Mono Light"/>
               </a:rPr>
-              <a:t>every number is queryable from the public api right now</a:t>
-            </a:r>
-          </a:p>
-        </p:txBody>
-      </p:sp>
-      <p:sp>
-        <p:nvSpPr>
-          <p:cNvPr id="14" name="TextBox 13"/>
+              <a:t>tacit knowledge os, srinagar, 2026</a:t>
+            </a:r>
+          </a:p>
+        </p:txBody>
+      </p:sp>
+      <p:sp>
+        <p:nvSpPr>
+          <p:cNvPr id="8" name="TextBox 7"/>
           <p:cNvSpPr txBox="1"/>
           <p:nvPr/>
         </p:nvSpPr>
@@ -7692,7 +9765,7 @@
       </p:sp>
       <p:sp>
         <p:nvSpPr>
-          <p:cNvPr id="15" name="TextBox 14"/>
+          <p:cNvPr id="9" name="TextBox 8"/>
           <p:cNvSpPr txBox="1"/>
           <p:nvPr/>
         </p:nvSpPr>
@@ -7720,314 +9793,7 @@
                 </a:solidFill>
                 <a:latin typeface="JetBrains Mono Light"/>
               </a:rPr>
-              <a:t>06 / 07</a:t>
-            </a:r>
-          </a:p>
-        </p:txBody>
-      </p:sp>
-    </p:spTree>
-  </p:cSld>
-  <p:clrMapOvr>
-    <a:masterClrMapping/>
-  </p:clrMapOvr>
-</p:sld>
-</file>
-
-<file path=ppt/slides/slide7.xml><?xml version="1.0" encoding="utf-8"?>
-<p:sld xmlns:a="http://schemas.openxmlformats.org/drawingml/2006/main" xmlns:p="http://schemas.openxmlformats.org/presentationml/2006/main" xmlns:r="http://schemas.openxmlformats.org/officeDocument/2006/relationships">
-  <p:cSld>
-    <p:spTree>
-      <p:nvGrpSpPr>
-        <p:cNvPr id="1" name=""/>
-        <p:cNvGrpSpPr/>
-        <p:nvPr/>
-      </p:nvGrpSpPr>
-      <p:grpSpPr/>
-      <p:sp>
-        <p:nvSpPr>
-          <p:cNvPr id="2" name="Rectangle 1"/>
-          <p:cNvSpPr/>
-          <p:nvPr/>
-        </p:nvSpPr>
-        <p:spPr>
-          <a:xfrm>
-            <a:off x="0" y="0"/>
-            <a:ext cx="12191695" cy="6858000"/>
-          </a:xfrm>
-          <a:prstGeom prst="rect">
-            <a:avLst/>
-          </a:prstGeom>
-          <a:solidFill>
-            <a:srgbClr val="FAF7F2"/>
-          </a:solidFill>
-          <a:ln>
-            <a:noFill/>
-          </a:ln>
-          <a:effectLst/>
-        </p:spPr>
-        <p:style>
-          <a:lnRef idx="1">
-            <a:schemeClr val="accent1"/>
-          </a:lnRef>
-          <a:fillRef idx="3">
-            <a:schemeClr val="accent1"/>
-          </a:fillRef>
-          <a:effectRef idx="2">
-            <a:schemeClr val="accent1"/>
-          </a:effectRef>
-          <a:fontRef idx="minor">
-            <a:schemeClr val="lt1"/>
-          </a:fontRef>
-        </p:style>
-        <p:txBody>
-          <a:bodyPr rtlCol="0" anchor="ctr"/>
-          <a:lstStyle/>
-          <a:p>
-            <a:pPr algn="ctr"/>
-          </a:p>
-        </p:txBody>
-      </p:sp>
-      <p:sp>
-        <p:nvSpPr>
-          <p:cNvPr id="3" name="TextBox 2"/>
-          <p:cNvSpPr txBox="1"/>
-          <p:nvPr/>
-        </p:nvSpPr>
-        <p:spPr>
-          <a:xfrm>
-            <a:off x="457200" y="2240280"/>
-            <a:ext cx="11277295" cy="640080"/>
-          </a:xfrm>
-          <a:prstGeom prst="rect">
-            <a:avLst/>
-          </a:prstGeom>
-          <a:noFill/>
-        </p:spPr>
-        <p:txBody>
-          <a:bodyPr wrap="square" lIns="0" rIns="0" tIns="0" bIns="0" anchor="t">
-            <a:noAutofit/>
-          </a:bodyPr>
-          <a:lstStyle/>
-          <a:p>
-            <a:pPr algn="ctr"/>
-            <a:r>
-              <a:rPr sz="2800" b="0" i="0">
-                <a:solidFill>
-                  <a:srgbClr val="756F6A"/>
-                </a:solidFill>
-                <a:latin typeface="JetBrains Mono Light"/>
-              </a:rPr>
-              <a:t>we are not bringing foreign technology to kashmir.</a:t>
-            </a:r>
-          </a:p>
-        </p:txBody>
-      </p:sp>
-      <p:sp>
-        <p:nvSpPr>
-          <p:cNvPr id="4" name="TextBox 3"/>
-          <p:cNvSpPr txBox="1"/>
-          <p:nvPr/>
-        </p:nvSpPr>
-        <p:spPr>
-          <a:xfrm>
-            <a:off x="457200" y="2953512"/>
-            <a:ext cx="11277295" cy="640080"/>
-          </a:xfrm>
-          <a:prstGeom prst="rect">
-            <a:avLst/>
-          </a:prstGeom>
-          <a:noFill/>
-        </p:spPr>
-        <p:txBody>
-          <a:bodyPr wrap="square" lIns="0" rIns="0" tIns="0" bIns="0" anchor="t">
-            <a:noAutofit/>
-          </a:bodyPr>
-          <a:lstStyle/>
-          <a:p>
-            <a:pPr algn="ctr"/>
-            <a:r>
-              <a:rPr sz="2800" b="1" i="0">
-                <a:solidFill>
-                  <a:srgbClr val="1C1410"/>
-                </a:solidFill>
-                <a:latin typeface="JetBrains Mono"/>
-              </a:rPr>
-              <a:t>we are upgrading what kashmir already invented.</a:t>
-            </a:r>
-          </a:p>
-        </p:txBody>
-      </p:sp>
-      <p:cxnSp>
-        <p:nvCxnSpPr>
-          <p:cNvPr id="5" name="Connector 4"/>
-          <p:cNvCxnSpPr/>
-          <p:nvPr/>
-        </p:nvCxnSpPr>
-        <p:spPr>
-          <a:xfrm>
-            <a:off x="5455767" y="4050792"/>
-            <a:ext cx="1280160" cy="0"/>
-          </a:xfrm>
-          <a:prstGeom prst="line">
-            <a:avLst/>
-          </a:prstGeom>
-          <a:ln w="11430">
-            <a:solidFill>
-              <a:srgbClr val="8B1A1A"/>
-            </a:solidFill>
-          </a:ln>
-        </p:spPr>
-        <p:style>
-          <a:lnRef idx="2">
-            <a:schemeClr val="accent1"/>
-          </a:lnRef>
-          <a:fillRef idx="0">
-            <a:schemeClr val="accent1"/>
-          </a:fillRef>
-          <a:effectRef idx="1">
-            <a:schemeClr val="accent1"/>
-          </a:effectRef>
-          <a:fontRef idx="minor">
-            <a:schemeClr val="tx1"/>
-          </a:fontRef>
-        </p:style>
-      </p:cxnSp>
-      <p:sp>
-        <p:nvSpPr>
-          <p:cNvPr id="6" name="TextBox 5"/>
-          <p:cNvSpPr txBox="1"/>
-          <p:nvPr/>
-        </p:nvSpPr>
-        <p:spPr>
-          <a:xfrm>
-            <a:off x="0" y="4325112"/>
-            <a:ext cx="12191695" cy="365760"/>
-          </a:xfrm>
-          <a:prstGeom prst="rect">
-            <a:avLst/>
-          </a:prstGeom>
-          <a:noFill/>
-        </p:spPr>
-        <p:txBody>
-          <a:bodyPr wrap="square" lIns="0" rIns="0" tIns="0" bIns="0" anchor="t">
-            <a:noAutofit/>
-          </a:bodyPr>
-          <a:lstStyle/>
-          <a:p>
-            <a:pPr algn="ctr"/>
-            <a:r>
-              <a:rPr sz="1800" b="1" i="0">
-                <a:solidFill>
-                  <a:srgbClr val="1C1410"/>
-                </a:solidFill>
-                <a:latin typeface="JetBrains Mono"/>
-              </a:rPr>
-              <a:t>hunarmand</a:t>
-            </a:r>
-          </a:p>
-        </p:txBody>
-      </p:sp>
-      <p:sp>
-        <p:nvSpPr>
-          <p:cNvPr id="7" name="TextBox 6"/>
-          <p:cNvSpPr txBox="1"/>
-          <p:nvPr/>
-        </p:nvSpPr>
-        <p:spPr>
-          <a:xfrm>
-            <a:off x="0" y="4764024"/>
-            <a:ext cx="12191695" cy="274320"/>
-          </a:xfrm>
-          <a:prstGeom prst="rect">
-            <a:avLst/>
-          </a:prstGeom>
-          <a:noFill/>
-        </p:spPr>
-        <p:txBody>
-          <a:bodyPr wrap="square" lIns="0" rIns="0" tIns="0" bIns="0" anchor="t">
-            <a:noAutofit/>
-          </a:bodyPr>
-          <a:lstStyle/>
-          <a:p>
-            <a:pPr algn="ctr"/>
-            <a:r>
-              <a:rPr sz="900" b="0" i="0" spc="120">
-                <a:solidFill>
-                  <a:srgbClr val="5A4A3A"/>
-                </a:solidFill>
-                <a:latin typeface="JetBrains Mono Light"/>
-              </a:rPr>
-              <a:t>tacit knowledge os, srinagar, 2026</a:t>
-            </a:r>
-          </a:p>
-        </p:txBody>
-      </p:sp>
-      <p:sp>
-        <p:nvSpPr>
-          <p:cNvPr id="8" name="TextBox 7"/>
-          <p:cNvSpPr txBox="1"/>
-          <p:nvPr/>
-        </p:nvSpPr>
-        <p:spPr>
-          <a:xfrm>
-            <a:off x="11094415" y="6355080"/>
-            <a:ext cx="914400" cy="164592"/>
-          </a:xfrm>
-          <a:prstGeom prst="rect">
-            <a:avLst/>
-          </a:prstGeom>
-          <a:noFill/>
-        </p:spPr>
-        <p:txBody>
-          <a:bodyPr wrap="square" lIns="0" rIns="0" tIns="0" bIns="0" anchor="t">
-            <a:noAutofit/>
-          </a:bodyPr>
-          <a:lstStyle/>
-          <a:p>
-            <a:pPr algn="r"/>
-            <a:r>
-              <a:rPr sz="800" b="0" i="0" spc="120">
-                <a:solidFill>
-                  <a:srgbClr val="A19C98"/>
-                </a:solidFill>
-                <a:latin typeface="JetBrains Mono Light"/>
-              </a:rPr>
-              <a:t>hunarmand</a:t>
-            </a:r>
-          </a:p>
-        </p:txBody>
-      </p:sp>
-      <p:sp>
-        <p:nvSpPr>
-          <p:cNvPr id="9" name="TextBox 8"/>
-          <p:cNvSpPr txBox="1"/>
-          <p:nvPr/>
-        </p:nvSpPr>
-        <p:spPr>
-          <a:xfrm>
-            <a:off x="11094415" y="6565392"/>
-            <a:ext cx="914400" cy="164592"/>
-          </a:xfrm>
-          <a:prstGeom prst="rect">
-            <a:avLst/>
-          </a:prstGeom>
-          <a:noFill/>
-        </p:spPr>
-        <p:txBody>
-          <a:bodyPr wrap="square" lIns="0" rIns="0" tIns="0" bIns="0" anchor="t">
-            <a:noAutofit/>
-          </a:bodyPr>
-          <a:lstStyle/>
-          <a:p>
-            <a:pPr algn="r"/>
-            <a:r>
-              <a:rPr sz="800" b="0" i="0" spc="120">
-                <a:solidFill>
-                  <a:srgbClr val="A19C98"/>
-                </a:solidFill>
-                <a:latin typeface="JetBrains Mono Light"/>
-              </a:rPr>
-              <a:t>07 / 07</a:t>
+              <a:t>06 / 06</a:t>
             </a:r>
           </a:p>
         </p:txBody>

--- a/presentation/hunarmand.pptx
+++ b/presentation/hunarmand.pptx
@@ -5213,6 +5213,199 @@
         </p:nvSpPr>
         <p:spPr>
           <a:xfrm>
+            <a:off x="8259775" y="4782312"/>
+            <a:ext cx="3291840" cy="201168"/>
+          </a:xfrm>
+          <a:prstGeom prst="rect">
+            <a:avLst/>
+          </a:prstGeom>
+          <a:noFill/>
+        </p:spPr>
+        <p:txBody>
+          <a:bodyPr wrap="square" lIns="0" rIns="0" tIns="0" bIns="0" anchor="t">
+            <a:noAutofit/>
+          </a:bodyPr>
+          <a:lstStyle/>
+          <a:p>
+            <a:pPr algn="r"/>
+            <a:r>
+              <a:rPr sz="900" b="0" i="0" spc="60">
+                <a:solidFill>
+                  <a:srgbClr val="5A4A3A"/>
+                </a:solidFill>
+                <a:latin typeface="JetBrains Mono Light"/>
+              </a:rPr>
+              <a:t>and the survivors keep this much:</a:t>
+            </a:r>
+          </a:p>
+        </p:txBody>
+      </p:sp>
+      <p:sp>
+        <p:nvSpPr>
+          <p:cNvPr id="30" name="Rectangle 29"/>
+          <p:cNvSpPr/>
+          <p:nvPr/>
+        </p:nvSpPr>
+        <p:spPr>
+          <a:xfrm>
+            <a:off x="8625535" y="5074920"/>
+            <a:ext cx="2106777" cy="146304"/>
+          </a:xfrm>
+          <a:prstGeom prst="rect">
+            <a:avLst/>
+          </a:prstGeom>
+          <a:solidFill>
+            <a:srgbClr val="1C1410"/>
+          </a:solidFill>
+          <a:ln>
+            <a:noFill/>
+          </a:ln>
+          <a:effectLst/>
+        </p:spPr>
+        <p:style>
+          <a:lnRef idx="1">
+            <a:schemeClr val="accent1"/>
+          </a:lnRef>
+          <a:fillRef idx="3">
+            <a:schemeClr val="accent1"/>
+          </a:fillRef>
+          <a:effectRef idx="2">
+            <a:schemeClr val="accent1"/>
+          </a:effectRef>
+          <a:fontRef idx="minor">
+            <a:schemeClr val="lt1"/>
+          </a:fontRef>
+        </p:style>
+        <p:txBody>
+          <a:bodyPr rtlCol="0" anchor="ctr"/>
+          <a:lstStyle/>
+          <a:p>
+            <a:pPr algn="ctr"/>
+          </a:p>
+        </p:txBody>
+      </p:sp>
+      <p:sp>
+        <p:nvSpPr>
+          <p:cNvPr id="31" name="Rectangle 30"/>
+          <p:cNvSpPr/>
+          <p:nvPr/>
+        </p:nvSpPr>
+        <p:spPr>
+          <a:xfrm>
+            <a:off x="10732312" y="5074920"/>
+            <a:ext cx="819302" cy="146304"/>
+          </a:xfrm>
+          <a:prstGeom prst="rect">
+            <a:avLst/>
+          </a:prstGeom>
+          <a:solidFill>
+            <a:srgbClr val="C2BAB2"/>
+          </a:solidFill>
+          <a:ln>
+            <a:noFill/>
+          </a:ln>
+          <a:effectLst/>
+        </p:spPr>
+        <p:style>
+          <a:lnRef idx="1">
+            <a:schemeClr val="accent1"/>
+          </a:lnRef>
+          <a:fillRef idx="3">
+            <a:schemeClr val="accent1"/>
+          </a:fillRef>
+          <a:effectRef idx="2">
+            <a:schemeClr val="accent1"/>
+          </a:effectRef>
+          <a:fontRef idx="minor">
+            <a:schemeClr val="lt1"/>
+          </a:fontRef>
+        </p:style>
+        <p:txBody>
+          <a:bodyPr rtlCol="0" anchor="ctr"/>
+          <a:lstStyle/>
+          <a:p>
+            <a:pPr algn="ctr"/>
+          </a:p>
+        </p:txBody>
+      </p:sp>
+      <p:sp>
+        <p:nvSpPr>
+          <p:cNvPr id="32" name="TextBox 31"/>
+          <p:cNvSpPr txBox="1"/>
+          <p:nvPr/>
+        </p:nvSpPr>
+        <p:spPr>
+          <a:xfrm>
+            <a:off x="8625535" y="5257800"/>
+            <a:ext cx="2106777" cy="182880"/>
+          </a:xfrm>
+          <a:prstGeom prst="rect">
+            <a:avLst/>
+          </a:prstGeom>
+          <a:noFill/>
+        </p:spPr>
+        <p:txBody>
+          <a:bodyPr wrap="square" lIns="0" rIns="0" tIns="0" bIns="0" anchor="t">
+            <a:noAutofit/>
+          </a:bodyPr>
+          <a:lstStyle/>
+          <a:p>
+            <a:pPr algn="l"/>
+            <a:r>
+              <a:rPr sz="800" b="0" i="0" spc="60">
+                <a:solidFill>
+                  <a:srgbClr val="5A4A3A"/>
+                </a:solidFill>
+                <a:latin typeface="JetBrains Mono Light"/>
+              </a:rPr>
+              <a:t>middleman  ·  70</a:t>
+            </a:r>
+          </a:p>
+        </p:txBody>
+      </p:sp>
+      <p:sp>
+        <p:nvSpPr>
+          <p:cNvPr id="33" name="TextBox 32"/>
+          <p:cNvSpPr txBox="1"/>
+          <p:nvPr/>
+        </p:nvSpPr>
+        <p:spPr>
+          <a:xfrm>
+            <a:off x="10778032" y="5257800"/>
+            <a:ext cx="1185062" cy="182880"/>
+          </a:xfrm>
+          <a:prstGeom prst="rect">
+            <a:avLst/>
+          </a:prstGeom>
+          <a:noFill/>
+        </p:spPr>
+        <p:txBody>
+          <a:bodyPr wrap="square" lIns="0" rIns="0" tIns="0" bIns="0" anchor="t">
+            <a:noAutofit/>
+          </a:bodyPr>
+          <a:lstStyle/>
+          <a:p>
+            <a:pPr algn="r"/>
+            <a:r>
+              <a:rPr sz="800" b="1" i="0" spc="60">
+                <a:solidFill>
+                  <a:srgbClr val="1C1410"/>
+                </a:solidFill>
+                <a:latin typeface="JetBrains Mono"/>
+              </a:rPr>
+              <a:t>master  ·  30</a:t>
+            </a:r>
+          </a:p>
+        </p:txBody>
+      </p:sp>
+      <p:sp>
+        <p:nvSpPr>
+          <p:cNvPr id="34" name="TextBox 33"/>
+          <p:cNvSpPr txBox="1"/>
+          <p:nvPr/>
+        </p:nvSpPr>
+        <p:spPr>
+          <a:xfrm>
             <a:off x="11094415" y="6355080"/>
             <a:ext cx="914400" cy="164592"/>
           </a:xfrm>
@@ -5242,7 +5435,7 @@
       </p:sp>
       <p:sp>
         <p:nvSpPr>
-          <p:cNvPr id="30" name="TextBox 29"/>
+          <p:cNvPr id="35" name="TextBox 34"/>
           <p:cNvSpPr txBox="1"/>
           <p:nvPr/>
         </p:nvSpPr>
@@ -6658,7 +6851,7 @@
                 </a:solidFill>
                 <a:latin typeface="JetBrains Mono Light"/>
               </a:rPr>
-              <a:t>methodology / how tacit knowledge becomes infrastructure</a:t>
+              <a:t>what we offer / four layers, one tacit knowledge spine</a:t>
             </a:r>
           </a:p>
         </p:txBody>
@@ -7162,7 +7355,7 @@
         <p:spPr>
           <a:xfrm>
             <a:off x="548640" y="4526280"/>
-            <a:ext cx="4206240" cy="914400"/>
+            <a:ext cx="4389120" cy="914400"/>
           </a:xfrm>
           <a:prstGeom prst="rect">
             <a:avLst/>
@@ -7187,7 +7380,7 @@
                 </a:solidFill>
                 <a:latin typeface="JetBrains Mono"/>
               </a:rPr>
-              <a:t>twelve hours of speech.</a:t>
+              <a:t>one tacit knowledge spine.</a:t>
             </a:r>
           </a:p>
           <a:p>
@@ -7203,7 +7396,7 @@
                 </a:solidFill>
                 <a:latin typeface="JetBrains Mono"/>
               </a:rPr>
-              <a:t>four hundred fields.</a:t>
+              <a:t>four ways for the master</a:t>
             </a:r>
           </a:p>
           <a:p>
@@ -7219,7 +7412,7 @@
                 </a:solidFill>
                 <a:latin typeface="JetBrains Mono"/>
               </a:rPr>
-              <a:t>one signed artefact.</a:t>
+              <a:t>to make a living from it.</a:t>
             </a:r>
           </a:p>
         </p:txBody>
@@ -7233,7 +7426,7 @@
         <p:spPr>
           <a:xfrm>
             <a:off x="548640" y="5486400"/>
-            <a:ext cx="4572000" cy="914400"/>
+            <a:ext cx="4754880" cy="914400"/>
           </a:xfrm>
           <a:prstGeom prst="rect">
             <a:avLst/>
@@ -7258,7 +7451,7 @@
                 </a:solidFill>
                 <a:latin typeface="JetBrains Mono Light"/>
               </a:rPr>
-              <a:t>the master's tacit knowledge,</a:t>
+              <a:t>what kashmir invented in the loom</a:t>
             </a:r>
           </a:p>
           <a:p>
@@ -7274,7 +7467,7 @@
                 </a:solidFill>
                 <a:latin typeface="JetBrains Mono Light"/>
               </a:rPr>
-              <a:t>structured under their own keypair,</a:t>
+              <a:t>we gave a database, a key, a marketplace,</a:t>
             </a:r>
           </a:p>
           <a:p>
@@ -7290,7 +7483,7 @@
                 </a:solidFill>
                 <a:latin typeface="JetBrains Mono Light"/>
               </a:rPr>
-              <a:t>owned by the master in perpetuity.</a:t>
+              <a:t>and a calendar.</a:t>
             </a:r>
           </a:p>
         </p:txBody>
@@ -7303,7 +7496,7 @@
         </p:nvSpPr>
         <p:spPr>
           <a:xfrm>
-            <a:off x="5852160" y="960120"/>
+            <a:off x="5669280" y="960120"/>
             <a:ext cx="822960" cy="640080"/>
           </a:xfrm>
           <a:prstGeom prst="rect">
@@ -7338,8 +7531,8 @@
         </p:nvCxnSpPr>
         <p:spPr>
           <a:xfrm>
-            <a:off x="6766560" y="1051560"/>
-            <a:ext cx="4876495" cy="0"/>
+            <a:off x="6583680" y="1033272"/>
+            <a:ext cx="5059375" cy="0"/>
           </a:xfrm>
           <a:prstGeom prst="line">
             <a:avLst/>
@@ -7373,7 +7566,7 @@
         </p:nvSpPr>
         <p:spPr>
           <a:xfrm>
-            <a:off x="6812280" y="1124712"/>
+            <a:off x="6629400" y="1124712"/>
             <a:ext cx="1828800" cy="292608"/>
           </a:xfrm>
           <a:prstGeom prst="rect">
@@ -7389,13 +7582,13 @@
           <a:p>
             <a:pPr algn="l"/>
             <a:r>
-              <a:rPr sz="1400" b="1" i="0">
+              <a:rPr sz="1500" b="1" i="0">
                 <a:solidFill>
                   <a:srgbClr val="1C1410"/>
                 </a:solidFill>
                 <a:latin typeface="JetBrains Mono"/>
               </a:rPr>
-              <a:t>session</a:t>
+              <a:t>vault</a:t>
             </a:r>
           </a:p>
         </p:txBody>
@@ -7408,8 +7601,8 @@
         </p:nvSpPr>
         <p:spPr>
           <a:xfrm>
-            <a:off x="6812280" y="1380744"/>
-            <a:ext cx="4876495" cy="292608"/>
+            <a:off x="6629400" y="1417320"/>
+            <a:ext cx="5013655" cy="292608"/>
           </a:xfrm>
           <a:prstGeom prst="rect">
             <a:avLst/>
@@ -7430,7 +7623,7 @@
                 </a:solidFill>
                 <a:latin typeface="JetBrains Mono Light"/>
               </a:rPr>
-              <a:t>master in own workshop, interview led in koshur</a:t>
+              <a:t>ai-led capture  ·  craft dna  ·  transcript replay</a:t>
             </a:r>
           </a:p>
         </p:txBody>
@@ -7443,8 +7636,8 @@
         </p:nvSpPr>
         <p:spPr>
           <a:xfrm>
-            <a:off x="5852160" y="1828800"/>
-            <a:ext cx="822960" cy="640080"/>
+            <a:off x="6629400" y="1737360"/>
+            <a:ext cx="5013655" cy="256032"/>
           </a:xfrm>
           <a:prstGeom prst="rect">
             <a:avLst/>
@@ -7459,6 +7652,41 @@
           <a:p>
             <a:pPr algn="l"/>
             <a:r>
+              <a:rPr sz="900" b="0" i="0" spc="120">
+                <a:solidFill>
+                  <a:srgbClr val="756F6A"/>
+                </a:solidFill>
+                <a:latin typeface="JetBrains Mono Light"/>
+              </a:rPr>
+              <a:t>for the artisan</a:t>
+            </a:r>
+          </a:p>
+        </p:txBody>
+      </p:sp>
+      <p:sp>
+        <p:nvSpPr>
+          <p:cNvPr id="25" name="TextBox 24"/>
+          <p:cNvSpPr txBox="1"/>
+          <p:nvPr/>
+        </p:nvSpPr>
+        <p:spPr>
+          <a:xfrm>
+            <a:off x="5669280" y="2258568"/>
+            <a:ext cx="822960" cy="640080"/>
+          </a:xfrm>
+          <a:prstGeom prst="rect">
+            <a:avLst/>
+          </a:prstGeom>
+          <a:noFill/>
+        </p:spPr>
+        <p:txBody>
+          <a:bodyPr wrap="square" lIns="0" rIns="0" tIns="0" bIns="0" anchor="t">
+            <a:noAutofit/>
+          </a:bodyPr>
+          <a:lstStyle/>
+          <a:p>
+            <a:pPr algn="l"/>
+            <a:r>
               <a:rPr sz="3600" b="0" i="0">
                 <a:solidFill>
                   <a:srgbClr val="9A8F84"/>
@@ -7472,14 +7700,14 @@
       </p:sp>
       <p:cxnSp>
         <p:nvCxnSpPr>
-          <p:cNvPr id="25" name="Connector 24"/>
+          <p:cNvPr id="26" name="Connector 25"/>
           <p:cNvCxnSpPr/>
           <p:nvPr/>
         </p:nvCxnSpPr>
         <p:spPr>
           <a:xfrm>
-            <a:off x="6766560" y="1920240"/>
-            <a:ext cx="4876495" cy="0"/>
+            <a:off x="6583680" y="2331720"/>
+            <a:ext cx="5059375" cy="0"/>
           </a:xfrm>
           <a:prstGeom prst="line">
             <a:avLst/>
@@ -7507,13 +7735,13 @@
       </p:cxnSp>
       <p:sp>
         <p:nvSpPr>
-          <p:cNvPr id="26" name="TextBox 25"/>
+          <p:cNvPr id="27" name="TextBox 26"/>
           <p:cNvSpPr txBox="1"/>
           <p:nvPr/>
         </p:nvSpPr>
         <p:spPr>
           <a:xfrm>
-            <a:off x="6812280" y="1993392"/>
+            <a:off x="6629400" y="2423160"/>
             <a:ext cx="1828800" cy="292608"/>
           </a:xfrm>
           <a:prstGeom prst="rect">
@@ -7529,27 +7757,27 @@
           <a:p>
             <a:pPr algn="l"/>
             <a:r>
-              <a:rPr sz="1400" b="1" i="0">
-                <a:solidFill>
-                  <a:srgbClr val="1C1410"/>
+              <a:rPr sz="1500" b="1" i="0">
+                <a:solidFill>
+                  <a:srgbClr val="8B1A1A"/>
                 </a:solidFill>
                 <a:latin typeface="JetBrains Mono"/>
               </a:rPr>
-              <a:t>transcribe</a:t>
-            </a:r>
-          </a:p>
-        </p:txBody>
-      </p:sp>
-      <p:sp>
-        <p:nvSpPr>
-          <p:cNvPr id="27" name="TextBox 26"/>
+              <a:t>sanad</a:t>
+            </a:r>
+          </a:p>
+        </p:txBody>
+      </p:sp>
+      <p:sp>
+        <p:nvSpPr>
+          <p:cNvPr id="28" name="TextBox 27"/>
           <p:cNvSpPr txBox="1"/>
           <p:nvPr/>
         </p:nvSpPr>
         <p:spPr>
           <a:xfrm>
-            <a:off x="6812280" y="2249424"/>
-            <a:ext cx="4876495" cy="292608"/>
+            <a:off x="6629400" y="2715768"/>
+            <a:ext cx="5013655" cy="292608"/>
           </a:xfrm>
           <a:prstGeom prst="rect">
             <a:avLst/>
@@ -7570,21 +7798,21 @@
                 </a:solidFill>
                 <a:latin typeface="JetBrains Mono Light"/>
               </a:rPr>
-              <a:t>bhashini  &gt;  ai4bharat  &gt;  groq  &gt;  whisper, ladder</a:t>
-            </a:r>
-          </a:p>
-        </p:txBody>
-      </p:sp>
-      <p:sp>
-        <p:nvSpPr>
-          <p:cNvPr id="28" name="TextBox 27"/>
+              <a:t>ed25519 provenance  ·  scan-to-verify qr  ·  public registry</a:t>
+            </a:r>
+          </a:p>
+        </p:txBody>
+      </p:sp>
+      <p:sp>
+        <p:nvSpPr>
+          <p:cNvPr id="29" name="TextBox 28"/>
           <p:cNvSpPr txBox="1"/>
           <p:nvPr/>
         </p:nvSpPr>
         <p:spPr>
           <a:xfrm>
-            <a:off x="5852160" y="2697480"/>
-            <a:ext cx="822960" cy="640080"/>
+            <a:off x="6629400" y="3035808"/>
+            <a:ext cx="5013655" cy="256032"/>
           </a:xfrm>
           <a:prstGeom prst="rect">
             <a:avLst/>
@@ -7599,6 +7827,41 @@
           <a:p>
             <a:pPr algn="l"/>
             <a:r>
+              <a:rPr sz="900" b="0" i="0" spc="120">
+                <a:solidFill>
+                  <a:srgbClr val="756F6A"/>
+                </a:solidFill>
+                <a:latin typeface="JetBrains Mono Light"/>
+              </a:rPr>
+              <a:t>for the buyer</a:t>
+            </a:r>
+          </a:p>
+        </p:txBody>
+      </p:sp>
+      <p:sp>
+        <p:nvSpPr>
+          <p:cNvPr id="30" name="TextBox 29"/>
+          <p:cNvSpPr txBox="1"/>
+          <p:nvPr/>
+        </p:nvSpPr>
+        <p:spPr>
+          <a:xfrm>
+            <a:off x="5669280" y="3557015"/>
+            <a:ext cx="822960" cy="640080"/>
+          </a:xfrm>
+          <a:prstGeom prst="rect">
+            <a:avLst/>
+          </a:prstGeom>
+          <a:noFill/>
+        </p:spPr>
+        <p:txBody>
+          <a:bodyPr wrap="square" lIns="0" rIns="0" tIns="0" bIns="0" anchor="t">
+            <a:noAutofit/>
+          </a:bodyPr>
+          <a:lstStyle/>
+          <a:p>
+            <a:pPr algn="l"/>
+            <a:r>
               <a:rPr sz="3600" b="0" i="0">
                 <a:solidFill>
                   <a:srgbClr val="9A8F84"/>
@@ -7612,14 +7875,14 @@
       </p:sp>
       <p:cxnSp>
         <p:nvCxnSpPr>
-          <p:cNvPr id="29" name="Connector 28"/>
+          <p:cNvPr id="31" name="Connector 30"/>
           <p:cNvCxnSpPr/>
           <p:nvPr/>
         </p:nvCxnSpPr>
         <p:spPr>
           <a:xfrm>
-            <a:off x="6766560" y="2788920"/>
-            <a:ext cx="4876495" cy="0"/>
+            <a:off x="6583680" y="3630168"/>
+            <a:ext cx="5059375" cy="0"/>
           </a:xfrm>
           <a:prstGeom prst="line">
             <a:avLst/>
@@ -7647,13 +7910,13 @@
       </p:cxnSp>
       <p:sp>
         <p:nvSpPr>
-          <p:cNvPr id="30" name="TextBox 29"/>
+          <p:cNvPr id="32" name="TextBox 31"/>
           <p:cNvSpPr txBox="1"/>
           <p:nvPr/>
         </p:nvSpPr>
         <p:spPr>
           <a:xfrm>
-            <a:off x="6812280" y="2862072"/>
+            <a:off x="6629400" y="3721607"/>
             <a:ext cx="1828800" cy="292608"/>
           </a:xfrm>
           <a:prstGeom prst="rect">
@@ -7669,27 +7932,27 @@
           <a:p>
             <a:pPr algn="l"/>
             <a:r>
-              <a:rPr sz="1400" b="1" i="0">
+              <a:rPr sz="1500" b="1" i="0">
                 <a:solidFill>
                   <a:srgbClr val="1C1410"/>
                 </a:solidFill>
                 <a:latin typeface="JetBrains Mono"/>
               </a:rPr>
-              <a:t>extract</a:t>
-            </a:r>
-          </a:p>
-        </p:txBody>
-      </p:sp>
-      <p:sp>
-        <p:nvSpPr>
-          <p:cNvPr id="31" name="TextBox 30"/>
+              <a:t>ustaad</a:t>
+            </a:r>
+          </a:p>
+        </p:txBody>
+      </p:sp>
+      <p:sp>
+        <p:nvSpPr>
+          <p:cNvPr id="33" name="TextBox 32"/>
           <p:cNvSpPr txBox="1"/>
           <p:nvPr/>
         </p:nvSpPr>
         <p:spPr>
           <a:xfrm>
-            <a:off x="6812280" y="3118104"/>
-            <a:ext cx="4876495" cy="292608"/>
+            <a:off x="6629400" y="4014215"/>
+            <a:ext cx="5013655" cy="292608"/>
           </a:xfrm>
           <a:prstGeom prst="rect">
             <a:avLst/>
@@ -7710,21 +7973,21 @@
                 </a:solidFill>
                 <a:latin typeface="JetBrains Mono Light"/>
               </a:rPr>
-              <a:t>multi-pass llm, strict json schema, repair loop</a:t>
-            </a:r>
-          </a:p>
-        </p:txBody>
-      </p:sp>
-      <p:sp>
-        <p:nvSpPr>
-          <p:cNvPr id="32" name="TextBox 31"/>
+              <a:t>workshop calendar  ·  otp booking  ·  seasonal availability</a:t>
+            </a:r>
+          </a:p>
+        </p:txBody>
+      </p:sp>
+      <p:sp>
+        <p:nvSpPr>
+          <p:cNvPr id="34" name="TextBox 33"/>
           <p:cNvSpPr txBox="1"/>
           <p:nvPr/>
         </p:nvSpPr>
         <p:spPr>
           <a:xfrm>
-            <a:off x="5852160" y="3566159"/>
-            <a:ext cx="822960" cy="640080"/>
+            <a:off x="6629400" y="4334255"/>
+            <a:ext cx="5013655" cy="256032"/>
           </a:xfrm>
           <a:prstGeom prst="rect">
             <a:avLst/>
@@ -7739,6 +8002,41 @@
           <a:p>
             <a:pPr algn="l"/>
             <a:r>
+              <a:rPr sz="900" b="0" i="0" spc="120">
+                <a:solidFill>
+                  <a:srgbClr val="756F6A"/>
+                </a:solidFill>
+                <a:latin typeface="JetBrains Mono Light"/>
+              </a:rPr>
+              <a:t>for the learner</a:t>
+            </a:r>
+          </a:p>
+        </p:txBody>
+      </p:sp>
+      <p:sp>
+        <p:nvSpPr>
+          <p:cNvPr id="35" name="TextBox 34"/>
+          <p:cNvSpPr txBox="1"/>
+          <p:nvPr/>
+        </p:nvSpPr>
+        <p:spPr>
+          <a:xfrm>
+            <a:off x="5669280" y="4855464"/>
+            <a:ext cx="822960" cy="640080"/>
+          </a:xfrm>
+          <a:prstGeom prst="rect">
+            <a:avLst/>
+          </a:prstGeom>
+          <a:noFill/>
+        </p:spPr>
+        <p:txBody>
+          <a:bodyPr wrap="square" lIns="0" rIns="0" tIns="0" bIns="0" anchor="t">
+            <a:noAutofit/>
+          </a:bodyPr>
+          <a:lstStyle/>
+          <a:p>
+            <a:pPr algn="l"/>
+            <a:r>
               <a:rPr sz="3600" b="0" i="0">
                 <a:solidFill>
                   <a:srgbClr val="9A8F84"/>
@@ -7752,14 +8050,14 @@
       </p:sp>
       <p:cxnSp>
         <p:nvCxnSpPr>
-          <p:cNvPr id="33" name="Connector 32"/>
+          <p:cNvPr id="36" name="Connector 35"/>
           <p:cNvCxnSpPr/>
           <p:nvPr/>
         </p:nvCxnSpPr>
         <p:spPr>
           <a:xfrm>
-            <a:off x="6766560" y="3657599"/>
-            <a:ext cx="4876495" cy="0"/>
+            <a:off x="6583680" y="4928616"/>
+            <a:ext cx="5059375" cy="0"/>
           </a:xfrm>
           <a:prstGeom prst="line">
             <a:avLst/>
@@ -7787,13 +8085,13 @@
       </p:cxnSp>
       <p:sp>
         <p:nvSpPr>
-          <p:cNvPr id="34" name="TextBox 33"/>
+          <p:cNvPr id="37" name="TextBox 36"/>
           <p:cNvSpPr txBox="1"/>
           <p:nvPr/>
         </p:nvSpPr>
         <p:spPr>
           <a:xfrm>
-            <a:off x="6812280" y="3730751"/>
+            <a:off x="6629400" y="5020055"/>
             <a:ext cx="1828800" cy="292608"/>
           </a:xfrm>
           <a:prstGeom prst="rect">
@@ -7809,27 +8107,27 @@
           <a:p>
             <a:pPr algn="l"/>
             <a:r>
-              <a:rPr sz="1400" b="1" i="0">
+              <a:rPr sz="1500" b="1" i="0">
                 <a:solidFill>
                   <a:srgbClr val="1C1410"/>
                 </a:solidFill>
                 <a:latin typeface="JetBrains Mono"/>
               </a:rPr>
-              <a:t>sign</a:t>
-            </a:r>
-          </a:p>
-        </p:txBody>
-      </p:sp>
-      <p:sp>
-        <p:nvSpPr>
-          <p:cNvPr id="35" name="TextBox 34"/>
+              <a:t>bazaar</a:t>
+            </a:r>
+          </a:p>
+        </p:txBody>
+      </p:sp>
+      <p:sp>
+        <p:nvSpPr>
+          <p:cNvPr id="38" name="TextBox 37"/>
           <p:cNvSpPr txBox="1"/>
           <p:nvPr/>
         </p:nvSpPr>
         <p:spPr>
           <a:xfrm>
-            <a:off x="6812280" y="3986783"/>
-            <a:ext cx="4876495" cy="292608"/>
+            <a:off x="6629400" y="5312664"/>
+            <a:ext cx="5013655" cy="292608"/>
           </a:xfrm>
           <a:prstGeom prst="rect">
             <a:avLst/>
@@ -7850,21 +8148,21 @@
                 </a:solidFill>
                 <a:latin typeface="JetBrains Mono Light"/>
               </a:rPr>
-              <a:t>ed25519 over rfc 8785 jcs, one keypair per master</a:t>
-            </a:r>
-          </a:p>
-        </p:txBody>
-      </p:sp>
-      <p:sp>
-        <p:nvSpPr>
-          <p:cNvPr id="36" name="TextBox 35"/>
+              <a:t>curated bundles  ·  checkout  ·  order tracking</a:t>
+            </a:r>
+          </a:p>
+        </p:txBody>
+      </p:sp>
+      <p:sp>
+        <p:nvSpPr>
+          <p:cNvPr id="39" name="TextBox 38"/>
           <p:cNvSpPr txBox="1"/>
           <p:nvPr/>
         </p:nvSpPr>
         <p:spPr>
           <a:xfrm>
-            <a:off x="5852160" y="4434840"/>
-            <a:ext cx="822960" cy="640080"/>
+            <a:off x="6629400" y="5632703"/>
+            <a:ext cx="5013655" cy="256032"/>
           </a:xfrm>
           <a:prstGeom prst="rect">
             <a:avLst/>
@@ -7879,118 +8177,13 @@
           <a:p>
             <a:pPr algn="l"/>
             <a:r>
-              <a:rPr sz="3600" b="0" i="0">
-                <a:solidFill>
-                  <a:srgbClr val="9A8F84"/>
+              <a:rPr sz="900" b="0" i="0" spc="120">
+                <a:solidFill>
+                  <a:srgbClr val="756F6A"/>
                 </a:solidFill>
                 <a:latin typeface="JetBrains Mono Light"/>
               </a:rPr>
-              <a:t>05</a:t>
-            </a:r>
-          </a:p>
-        </p:txBody>
-      </p:sp>
-      <p:cxnSp>
-        <p:nvCxnSpPr>
-          <p:cNvPr id="37" name="Connector 36"/>
-          <p:cNvCxnSpPr/>
-          <p:nvPr/>
-        </p:nvCxnSpPr>
-        <p:spPr>
-          <a:xfrm>
-            <a:off x="6766560" y="4526279"/>
-            <a:ext cx="4876495" cy="0"/>
-          </a:xfrm>
-          <a:prstGeom prst="line">
-            <a:avLst/>
-          </a:prstGeom>
-          <a:ln w="6350">
-            <a:solidFill>
-              <a:srgbClr val="D4C8B8"/>
-            </a:solidFill>
-          </a:ln>
-        </p:spPr>
-        <p:style>
-          <a:lnRef idx="2">
-            <a:schemeClr val="accent1"/>
-          </a:lnRef>
-          <a:fillRef idx="0">
-            <a:schemeClr val="accent1"/>
-          </a:fillRef>
-          <a:effectRef idx="1">
-            <a:schemeClr val="accent1"/>
-          </a:effectRef>
-          <a:fontRef idx="minor">
-            <a:schemeClr val="tx1"/>
-          </a:fontRef>
-        </p:style>
-      </p:cxnSp>
-      <p:sp>
-        <p:nvSpPr>
-          <p:cNvPr id="38" name="TextBox 37"/>
-          <p:cNvSpPr txBox="1"/>
-          <p:nvPr/>
-        </p:nvSpPr>
-        <p:spPr>
-          <a:xfrm>
-            <a:off x="6812280" y="4599431"/>
-            <a:ext cx="1828800" cy="292608"/>
-          </a:xfrm>
-          <a:prstGeom prst="rect">
-            <a:avLst/>
-          </a:prstGeom>
-          <a:noFill/>
-        </p:spPr>
-        <p:txBody>
-          <a:bodyPr wrap="square" lIns="0" rIns="0" tIns="0" bIns="0" anchor="t">
-            <a:noAutofit/>
-          </a:bodyPr>
-          <a:lstStyle/>
-          <a:p>
-            <a:pPr algn="l"/>
-            <a:r>
-              <a:rPr sz="1400" b="1" i="0">
-                <a:solidFill>
-                  <a:srgbClr val="1C1410"/>
-                </a:solidFill>
-                <a:latin typeface="JetBrains Mono"/>
-              </a:rPr>
-              <a:t>index</a:t>
-            </a:r>
-          </a:p>
-        </p:txBody>
-      </p:sp>
-      <p:sp>
-        <p:nvSpPr>
-          <p:cNvPr id="39" name="TextBox 38"/>
-          <p:cNvSpPr txBox="1"/>
-          <p:nvPr/>
-        </p:nvSpPr>
-        <p:spPr>
-          <a:xfrm>
-            <a:off x="6812280" y="4855464"/>
-            <a:ext cx="4876495" cy="292608"/>
-          </a:xfrm>
-          <a:prstGeom prst="rect">
-            <a:avLst/>
-          </a:prstGeom>
-          <a:noFill/>
-        </p:spPr>
-        <p:txBody>
-          <a:bodyPr wrap="square" lIns="0" rIns="0" tIns="0" bIns="0" anchor="t">
-            <a:noAutofit/>
-          </a:bodyPr>
-          <a:lstStyle/>
-          <a:p>
-            <a:pPr algn="l"/>
-            <a:r>
-              <a:rPr sz="1000" b="0" i="0" spc="60">
-                <a:solidFill>
-                  <a:srgbClr val="5A4A3A"/>
-                </a:solidFill>
-                <a:latin typeface="JetBrains Mono Light"/>
-              </a:rPr>
-              <a:t>pgvector embeddings, public api in under a second</a:t>
+              <a:t>for the collector</a:t>
             </a:r>
           </a:p>
         </p:txBody>
@@ -8157,7 +8350,7 @@
                 </a:solidFill>
                 <a:latin typeface="JetBrains Mono Light"/>
               </a:rPr>
-              <a:t>technology / deployed today, free tier, queryable now</a:t>
+              <a:t>technology / what carries the work</a:t>
             </a:r>
           </a:p>
         </p:txBody>
@@ -8171,7 +8364,7 @@
         <p:spPr>
           <a:xfrm>
             <a:off x="548640" y="1005840"/>
-            <a:ext cx="1463040" cy="292608"/>
+            <a:ext cx="1554480" cy="292608"/>
           </a:xfrm>
           <a:prstGeom prst="rect">
             <a:avLst/>
@@ -8186,13 +8379,13 @@
           <a:p>
             <a:pPr algn="l"/>
             <a:r>
-              <a:rPr sz="1100" b="1" i="0" spc="60">
+              <a:rPr sz="1200" b="1" i="0" spc="60">
                 <a:solidFill>
                   <a:srgbClr val="1C1410"/>
                 </a:solidFill>
                 <a:latin typeface="JetBrains Mono"/>
               </a:rPr>
-              <a:t>frontend</a:t>
+              <a:t>asr</a:t>
             </a:r>
           </a:p>
         </p:txBody>
@@ -8205,7 +8398,7 @@
         </p:nvSpPr>
         <p:spPr>
           <a:xfrm>
-            <a:off x="2057400" y="1005840"/>
+            <a:off x="2148840" y="1005840"/>
             <a:ext cx="182880" cy="292608"/>
           </a:xfrm>
           <a:prstGeom prst="rect">
@@ -8221,7 +8414,7 @@
           <a:p>
             <a:pPr algn="l"/>
             <a:r>
-              <a:rPr sz="1100" b="0" i="0">
+              <a:rPr sz="1200" b="0" i="0">
                 <a:solidFill>
                   <a:srgbClr val="A19C98"/>
                 </a:solidFill>
@@ -8240,8 +8433,8 @@
         </p:nvSpPr>
         <p:spPr>
           <a:xfrm>
-            <a:off x="2331720" y="1005840"/>
-            <a:ext cx="6858000" cy="292608"/>
+            <a:off x="2423160" y="1005840"/>
+            <a:ext cx="6400800" cy="292608"/>
           </a:xfrm>
           <a:prstGeom prst="rect">
             <a:avLst/>
@@ -8262,7 +8455,7 @@
                 </a:solidFill>
                 <a:latin typeface="JetBrains Mono Light"/>
               </a:rPr>
-              <a:t>next.js 16  ·  vercel  ·  hunarmand.sal.lol</a:t>
+              <a:t>bhashini  &gt;  ai4bharat  &gt;  groq  &gt;  whisper, with auto-fallback</a:t>
             </a:r>
           </a:p>
         </p:txBody>
@@ -8275,8 +8468,8 @@
         </p:nvSpPr>
         <p:spPr>
           <a:xfrm>
-            <a:off x="548640" y="1389888"/>
-            <a:ext cx="1463040" cy="292608"/>
+            <a:off x="548640" y="1463040"/>
+            <a:ext cx="1554480" cy="292608"/>
           </a:xfrm>
           <a:prstGeom prst="rect">
             <a:avLst/>
@@ -8291,13 +8484,13 @@
           <a:p>
             <a:pPr algn="l"/>
             <a:r>
-              <a:rPr sz="1100" b="1" i="0" spc="60">
+              <a:rPr sz="1200" b="1" i="0" spc="60">
                 <a:solidFill>
                   <a:srgbClr val="1C1410"/>
                 </a:solidFill>
                 <a:latin typeface="JetBrains Mono"/>
               </a:rPr>
-              <a:t>backend</a:t>
+              <a:t>llm</a:t>
             </a:r>
           </a:p>
         </p:txBody>
@@ -8310,7 +8503,7 @@
         </p:nvSpPr>
         <p:spPr>
           <a:xfrm>
-            <a:off x="2057400" y="1389888"/>
+            <a:off x="2148840" y="1463040"/>
             <a:ext cx="182880" cy="292608"/>
           </a:xfrm>
           <a:prstGeom prst="rect">
@@ -8326,7 +8519,7 @@
           <a:p>
             <a:pPr algn="l"/>
             <a:r>
-              <a:rPr sz="1100" b="0" i="0">
+              <a:rPr sz="1200" b="0" i="0">
                 <a:solidFill>
                   <a:srgbClr val="A19C98"/>
                 </a:solidFill>
@@ -8345,8 +8538,8 @@
         </p:nvSpPr>
         <p:spPr>
           <a:xfrm>
-            <a:off x="2331720" y="1389888"/>
-            <a:ext cx="6858000" cy="292608"/>
+            <a:off x="2423160" y="1463040"/>
+            <a:ext cx="6400800" cy="292608"/>
           </a:xfrm>
           <a:prstGeom prst="rect">
             <a:avLst/>
@@ -8367,7 +8560,7 @@
                 </a:solidFill>
                 <a:latin typeface="JetBrains Mono Light"/>
               </a:rPr>
-              <a:t>fastapi  ·  render  ·  alembic on every deploy</a:t>
+              <a:t>openrouter aggregation, provider-agnostic structured output</a:t>
             </a:r>
           </a:p>
         </p:txBody>
@@ -8380,8 +8573,8 @@
         </p:nvSpPr>
         <p:spPr>
           <a:xfrm>
-            <a:off x="548640" y="1773936"/>
-            <a:ext cx="1463040" cy="292608"/>
+            <a:off x="548640" y="1920240"/>
+            <a:ext cx="1554480" cy="292608"/>
           </a:xfrm>
           <a:prstGeom prst="rect">
             <a:avLst/>
@@ -8396,13 +8589,13 @@
           <a:p>
             <a:pPr algn="l"/>
             <a:r>
-              <a:rPr sz="1100" b="1" i="0" spc="60">
+              <a:rPr sz="1200" b="1" i="0" spc="60">
                 <a:solidFill>
                   <a:srgbClr val="1C1410"/>
                 </a:solidFill>
                 <a:latin typeface="JetBrains Mono"/>
               </a:rPr>
-              <a:t>ai core</a:t>
+              <a:t>extraction</a:t>
             </a:r>
           </a:p>
         </p:txBody>
@@ -8415,7 +8608,7 @@
         </p:nvSpPr>
         <p:spPr>
           <a:xfrm>
-            <a:off x="2057400" y="1773936"/>
+            <a:off x="2148840" y="1920240"/>
             <a:ext cx="182880" cy="292608"/>
           </a:xfrm>
           <a:prstGeom prst="rect">
@@ -8431,7 +8624,7 @@
           <a:p>
             <a:pPr algn="l"/>
             <a:r>
-              <a:rPr sz="1100" b="0" i="0">
+              <a:rPr sz="1200" b="0" i="0">
                 <a:solidFill>
                   <a:srgbClr val="A19C98"/>
                 </a:solidFill>
@@ -8450,8 +8643,8 @@
         </p:nvSpPr>
         <p:spPr>
           <a:xfrm>
-            <a:off x="2331720" y="1773936"/>
-            <a:ext cx="6858000" cy="292608"/>
+            <a:off x="2423160" y="1920240"/>
+            <a:ext cx="6400800" cy="292608"/>
           </a:xfrm>
           <a:prstGeom prst="rect">
             <a:avLst/>
@@ -8472,7 +8665,7 @@
                 </a:solidFill>
                 <a:latin typeface="JetBrains Mono Light"/>
               </a:rPr>
-              <a:t>fastapi  ·  hugging face spaces  ·  ed25519 sanad service</a:t>
+              <a:t>multi-pass interview, strict json schema, repair loop</a:t>
             </a:r>
           </a:p>
         </p:txBody>
@@ -8485,8 +8678,8 @@
         </p:nvSpPr>
         <p:spPr>
           <a:xfrm>
-            <a:off x="548640" y="2157984"/>
-            <a:ext cx="1463040" cy="292608"/>
+            <a:off x="548640" y="2377440"/>
+            <a:ext cx="1554480" cy="292608"/>
           </a:xfrm>
           <a:prstGeom prst="rect">
             <a:avLst/>
@@ -8501,13 +8694,13 @@
           <a:p>
             <a:pPr algn="l"/>
             <a:r>
-              <a:rPr sz="1100" b="1" i="0" spc="60">
+              <a:rPr sz="1200" b="1" i="0" spc="60">
                 <a:solidFill>
                   <a:srgbClr val="1C1410"/>
                 </a:solidFill>
                 <a:latin typeface="JetBrains Mono"/>
               </a:rPr>
-              <a:t>postgres</a:t>
+              <a:t>embeddings</a:t>
             </a:r>
           </a:p>
         </p:txBody>
@@ -8520,7 +8713,7 @@
         </p:nvSpPr>
         <p:spPr>
           <a:xfrm>
-            <a:off x="2057400" y="2157984"/>
+            <a:off x="2148840" y="2377440"/>
             <a:ext cx="182880" cy="292608"/>
           </a:xfrm>
           <a:prstGeom prst="rect">
@@ -8536,7 +8729,7 @@
           <a:p>
             <a:pPr algn="l"/>
             <a:r>
-              <a:rPr sz="1100" b="0" i="0">
+              <a:rPr sz="1200" b="0" i="0">
                 <a:solidFill>
                   <a:srgbClr val="A19C98"/>
                 </a:solidFill>
@@ -8555,8 +8748,8 @@
         </p:nvSpPr>
         <p:spPr>
           <a:xfrm>
-            <a:off x="2331720" y="2157984"/>
-            <a:ext cx="6858000" cy="292608"/>
+            <a:off x="2423160" y="2377440"/>
+            <a:ext cx="6400800" cy="292608"/>
           </a:xfrm>
           <a:prstGeom prst="rect">
             <a:avLst/>
@@ -8577,7 +8770,7 @@
                 </a:solidFill>
                 <a:latin typeface="JetBrains Mono Light"/>
               </a:rPr>
-              <a:t>neon  ·  pgvector  ·  shared between backend + ai core</a:t>
+              <a:t>sentence-transformers, multilingual-e5-small, 384-dim</a:t>
             </a:r>
           </a:p>
         </p:txBody>
@@ -8590,8 +8783,8 @@
         </p:nvSpPr>
         <p:spPr>
           <a:xfrm>
-            <a:off x="548640" y="2542032"/>
-            <a:ext cx="1463040" cy="292608"/>
+            <a:off x="548640" y="2834640"/>
+            <a:ext cx="1554480" cy="292608"/>
           </a:xfrm>
           <a:prstGeom prst="rect">
             <a:avLst/>
@@ -8606,13 +8799,13 @@
           <a:p>
             <a:pPr algn="l"/>
             <a:r>
-              <a:rPr sz="1100" b="1" i="0" spc="60">
+              <a:rPr sz="1200" b="1" i="0" spc="60">
                 <a:solidFill>
                   <a:srgbClr val="1C1410"/>
                 </a:solidFill>
                 <a:latin typeface="JetBrains Mono"/>
               </a:rPr>
-              <a:t>asr</a:t>
+              <a:t>retrieval</a:t>
             </a:r>
           </a:p>
         </p:txBody>
@@ -8625,7 +8818,7 @@
         </p:nvSpPr>
         <p:spPr>
           <a:xfrm>
-            <a:off x="2057400" y="2542032"/>
+            <a:off x="2148840" y="2834640"/>
             <a:ext cx="182880" cy="292608"/>
           </a:xfrm>
           <a:prstGeom prst="rect">
@@ -8641,7 +8834,7 @@
           <a:p>
             <a:pPr algn="l"/>
             <a:r>
-              <a:rPr sz="1100" b="0" i="0">
+              <a:rPr sz="1200" b="0" i="0">
                 <a:solidFill>
                   <a:srgbClr val="A19C98"/>
                 </a:solidFill>
@@ -8660,8 +8853,8 @@
         </p:nvSpPr>
         <p:spPr>
           <a:xfrm>
-            <a:off x="2331720" y="2542032"/>
-            <a:ext cx="6858000" cy="292608"/>
+            <a:off x="2423160" y="2834640"/>
+            <a:ext cx="6400800" cy="292608"/>
           </a:xfrm>
           <a:prstGeom prst="rect">
             <a:avLst/>
@@ -8682,7 +8875,7 @@
                 </a:solidFill>
                 <a:latin typeface="JetBrains Mono Light"/>
               </a:rPr>
-              <a:t>bhashini  &gt;  ai4bharat  &gt;  groq  &gt;  hf inference  &gt;  whisper</a:t>
+              <a:t>pgvector cosine over chunked, timestamped transcripts</a:t>
             </a:r>
           </a:p>
         </p:txBody>
@@ -8695,8 +8888,8 @@
         </p:nvSpPr>
         <p:spPr>
           <a:xfrm>
-            <a:off x="548640" y="2926080"/>
-            <a:ext cx="1463040" cy="292608"/>
+            <a:off x="548640" y="3291840"/>
+            <a:ext cx="1554480" cy="292608"/>
           </a:xfrm>
           <a:prstGeom prst="rect">
             <a:avLst/>
@@ -8711,13 +8904,13 @@
           <a:p>
             <a:pPr algn="l"/>
             <a:r>
-              <a:rPr sz="1100" b="1" i="0" spc="60">
+              <a:rPr sz="1200" b="1" i="0" spc="60">
                 <a:solidFill>
                   <a:srgbClr val="1C1410"/>
                 </a:solidFill>
                 <a:latin typeface="JetBrains Mono"/>
               </a:rPr>
-              <a:t>llm</a:t>
+              <a:t>signature</a:t>
             </a:r>
           </a:p>
         </p:txBody>
@@ -8730,7 +8923,7 @@
         </p:nvSpPr>
         <p:spPr>
           <a:xfrm>
-            <a:off x="2057400" y="2926080"/>
+            <a:off x="2148840" y="3291840"/>
             <a:ext cx="182880" cy="292608"/>
           </a:xfrm>
           <a:prstGeom prst="rect">
@@ -8746,7 +8939,7 @@
           <a:p>
             <a:pPr algn="l"/>
             <a:r>
-              <a:rPr sz="1100" b="0" i="0">
+              <a:rPr sz="1200" b="0" i="0">
                 <a:solidFill>
                   <a:srgbClr val="A19C98"/>
                 </a:solidFill>
@@ -8765,8 +8958,8 @@
         </p:nvSpPr>
         <p:spPr>
           <a:xfrm>
-            <a:off x="2331720" y="2926080"/>
-            <a:ext cx="6858000" cy="292608"/>
+            <a:off x="2423160" y="3291840"/>
+            <a:ext cx="6400800" cy="292608"/>
           </a:xfrm>
           <a:prstGeom prst="rect">
             <a:avLst/>
@@ -8787,7 +8980,7 @@
                 </a:solidFill>
                 <a:latin typeface="JetBrains Mono Light"/>
               </a:rPr>
-              <a:t>openrouter  ·  free + premium models behind one interface</a:t>
+              <a:t>ed25519 over rfc 8785 jcs, jws-compact qr, offline verify</a:t>
             </a:r>
           </a:p>
         </p:txBody>
@@ -8800,8 +8993,8 @@
         </p:nvSpPr>
         <p:spPr>
           <a:xfrm>
-            <a:off x="548640" y="3310128"/>
-            <a:ext cx="1463040" cy="292608"/>
+            <a:off x="548640" y="3749039"/>
+            <a:ext cx="1554480" cy="292608"/>
           </a:xfrm>
           <a:prstGeom prst="rect">
             <a:avLst/>
@@ -8816,13 +9009,13 @@
           <a:p>
             <a:pPr algn="l"/>
             <a:r>
-              <a:rPr sz="1100" b="1" i="0" spc="60">
+              <a:rPr sz="1200" b="1" i="0" spc="60">
                 <a:solidFill>
                   <a:srgbClr val="1C1410"/>
                 </a:solidFill>
                 <a:latin typeface="JetBrains Mono"/>
               </a:rPr>
-              <a:t>embeddings</a:t>
+              <a:t>storage</a:t>
             </a:r>
           </a:p>
         </p:txBody>
@@ -8835,7 +9028,7 @@
         </p:nvSpPr>
         <p:spPr>
           <a:xfrm>
-            <a:off x="2057400" y="3310128"/>
+            <a:off x="2148840" y="3749039"/>
             <a:ext cx="182880" cy="292608"/>
           </a:xfrm>
           <a:prstGeom prst="rect">
@@ -8851,7 +9044,7 @@
           <a:p>
             <a:pPr algn="l"/>
             <a:r>
-              <a:rPr sz="1100" b="0" i="0">
+              <a:rPr sz="1200" b="0" i="0">
                 <a:solidFill>
                   <a:srgbClr val="A19C98"/>
                 </a:solidFill>
@@ -8870,8 +9063,8 @@
         </p:nvSpPr>
         <p:spPr>
           <a:xfrm>
-            <a:off x="2331720" y="3310128"/>
-            <a:ext cx="6858000" cy="292608"/>
+            <a:off x="2423160" y="3749039"/>
+            <a:ext cx="6400800" cy="292608"/>
           </a:xfrm>
           <a:prstGeom prst="rect">
             <a:avLst/>
@@ -8892,21 +9085,65 @@
                 </a:solidFill>
                 <a:latin typeface="JetBrains Mono Light"/>
               </a:rPr>
-              <a:t>sentence-transformers  ·  intfloat / multilingual-e5-small</a:t>
-            </a:r>
-          </a:p>
-        </p:txBody>
-      </p:sp>
-      <p:sp>
-        <p:nvSpPr>
-          <p:cNvPr id="25" name="TextBox 24"/>
+              <a:t>neon postgres, async sqlalchemy, alembic-managed schema</a:t>
+            </a:r>
+          </a:p>
+        </p:txBody>
+      </p:sp>
+      <p:sp>
+        <p:nvSpPr>
+          <p:cNvPr id="25" name="Oval 24"/>
+          <p:cNvSpPr/>
+          <p:nvPr/>
+        </p:nvSpPr>
+        <p:spPr>
+          <a:xfrm>
+            <a:off x="10086340" y="942340"/>
+            <a:ext cx="127000" cy="127000"/>
+          </a:xfrm>
+          <a:prstGeom prst="ellipse">
+            <a:avLst/>
+          </a:prstGeom>
+          <a:solidFill>
+            <a:srgbClr val="1C1410"/>
+          </a:solidFill>
+          <a:ln>
+            <a:noFill/>
+          </a:ln>
+          <a:effectLst/>
+        </p:spPr>
+        <p:style>
+          <a:lnRef idx="1">
+            <a:schemeClr val="accent1"/>
+          </a:lnRef>
+          <a:fillRef idx="3">
+            <a:schemeClr val="accent1"/>
+          </a:fillRef>
+          <a:effectRef idx="2">
+            <a:schemeClr val="accent1"/>
+          </a:effectRef>
+          <a:fontRef idx="minor">
+            <a:schemeClr val="lt1"/>
+          </a:fontRef>
+        </p:style>
+        <p:txBody>
+          <a:bodyPr rtlCol="0" anchor="ctr"/>
+          <a:lstStyle/>
+          <a:p>
+            <a:pPr algn="ctr"/>
+          </a:p>
+        </p:txBody>
+      </p:sp>
+      <p:sp>
+        <p:nvSpPr>
+          <p:cNvPr id="26" name="TextBox 25"/>
           <p:cNvSpPr txBox="1"/>
           <p:nvPr/>
         </p:nvSpPr>
         <p:spPr>
           <a:xfrm>
-            <a:off x="548640" y="3694176"/>
-            <a:ext cx="1463040" cy="292608"/>
+            <a:off x="8458200" y="886968"/>
+            <a:ext cx="1554480" cy="292608"/>
           </a:xfrm>
           <a:prstGeom prst="rect">
             <a:avLst/>
@@ -8919,29 +9156,108 @@
           </a:bodyPr>
           <a:lstStyle/>
           <a:p>
-            <a:pPr algn="l"/>
-            <a:r>
-              <a:rPr sz="1100" b="1" i="0" spc="60">
-                <a:solidFill>
-                  <a:srgbClr val="1C1410"/>
-                </a:solidFill>
-                <a:latin typeface="JetBrains Mono"/>
-              </a:rPr>
-              <a:t>signature</a:t>
-            </a:r>
-          </a:p>
-        </p:txBody>
-      </p:sp>
-      <p:sp>
-        <p:nvSpPr>
-          <p:cNvPr id="26" name="TextBox 25"/>
+            <a:pPr algn="r"/>
+            <a:r>
+              <a:rPr sz="1000" b="0" i="0" spc="60">
+                <a:solidFill>
+                  <a:srgbClr val="5A4A3A"/>
+                </a:solidFill>
+                <a:latin typeface="JetBrains Mono Light"/>
+              </a:rPr>
+              <a:t>audio in</a:t>
+            </a:r>
+          </a:p>
+        </p:txBody>
+      </p:sp>
+      <p:cxnSp>
+        <p:nvCxnSpPr>
+          <p:cNvPr id="27" name="Connector 26"/>
+          <p:cNvCxnSpPr/>
+          <p:nvPr/>
+        </p:nvCxnSpPr>
+        <p:spPr>
+          <a:xfrm>
+            <a:off x="10149840" y="1087628"/>
+            <a:ext cx="0" cy="549656"/>
+          </a:xfrm>
+          <a:prstGeom prst="line">
+            <a:avLst/>
+          </a:prstGeom>
+          <a:ln w="9525">
+            <a:solidFill>
+              <a:srgbClr val="1C1410"/>
+            </a:solidFill>
+          </a:ln>
+        </p:spPr>
+        <p:style>
+          <a:lnRef idx="2">
+            <a:schemeClr val="accent1"/>
+          </a:lnRef>
+          <a:fillRef idx="0">
+            <a:schemeClr val="accent1"/>
+          </a:fillRef>
+          <a:effectRef idx="1">
+            <a:schemeClr val="accent1"/>
+          </a:effectRef>
+          <a:fontRef idx="minor">
+            <a:schemeClr val="tx1"/>
+          </a:fontRef>
+        </p:style>
+      </p:cxnSp>
+      <p:sp>
+        <p:nvSpPr>
+          <p:cNvPr id="28" name="Oval 27"/>
+          <p:cNvSpPr/>
+          <p:nvPr/>
+        </p:nvSpPr>
+        <p:spPr>
+          <a:xfrm>
+            <a:off x="10086340" y="1655572"/>
+            <a:ext cx="127000" cy="127000"/>
+          </a:xfrm>
+          <a:prstGeom prst="ellipse">
+            <a:avLst/>
+          </a:prstGeom>
+          <a:solidFill>
+            <a:srgbClr val="1C1410"/>
+          </a:solidFill>
+          <a:ln>
+            <a:noFill/>
+          </a:ln>
+          <a:effectLst/>
+        </p:spPr>
+        <p:style>
+          <a:lnRef idx="1">
+            <a:schemeClr val="accent1"/>
+          </a:lnRef>
+          <a:fillRef idx="3">
+            <a:schemeClr val="accent1"/>
+          </a:fillRef>
+          <a:effectRef idx="2">
+            <a:schemeClr val="accent1"/>
+          </a:effectRef>
+          <a:fontRef idx="minor">
+            <a:schemeClr val="lt1"/>
+          </a:fontRef>
+        </p:style>
+        <p:txBody>
+          <a:bodyPr rtlCol="0" anchor="ctr"/>
+          <a:lstStyle/>
+          <a:p>
+            <a:pPr algn="ctr"/>
+          </a:p>
+        </p:txBody>
+      </p:sp>
+      <p:sp>
+        <p:nvSpPr>
+          <p:cNvPr id="29" name="TextBox 28"/>
           <p:cNvSpPr txBox="1"/>
           <p:nvPr/>
         </p:nvSpPr>
         <p:spPr>
           <a:xfrm>
-            <a:off x="2057400" y="3694176"/>
-            <a:ext cx="182880" cy="292608"/>
+            <a:off x="8458200" y="1600200"/>
+            <a:ext cx="1554480" cy="292608"/>
           </a:xfrm>
           <a:prstGeom prst="rect">
             <a:avLst/>
@@ -8954,29 +9270,108 @@
           </a:bodyPr>
           <a:lstStyle/>
           <a:p>
-            <a:pPr algn="l"/>
-            <a:r>
-              <a:rPr sz="1100" b="0" i="0">
-                <a:solidFill>
-                  <a:srgbClr val="A19C98"/>
+            <a:pPr algn="r"/>
+            <a:r>
+              <a:rPr sz="1000" b="0" i="0" spc="60">
+                <a:solidFill>
+                  <a:srgbClr val="5A4A3A"/>
                 </a:solidFill>
                 <a:latin typeface="JetBrains Mono Light"/>
               </a:rPr>
-              <a:t>·</a:t>
-            </a:r>
-          </a:p>
-        </p:txBody>
-      </p:sp>
-      <p:sp>
-        <p:nvSpPr>
-          <p:cNvPr id="27" name="TextBox 26"/>
+              <a:t>asr ladder</a:t>
+            </a:r>
+          </a:p>
+        </p:txBody>
+      </p:sp>
+      <p:cxnSp>
+        <p:nvCxnSpPr>
+          <p:cNvPr id="30" name="Connector 29"/>
+          <p:cNvCxnSpPr/>
+          <p:nvPr/>
+        </p:nvCxnSpPr>
+        <p:spPr>
+          <a:xfrm>
+            <a:off x="10149840" y="1800860"/>
+            <a:ext cx="0" cy="549656"/>
+          </a:xfrm>
+          <a:prstGeom prst="line">
+            <a:avLst/>
+          </a:prstGeom>
+          <a:ln w="9525">
+            <a:solidFill>
+              <a:srgbClr val="1C1410"/>
+            </a:solidFill>
+          </a:ln>
+        </p:spPr>
+        <p:style>
+          <a:lnRef idx="2">
+            <a:schemeClr val="accent1"/>
+          </a:lnRef>
+          <a:fillRef idx="0">
+            <a:schemeClr val="accent1"/>
+          </a:fillRef>
+          <a:effectRef idx="1">
+            <a:schemeClr val="accent1"/>
+          </a:effectRef>
+          <a:fontRef idx="minor">
+            <a:schemeClr val="tx1"/>
+          </a:fontRef>
+        </p:style>
+      </p:cxnSp>
+      <p:sp>
+        <p:nvSpPr>
+          <p:cNvPr id="31" name="Oval 30"/>
+          <p:cNvSpPr/>
+          <p:nvPr/>
+        </p:nvSpPr>
+        <p:spPr>
+          <a:xfrm>
+            <a:off x="10086340" y="2368804"/>
+            <a:ext cx="127000" cy="127000"/>
+          </a:xfrm>
+          <a:prstGeom prst="ellipse">
+            <a:avLst/>
+          </a:prstGeom>
+          <a:solidFill>
+            <a:srgbClr val="1C1410"/>
+          </a:solidFill>
+          <a:ln>
+            <a:noFill/>
+          </a:ln>
+          <a:effectLst/>
+        </p:spPr>
+        <p:style>
+          <a:lnRef idx="1">
+            <a:schemeClr val="accent1"/>
+          </a:lnRef>
+          <a:fillRef idx="3">
+            <a:schemeClr val="accent1"/>
+          </a:fillRef>
+          <a:effectRef idx="2">
+            <a:schemeClr val="accent1"/>
+          </a:effectRef>
+          <a:fontRef idx="minor">
+            <a:schemeClr val="lt1"/>
+          </a:fontRef>
+        </p:style>
+        <p:txBody>
+          <a:bodyPr rtlCol="0" anchor="ctr"/>
+          <a:lstStyle/>
+          <a:p>
+            <a:pPr algn="ctr"/>
+          </a:p>
+        </p:txBody>
+      </p:sp>
+      <p:sp>
+        <p:nvSpPr>
+          <p:cNvPr id="32" name="TextBox 31"/>
           <p:cNvSpPr txBox="1"/>
           <p:nvPr/>
         </p:nvSpPr>
         <p:spPr>
           <a:xfrm>
-            <a:off x="2331720" y="3694176"/>
-            <a:ext cx="6858000" cy="292608"/>
+            <a:off x="8458200" y="2313432"/>
+            <a:ext cx="1554480" cy="292608"/>
           </a:xfrm>
           <a:prstGeom prst="rect">
             <a:avLst/>
@@ -8989,29 +9384,108 @@
           </a:bodyPr>
           <a:lstStyle/>
           <a:p>
-            <a:pPr algn="l"/>
-            <a:r>
-              <a:rPr sz="1100" b="0" i="0">
+            <a:pPr algn="r"/>
+            <a:r>
+              <a:rPr sz="1000" b="0" i="0" spc="60">
                 <a:solidFill>
                   <a:srgbClr val="5A4A3A"/>
                 </a:solidFill>
                 <a:latin typeface="JetBrains Mono Light"/>
               </a:rPr>
-              <a:t>ed25519 over rfc 8785 jcs  ·  jws-compact qr  ·  offline verify</a:t>
-            </a:r>
-          </a:p>
-        </p:txBody>
-      </p:sp>
-      <p:sp>
-        <p:nvSpPr>
-          <p:cNvPr id="28" name="TextBox 27"/>
+              <a:t>llm extract</a:t>
+            </a:r>
+          </a:p>
+        </p:txBody>
+      </p:sp>
+      <p:cxnSp>
+        <p:nvCxnSpPr>
+          <p:cNvPr id="33" name="Connector 32"/>
+          <p:cNvCxnSpPr/>
+          <p:nvPr/>
+        </p:nvCxnSpPr>
+        <p:spPr>
+          <a:xfrm>
+            <a:off x="10149840" y="2514092"/>
+            <a:ext cx="0" cy="549656"/>
+          </a:xfrm>
+          <a:prstGeom prst="line">
+            <a:avLst/>
+          </a:prstGeom>
+          <a:ln w="9525">
+            <a:solidFill>
+              <a:srgbClr val="1C1410"/>
+            </a:solidFill>
+          </a:ln>
+        </p:spPr>
+        <p:style>
+          <a:lnRef idx="2">
+            <a:schemeClr val="accent1"/>
+          </a:lnRef>
+          <a:fillRef idx="0">
+            <a:schemeClr val="accent1"/>
+          </a:fillRef>
+          <a:effectRef idx="1">
+            <a:schemeClr val="accent1"/>
+          </a:effectRef>
+          <a:fontRef idx="minor">
+            <a:schemeClr val="tx1"/>
+          </a:fontRef>
+        </p:style>
+      </p:cxnSp>
+      <p:sp>
+        <p:nvSpPr>
+          <p:cNvPr id="34" name="Oval 33"/>
+          <p:cNvSpPr/>
+          <p:nvPr/>
+        </p:nvSpPr>
+        <p:spPr>
+          <a:xfrm>
+            <a:off x="10086340" y="3082036"/>
+            <a:ext cx="127000" cy="127000"/>
+          </a:xfrm>
+          <a:prstGeom prst="ellipse">
+            <a:avLst/>
+          </a:prstGeom>
+          <a:solidFill>
+            <a:srgbClr val="1C1410"/>
+          </a:solidFill>
+          <a:ln>
+            <a:noFill/>
+          </a:ln>
+          <a:effectLst/>
+        </p:spPr>
+        <p:style>
+          <a:lnRef idx="1">
+            <a:schemeClr val="accent1"/>
+          </a:lnRef>
+          <a:fillRef idx="3">
+            <a:schemeClr val="accent1"/>
+          </a:fillRef>
+          <a:effectRef idx="2">
+            <a:schemeClr val="accent1"/>
+          </a:effectRef>
+          <a:fontRef idx="minor">
+            <a:schemeClr val="lt1"/>
+          </a:fontRef>
+        </p:style>
+        <p:txBody>
+          <a:bodyPr rtlCol="0" anchor="ctr"/>
+          <a:lstStyle/>
+          <a:p>
+            <a:pPr algn="ctr"/>
+          </a:p>
+        </p:txBody>
+      </p:sp>
+      <p:sp>
+        <p:nvSpPr>
+          <p:cNvPr id="35" name="TextBox 34"/>
           <p:cNvSpPr txBox="1"/>
           <p:nvPr/>
         </p:nvSpPr>
         <p:spPr>
           <a:xfrm>
-            <a:off x="548640" y="4306824"/>
-            <a:ext cx="9144000" cy="292608"/>
+            <a:off x="8458200" y="3026664"/>
+            <a:ext cx="1554480" cy="292608"/>
           </a:xfrm>
           <a:prstGeom prst="rect">
             <a:avLst/>
@@ -9024,299 +9498,64 @@
           </a:bodyPr>
           <a:lstStyle/>
           <a:p>
-            <a:pPr algn="l"/>
-            <a:r>
-              <a:rPr sz="1200" b="1" i="0">
-                <a:solidFill>
-                  <a:srgbClr val="1C1410"/>
-                </a:solidFill>
-                <a:latin typeface="JetBrains Mono"/>
-              </a:rPr>
-              <a:t>every dependency above is on a free tier today.</a:t>
-            </a:r>
-          </a:p>
-        </p:txBody>
-      </p:sp>
-      <p:sp>
-        <p:nvSpPr>
-          <p:cNvPr id="29" name="TextBox 28"/>
-          <p:cNvSpPr txBox="1"/>
-          <p:nvPr/>
-        </p:nvSpPr>
-        <p:spPr>
-          <a:xfrm>
-            <a:off x="9509760" y="1005840"/>
-            <a:ext cx="2286000" cy="868680"/>
-          </a:xfrm>
-          <a:prstGeom prst="rect">
-            <a:avLst/>
-          </a:prstGeom>
-          <a:noFill/>
-        </p:spPr>
-        <p:txBody>
-          <a:bodyPr wrap="square" lIns="0" rIns="0" tIns="0" bIns="0" anchor="t">
-            <a:noAutofit/>
-          </a:bodyPr>
-          <a:lstStyle/>
-          <a:p>
-            <a:pPr algn="l"/>
-            <a:r>
-              <a:rPr sz="6400" b="0" i="0">
-                <a:solidFill>
-                  <a:srgbClr val="1C1410"/>
+            <a:pPr algn="r"/>
+            <a:r>
+              <a:rPr sz="1000" b="0" i="0" spc="60">
+                <a:solidFill>
+                  <a:srgbClr val="5A4A3A"/>
                 </a:solidFill>
                 <a:latin typeface="JetBrains Mono Light"/>
               </a:rPr>
-              <a:t>18</a:t>
-            </a:r>
-          </a:p>
-        </p:txBody>
-      </p:sp>
-      <p:sp>
-        <p:nvSpPr>
-          <p:cNvPr id="30" name="TextBox 29"/>
-          <p:cNvSpPr txBox="1"/>
-          <p:nvPr/>
-        </p:nvSpPr>
-        <p:spPr>
-          <a:xfrm>
-            <a:off x="9509760" y="1874519"/>
-            <a:ext cx="2286000" cy="502920"/>
-          </a:xfrm>
-          <a:prstGeom prst="rect">
-            <a:avLst/>
-          </a:prstGeom>
-          <a:noFill/>
-        </p:spPr>
-        <p:txBody>
-          <a:bodyPr wrap="square" lIns="0" rIns="0" tIns="0" bIns="0" anchor="t">
-            <a:noAutofit/>
-          </a:bodyPr>
-          <a:lstStyle/>
-          <a:p>
-            <a:pPr algn="l">
-              <a:lnSpc>
-                <a:spcPct val="140000"/>
-              </a:lnSpc>
-            </a:pPr>
-            <a:r>
-              <a:rPr sz="900" b="0" i="0" spc="60">
-                <a:solidFill>
-                  <a:srgbClr val="5A4A3A"/>
-                </a:solidFill>
-                <a:latin typeface="JetBrains Mono Light"/>
-              </a:rPr>
-              <a:t>seeded</a:t>
-            </a:r>
-          </a:p>
-          <a:p>
-            <a:pPr algn="l">
-              <a:lnSpc>
-                <a:spcPct val="140000"/>
-              </a:lnSpc>
-            </a:pPr>
-            <a:r>
-              <a:rPr sz="900" b="0" i="0" spc="60">
-                <a:solidFill>
-                  <a:srgbClr val="5A4A3A"/>
-                </a:solidFill>
-                <a:latin typeface="JetBrains Mono Light"/>
-              </a:rPr>
-              <a:t>artisan masters</a:t>
-            </a:r>
-          </a:p>
-        </p:txBody>
-      </p:sp>
-      <p:sp>
-        <p:nvSpPr>
-          <p:cNvPr id="31" name="TextBox 30"/>
-          <p:cNvSpPr txBox="1"/>
-          <p:nvPr/>
-        </p:nvSpPr>
-        <p:spPr>
-          <a:xfrm>
-            <a:off x="9509760" y="2423160"/>
-            <a:ext cx="2286000" cy="868680"/>
-          </a:xfrm>
-          <a:prstGeom prst="rect">
-            <a:avLst/>
-          </a:prstGeom>
-          <a:noFill/>
-        </p:spPr>
-        <p:txBody>
-          <a:bodyPr wrap="square" lIns="0" rIns="0" tIns="0" bIns="0" anchor="t">
-            <a:noAutofit/>
-          </a:bodyPr>
-          <a:lstStyle/>
-          <a:p>
-            <a:pPr algn="l"/>
-            <a:r>
-              <a:rPr sz="6400" b="0" i="0">
-                <a:solidFill>
-                  <a:srgbClr val="1C1410"/>
-                </a:solidFill>
-                <a:latin typeface="JetBrains Mono Light"/>
-              </a:rPr>
-              <a:t>54</a:t>
-            </a:r>
-          </a:p>
-        </p:txBody>
-      </p:sp>
-      <p:sp>
-        <p:nvSpPr>
-          <p:cNvPr id="32" name="TextBox 31"/>
-          <p:cNvSpPr txBox="1"/>
-          <p:nvPr/>
-        </p:nvSpPr>
-        <p:spPr>
-          <a:xfrm>
-            <a:off x="9509760" y="3291840"/>
-            <a:ext cx="2286000" cy="502920"/>
-          </a:xfrm>
-          <a:prstGeom prst="rect">
-            <a:avLst/>
-          </a:prstGeom>
-          <a:noFill/>
-        </p:spPr>
-        <p:txBody>
-          <a:bodyPr wrap="square" lIns="0" rIns="0" tIns="0" bIns="0" anchor="t">
-            <a:noAutofit/>
-          </a:bodyPr>
-          <a:lstStyle/>
-          <a:p>
-            <a:pPr algn="l">
-              <a:lnSpc>
-                <a:spcPct val="140000"/>
-              </a:lnSpc>
-            </a:pPr>
-            <a:r>
-              <a:rPr sz="900" b="0" i="0" spc="60">
-                <a:solidFill>
-                  <a:srgbClr val="5A4A3A"/>
-                </a:solidFill>
-                <a:latin typeface="JetBrains Mono Light"/>
-              </a:rPr>
-              <a:t>bookable</a:t>
-            </a:r>
-          </a:p>
-          <a:p>
-            <a:pPr algn="l">
-              <a:lnSpc>
-                <a:spcPct val="140000"/>
-              </a:lnSpc>
-            </a:pPr>
-            <a:r>
-              <a:rPr sz="900" b="0" i="0" spc="60">
-                <a:solidFill>
-                  <a:srgbClr val="5A4A3A"/>
-                </a:solidFill>
-                <a:latin typeface="JetBrains Mono Light"/>
-              </a:rPr>
-              <a:t>workshops</a:t>
-            </a:r>
-          </a:p>
-        </p:txBody>
-      </p:sp>
-      <p:sp>
-        <p:nvSpPr>
-          <p:cNvPr id="33" name="TextBox 32"/>
-          <p:cNvSpPr txBox="1"/>
-          <p:nvPr/>
-        </p:nvSpPr>
-        <p:spPr>
-          <a:xfrm>
-            <a:off x="9509760" y="3840480"/>
-            <a:ext cx="2286000" cy="868680"/>
-          </a:xfrm>
-          <a:prstGeom prst="rect">
-            <a:avLst/>
-          </a:prstGeom>
-          <a:noFill/>
-        </p:spPr>
-        <p:txBody>
-          <a:bodyPr wrap="square" lIns="0" rIns="0" tIns="0" bIns="0" anchor="t">
-            <a:noAutofit/>
-          </a:bodyPr>
-          <a:lstStyle/>
-          <a:p>
-            <a:pPr algn="l"/>
-            <a:r>
-              <a:rPr sz="6400" b="0" i="0">
-                <a:solidFill>
-                  <a:srgbClr val="1C1410"/>
-                </a:solidFill>
-                <a:latin typeface="JetBrains Mono Light"/>
-              </a:rPr>
-              <a:t>2.8s</a:t>
-            </a:r>
-          </a:p>
-        </p:txBody>
-      </p:sp>
-      <p:sp>
-        <p:nvSpPr>
-          <p:cNvPr id="34" name="TextBox 33"/>
-          <p:cNvSpPr txBox="1"/>
-          <p:nvPr/>
-        </p:nvSpPr>
-        <p:spPr>
-          <a:xfrm>
-            <a:off x="9509760" y="4709160"/>
-            <a:ext cx="2286000" cy="502920"/>
-          </a:xfrm>
-          <a:prstGeom prst="rect">
-            <a:avLst/>
-          </a:prstGeom>
-          <a:noFill/>
-        </p:spPr>
-        <p:txBody>
-          <a:bodyPr wrap="square" lIns="0" rIns="0" tIns="0" bIns="0" anchor="t">
-            <a:noAutofit/>
-          </a:bodyPr>
-          <a:lstStyle/>
-          <a:p>
-            <a:pPr algn="l">
-              <a:lnSpc>
-                <a:spcPct val="140000"/>
-              </a:lnSpc>
-            </a:pPr>
-            <a:r>
-              <a:rPr sz="900" b="0" i="0" spc="60">
-                <a:solidFill>
-                  <a:srgbClr val="5A4A3A"/>
-                </a:solidFill>
-                <a:latin typeface="JetBrains Mono Light"/>
-              </a:rPr>
-              <a:t>median latency,</a:t>
-            </a:r>
-          </a:p>
-          <a:p>
-            <a:pPr algn="l">
-              <a:lnSpc>
-                <a:spcPct val="140000"/>
-              </a:lnSpc>
-            </a:pPr>
-            <a:r>
-              <a:rPr sz="900" b="0" i="0" spc="60">
-                <a:solidFill>
-                  <a:srgbClr val="5A4A3A"/>
-                </a:solidFill>
-                <a:latin typeface="JetBrains Mono Light"/>
-              </a:rPr>
-              <a:t>sign + persist</a:t>
-            </a:r>
-          </a:p>
-        </p:txBody>
-      </p:sp>
-      <p:sp>
-        <p:nvSpPr>
-          <p:cNvPr id="35" name="Oval 34"/>
+              <a:t>schema + repair</a:t>
+            </a:r>
+          </a:p>
+        </p:txBody>
+      </p:sp>
+      <p:cxnSp>
+        <p:nvCxnSpPr>
+          <p:cNvPr id="36" name="Connector 35"/>
+          <p:cNvCxnSpPr/>
+          <p:nvPr/>
+        </p:nvCxnSpPr>
+        <p:spPr>
+          <a:xfrm>
+            <a:off x="10149840" y="3227324"/>
+            <a:ext cx="0" cy="536956"/>
+          </a:xfrm>
+          <a:prstGeom prst="line">
+            <a:avLst/>
+          </a:prstGeom>
+          <a:ln w="9525">
+            <a:solidFill>
+              <a:srgbClr val="1C1410"/>
+            </a:solidFill>
+          </a:ln>
+        </p:spPr>
+        <p:style>
+          <a:lnRef idx="2">
+            <a:schemeClr val="accent1"/>
+          </a:lnRef>
+          <a:fillRef idx="0">
+            <a:schemeClr val="accent1"/>
+          </a:fillRef>
+          <a:effectRef idx="1">
+            <a:schemeClr val="accent1"/>
+          </a:effectRef>
+          <a:fontRef idx="minor">
+            <a:schemeClr val="tx1"/>
+          </a:fontRef>
+        </p:style>
+      </p:cxnSp>
+      <p:sp>
+        <p:nvSpPr>
+          <p:cNvPr id="37" name="Oval 36"/>
           <p:cNvSpPr/>
           <p:nvPr/>
         </p:nvSpPr>
         <p:spPr>
           <a:xfrm>
-            <a:off x="589279" y="6130544"/>
-            <a:ext cx="101600" cy="101600"/>
+            <a:off x="10073640" y="3782568"/>
+            <a:ext cx="152400" cy="152400"/>
           </a:xfrm>
           <a:prstGeom prst="ellipse">
             <a:avLst/>
@@ -9353,14 +9592,14 @@
       </p:sp>
       <p:sp>
         <p:nvSpPr>
-          <p:cNvPr id="36" name="TextBox 35"/>
+          <p:cNvPr id="38" name="TextBox 37"/>
           <p:cNvSpPr txBox="1"/>
           <p:nvPr/>
         </p:nvSpPr>
         <p:spPr>
           <a:xfrm>
-            <a:off x="868680" y="6080760"/>
-            <a:ext cx="9601200" cy="292608"/>
+            <a:off x="8458200" y="3739896"/>
+            <a:ext cx="1554480" cy="292608"/>
           </a:xfrm>
           <a:prstGeom prst="rect">
             <a:avLst/>
@@ -9373,36 +9612,36 @@
           </a:bodyPr>
           <a:lstStyle/>
           <a:p>
-            <a:pPr algn="l"/>
-            <a:r>
-              <a:rPr sz="1200" b="1" i="0">
-                <a:solidFill>
-                  <a:srgbClr val="1C1410"/>
-                </a:solidFill>
-                <a:latin typeface="JetBrains Mono"/>
-              </a:rPr>
-              <a:t>every number is queryable from the public api right now.</a:t>
+            <a:pPr algn="r"/>
+            <a:r>
+              <a:rPr sz="1000" b="0" i="0" spc="60">
+                <a:solidFill>
+                  <a:srgbClr val="5A4A3A"/>
+                </a:solidFill>
+                <a:latin typeface="JetBrains Mono Light"/>
+              </a:rPr>
+              <a:t>ed25519 sign</a:t>
             </a:r>
           </a:p>
         </p:txBody>
       </p:sp>
       <p:cxnSp>
         <p:nvCxnSpPr>
-          <p:cNvPr id="37" name="Connector 36"/>
+          <p:cNvPr id="39" name="Connector 38"/>
           <p:cNvCxnSpPr/>
           <p:nvPr/>
         </p:nvCxnSpPr>
         <p:spPr>
           <a:xfrm>
-            <a:off x="868680" y="6391656"/>
-            <a:ext cx="2194559" cy="0"/>
+            <a:off x="10149840" y="3953256"/>
+            <a:ext cx="0" cy="536956"/>
           </a:xfrm>
           <a:prstGeom prst="line">
             <a:avLst/>
           </a:prstGeom>
-          <a:ln w="11430">
+          <a:ln w="9525">
             <a:solidFill>
-              <a:srgbClr val="8B1A1A"/>
+              <a:srgbClr val="1C1410"/>
             </a:solidFill>
           </a:ln>
         </p:spPr>
@@ -9423,7 +9662,191 @@
       </p:cxnSp>
       <p:sp>
         <p:nvSpPr>
-          <p:cNvPr id="38" name="TextBox 37"/>
+          <p:cNvPr id="40" name="Oval 39"/>
+          <p:cNvSpPr/>
+          <p:nvPr/>
+        </p:nvSpPr>
+        <p:spPr>
+          <a:xfrm>
+            <a:off x="10086340" y="4508500"/>
+            <a:ext cx="127000" cy="127000"/>
+          </a:xfrm>
+          <a:prstGeom prst="ellipse">
+            <a:avLst/>
+          </a:prstGeom>
+          <a:solidFill>
+            <a:srgbClr val="1C1410"/>
+          </a:solidFill>
+          <a:ln>
+            <a:noFill/>
+          </a:ln>
+          <a:effectLst/>
+        </p:spPr>
+        <p:style>
+          <a:lnRef idx="1">
+            <a:schemeClr val="accent1"/>
+          </a:lnRef>
+          <a:fillRef idx="3">
+            <a:schemeClr val="accent1"/>
+          </a:fillRef>
+          <a:effectRef idx="2">
+            <a:schemeClr val="accent1"/>
+          </a:effectRef>
+          <a:fontRef idx="minor">
+            <a:schemeClr val="lt1"/>
+          </a:fontRef>
+        </p:style>
+        <p:txBody>
+          <a:bodyPr rtlCol="0" anchor="ctr"/>
+          <a:lstStyle/>
+          <a:p>
+            <a:pPr algn="ctr"/>
+          </a:p>
+        </p:txBody>
+      </p:sp>
+      <p:sp>
+        <p:nvSpPr>
+          <p:cNvPr id="41" name="TextBox 40"/>
+          <p:cNvSpPr txBox="1"/>
+          <p:nvPr/>
+        </p:nvSpPr>
+        <p:spPr>
+          <a:xfrm>
+            <a:off x="8458200" y="4453128"/>
+            <a:ext cx="1554480" cy="292608"/>
+          </a:xfrm>
+          <a:prstGeom prst="rect">
+            <a:avLst/>
+          </a:prstGeom>
+          <a:noFill/>
+        </p:spPr>
+        <p:txBody>
+          <a:bodyPr wrap="square" lIns="0" rIns="0" tIns="0" bIns="0" anchor="t">
+            <a:noAutofit/>
+          </a:bodyPr>
+          <a:lstStyle/>
+          <a:p>
+            <a:pPr algn="r"/>
+            <a:r>
+              <a:rPr sz="1000" b="0" i="0" spc="60">
+                <a:solidFill>
+                  <a:srgbClr val="5A4A3A"/>
+                </a:solidFill>
+                <a:latin typeface="JetBrains Mono Light"/>
+              </a:rPr>
+              <a:t>index + retrieve</a:t>
+            </a:r>
+          </a:p>
+        </p:txBody>
+      </p:sp>
+      <p:sp>
+        <p:nvSpPr>
+          <p:cNvPr id="42" name="TextBox 41"/>
+          <p:cNvSpPr txBox="1"/>
+          <p:nvPr/>
+        </p:nvSpPr>
+        <p:spPr>
+          <a:xfrm>
+            <a:off x="8458200" y="594360"/>
+            <a:ext cx="1554480" cy="256032"/>
+          </a:xfrm>
+          <a:prstGeom prst="rect">
+            <a:avLst/>
+          </a:prstGeom>
+          <a:noFill/>
+        </p:spPr>
+        <p:txBody>
+          <a:bodyPr wrap="square" lIns="0" rIns="0" tIns="0" bIns="0" anchor="t">
+            <a:noAutofit/>
+          </a:bodyPr>
+          <a:lstStyle/>
+          <a:p>
+            <a:pPr algn="r"/>
+            <a:r>
+              <a:rPr sz="1000" b="1" i="0">
+                <a:solidFill>
+                  <a:srgbClr val="1C1410"/>
+                </a:solidFill>
+                <a:latin typeface="JetBrains Mono"/>
+              </a:rPr>
+              <a:t>request flow</a:t>
+            </a:r>
+          </a:p>
+        </p:txBody>
+      </p:sp>
+      <p:sp>
+        <p:nvSpPr>
+          <p:cNvPr id="43" name="TextBox 42"/>
+          <p:cNvSpPr txBox="1"/>
+          <p:nvPr/>
+        </p:nvSpPr>
+        <p:spPr>
+          <a:xfrm>
+            <a:off x="548640" y="5989320"/>
+            <a:ext cx="9601200" cy="292608"/>
+          </a:xfrm>
+          <a:prstGeom prst="rect">
+            <a:avLst/>
+          </a:prstGeom>
+          <a:noFill/>
+        </p:spPr>
+        <p:txBody>
+          <a:bodyPr wrap="square" lIns="0" rIns="0" tIns="0" bIns="0" anchor="t">
+            <a:noAutofit/>
+          </a:bodyPr>
+          <a:lstStyle/>
+          <a:p>
+            <a:pPr algn="l"/>
+            <a:r>
+              <a:rPr sz="1300" b="1" i="0">
+                <a:solidFill>
+                  <a:srgbClr val="1C1410"/>
+                </a:solidFill>
+                <a:latin typeface="JetBrains Mono"/>
+              </a:rPr>
+              <a:t>every provider has a fallback.  every signature verifies offline.</a:t>
+            </a:r>
+          </a:p>
+        </p:txBody>
+      </p:sp>
+      <p:cxnSp>
+        <p:nvCxnSpPr>
+          <p:cNvPr id="44" name="Connector 43"/>
+          <p:cNvCxnSpPr/>
+          <p:nvPr/>
+        </p:nvCxnSpPr>
+        <p:spPr>
+          <a:xfrm>
+            <a:off x="548640" y="6300216"/>
+            <a:ext cx="2377440" cy="0"/>
+          </a:xfrm>
+          <a:prstGeom prst="line">
+            <a:avLst/>
+          </a:prstGeom>
+          <a:ln w="11430">
+            <a:solidFill>
+              <a:srgbClr val="8B1A1A"/>
+            </a:solidFill>
+          </a:ln>
+        </p:spPr>
+        <p:style>
+          <a:lnRef idx="2">
+            <a:schemeClr val="accent1"/>
+          </a:lnRef>
+          <a:fillRef idx="0">
+            <a:schemeClr val="accent1"/>
+          </a:fillRef>
+          <a:effectRef idx="1">
+            <a:schemeClr val="accent1"/>
+          </a:effectRef>
+          <a:fontRef idx="minor">
+            <a:schemeClr val="tx1"/>
+          </a:fontRef>
+        </p:style>
+      </p:cxnSp>
+      <p:sp>
+        <p:nvSpPr>
+          <p:cNvPr id="45" name="TextBox 44"/>
           <p:cNvSpPr txBox="1"/>
           <p:nvPr/>
         </p:nvSpPr>
@@ -9458,7 +9881,7 @@
       </p:sp>
       <p:sp>
         <p:nvSpPr>
-          <p:cNvPr id="39" name="TextBox 38"/>
+          <p:cNvPr id="46" name="TextBox 45"/>
           <p:cNvSpPr txBox="1"/>
           <p:nvPr/>
         </p:nvSpPr>
